--- a/ElectViz_TeamPPT.pptx
+++ b/ElectViz_TeamPPT.pptx
@@ -21,16 +21,18 @@
     <p:sldId id="266" r:id="rId17"/>
     <p:sldId id="267" r:id="rId18"/>
     <p:sldId id="268" r:id="rId19"/>
+    <p:sldId id="269" r:id="rId20"/>
+    <p:sldId id="270" r:id="rId21"/>
   </p:sldIdLst>
   <p:sldSz cy="5143500" cx="9144000"/>
   <p:notesSz cx="6858000" cy="9144000"/>
   <p:embeddedFontLst>
     <p:embeddedFont>
       <p:font typeface="Roboto"/>
-      <p:regular r:id="rId20"/>
-      <p:bold r:id="rId21"/>
-      <p:italic r:id="rId22"/>
-      <p:boldItalic r:id="rId23"/>
+      <p:regular r:id="rId22"/>
+      <p:bold r:id="rId23"/>
+      <p:italic r:id="rId24"/>
+      <p:boldItalic r:id="rId25"/>
     </p:embeddedFont>
   </p:embeddedFontLst>
   <p:defaultTextStyle>
@@ -811,7 +813,7 @@
   <p:cSld>
     <p:spTree>
       <p:nvGrpSpPr>
-        <p:cNvPr id="175" name="Shape 175"/>
+        <p:cNvPr id="212" name="Shape 212"/>
         <p:cNvGrpSpPr/>
         <p:nvPr/>
       </p:nvGrpSpPr>
@@ -825,7 +827,7 @@
       </p:grpSpPr>
       <p:sp>
         <p:nvSpPr>
-          <p:cNvPr id="176" name="Google Shape;176;g3bd617c27d4_0_11:notes"/>
+          <p:cNvPr id="213" name="Google Shape;213;g3bd617c27d4_0_11:notes"/>
           <p:cNvSpPr/>
           <p:nvPr>
             <p:ph idx="2" type="sldImg"/>
@@ -860,7 +862,7 @@
       </p:sp>
       <p:sp>
         <p:nvSpPr>
-          <p:cNvPr id="177" name="Google Shape;177;g3bd617c27d4_0_11:notes"/>
+          <p:cNvPr id="214" name="Google Shape;214;g3bd617c27d4_0_11:notes"/>
           <p:cNvSpPr txBox="1"/>
           <p:nvPr>
             <p:ph idx="1" type="body"/>
@@ -910,7 +912,7 @@
   <p:cSld>
     <p:spTree>
       <p:nvGrpSpPr>
-        <p:cNvPr id="181" name="Shape 181"/>
+        <p:cNvPr id="218" name="Shape 218"/>
         <p:cNvGrpSpPr/>
         <p:nvPr/>
       </p:nvGrpSpPr>
@@ -924,7 +926,7 @@
       </p:grpSpPr>
       <p:sp>
         <p:nvSpPr>
-          <p:cNvPr id="182" name="Google Shape;182;g3bc8ab441a6_0_96:notes"/>
+          <p:cNvPr id="219" name="Google Shape;219;g3bc8ab441a6_0_96:notes"/>
           <p:cNvSpPr/>
           <p:nvPr>
             <p:ph idx="2" type="sldImg"/>
@@ -959,7 +961,7 @@
       </p:sp>
       <p:sp>
         <p:nvSpPr>
-          <p:cNvPr id="183" name="Google Shape;183;g3bc8ab441a6_0_96:notes"/>
+          <p:cNvPr id="220" name="Google Shape;220;g3bc8ab441a6_0_96:notes"/>
           <p:cNvSpPr txBox="1"/>
           <p:nvPr>
             <p:ph idx="1" type="body"/>
@@ -1009,7 +1011,7 @@
   <p:cSld>
     <p:spTree>
       <p:nvGrpSpPr>
-        <p:cNvPr id="187" name="Shape 187"/>
+        <p:cNvPr id="224" name="Shape 224"/>
         <p:cNvGrpSpPr/>
         <p:nvPr/>
       </p:nvGrpSpPr>
@@ -1023,7 +1025,7 @@
       </p:grpSpPr>
       <p:sp>
         <p:nvSpPr>
-          <p:cNvPr id="188" name="Google Shape;188;g3bc8ab441a6_0_101:notes"/>
+          <p:cNvPr id="225" name="Google Shape;225;g3bc8ab441a6_0_101:notes"/>
           <p:cNvSpPr/>
           <p:nvPr>
             <p:ph idx="2" type="sldImg"/>
@@ -1058,7 +1060,7 @@
       </p:sp>
       <p:sp>
         <p:nvSpPr>
-          <p:cNvPr id="189" name="Google Shape;189;g3bc8ab441a6_0_101:notes"/>
+          <p:cNvPr id="226" name="Google Shape;226;g3bc8ab441a6_0_101:notes"/>
           <p:cNvSpPr txBox="1"/>
           <p:nvPr>
             <p:ph idx="1" type="body"/>
@@ -1108,7 +1110,7 @@
   <p:cSld>
     <p:spTree>
       <p:nvGrpSpPr>
-        <p:cNvPr id="195" name="Shape 195"/>
+        <p:cNvPr id="232" name="Shape 232"/>
         <p:cNvGrpSpPr/>
         <p:nvPr/>
       </p:nvGrpSpPr>
@@ -1122,7 +1124,7 @@
       </p:grpSpPr>
       <p:sp>
         <p:nvSpPr>
-          <p:cNvPr id="196" name="Google Shape;196;g3bc8ab441a6_0_106:notes"/>
+          <p:cNvPr id="233" name="Google Shape;233;g3bc8ab441a6_0_106:notes"/>
           <p:cNvSpPr/>
           <p:nvPr>
             <p:ph idx="2" type="sldImg"/>
@@ -1157,7 +1159,205 @@
       </p:sp>
       <p:sp>
         <p:nvSpPr>
-          <p:cNvPr id="197" name="Google Shape;197;g3bc8ab441a6_0_106:notes"/>
+          <p:cNvPr id="234" name="Google Shape;234;g3bc8ab441a6_0_106:notes"/>
+          <p:cNvSpPr txBox="1"/>
+          <p:nvPr>
+            <p:ph idx="1" type="body"/>
+          </p:nvPr>
+        </p:nvSpPr>
+        <p:spPr>
+          <a:xfrm>
+            <a:off x="685800" y="4343400"/>
+            <a:ext cx="5486400" cy="4114800"/>
+          </a:xfrm>
+          <a:prstGeom prst="rect">
+            <a:avLst/>
+          </a:prstGeom>
+        </p:spPr>
+        <p:txBody>
+          <a:bodyPr anchorCtr="0" anchor="t" bIns="91425" lIns="91425" spcFirstLastPara="1" rIns="91425" wrap="square" tIns="91425">
+            <a:noAutofit/>
+          </a:bodyPr>
+          <a:lstStyle/>
+          <a:p>
+            <a:pPr indent="0" lvl="0" marL="0" rtl="0" algn="l">
+              <a:spcBef>
+                <a:spcPts val="0"/>
+              </a:spcBef>
+              <a:spcAft>
+                <a:spcPts val="0"/>
+              </a:spcAft>
+              <a:buNone/>
+            </a:pPr>
+            <a:r>
+              <a:t/>
+            </a:r>
+            <a:endParaRPr/>
+          </a:p>
+        </p:txBody>
+      </p:sp>
+    </p:spTree>
+  </p:cSld>
+  <p:clrMapOvr>
+    <a:masterClrMapping/>
+  </p:clrMapOvr>
+</p:notes>
+</file>
+
+<file path=ppt/notesSlides/notesSlide14.xml><?xml version="1.0" encoding="utf-8"?>
+<p:notes xmlns:a="http://schemas.openxmlformats.org/drawingml/2006/main" xmlns:r="http://schemas.openxmlformats.org/officeDocument/2006/relationships" xmlns:mc="http://schemas.openxmlformats.org/markup-compatibility/2006" xmlns:mv="urn:schemas-microsoft-com:mac:vml" xmlns:p="http://schemas.openxmlformats.org/presentationml/2006/main" xmlns:c="http://schemas.openxmlformats.org/drawingml/2006/chart" xmlns:dgm="http://schemas.openxmlformats.org/drawingml/2006/diagram" xmlns:o="urn:schemas-microsoft-com:office:office" xmlns:v="urn:schemas-microsoft-com:vml" xmlns:pvml="urn:schemas-microsoft-com:office:powerpoint" xmlns:com="http://schemas.openxmlformats.org/drawingml/2006/compatibility" xmlns:p14="http://schemas.microsoft.com/office/powerpoint/2010/main" xmlns:p15="http://schemas.microsoft.com/office/powerpoint/2012/main" xmlns:ahyp="http://schemas.microsoft.com/office/drawing/2018/hyperlinkcolor" showMasterPhAnim="0" showMasterSp="0">
+  <p:cSld>
+    <p:spTree>
+      <p:nvGrpSpPr>
+        <p:cNvPr id="237" name="Shape 237"/>
+        <p:cNvGrpSpPr/>
+        <p:nvPr/>
+      </p:nvGrpSpPr>
+      <p:grpSpPr>
+        <a:xfrm>
+          <a:off x="0" y="0"/>
+          <a:ext cx="0" cy="0"/>
+          <a:chOff x="0" y="0"/>
+          <a:chExt cx="0" cy="0"/>
+        </a:xfrm>
+      </p:grpSpPr>
+      <p:sp>
+        <p:nvSpPr>
+          <p:cNvPr id="238" name="Google Shape;238;g3bc8ab441a6_0_81:notes"/>
+          <p:cNvSpPr/>
+          <p:nvPr>
+            <p:ph idx="2" type="sldImg"/>
+          </p:nvPr>
+        </p:nvSpPr>
+        <p:spPr>
+          <a:xfrm>
+            <a:off x="381300" y="685800"/>
+            <a:ext cx="6096000" cy="3429000"/>
+          </a:xfrm>
+          <a:custGeom>
+            <a:rect b="b" l="l" r="r" t="t"/>
+            <a:pathLst>
+              <a:path extrusionOk="0" h="120000" w="120000">
+                <a:moveTo>
+                  <a:pt x="0" y="0"/>
+                </a:moveTo>
+                <a:lnTo>
+                  <a:pt x="120000" y="0"/>
+                </a:lnTo>
+                <a:lnTo>
+                  <a:pt x="120000" y="120000"/>
+                </a:lnTo>
+                <a:lnTo>
+                  <a:pt x="0" y="120000"/>
+                </a:lnTo>
+                <a:close/>
+              </a:path>
+            </a:pathLst>
+          </a:custGeom>
+        </p:spPr>
+      </p:sp>
+      <p:sp>
+        <p:nvSpPr>
+          <p:cNvPr id="239" name="Google Shape;239;g3bc8ab441a6_0_81:notes"/>
+          <p:cNvSpPr txBox="1"/>
+          <p:nvPr>
+            <p:ph idx="1" type="body"/>
+          </p:nvPr>
+        </p:nvSpPr>
+        <p:spPr>
+          <a:xfrm>
+            <a:off x="685800" y="4343400"/>
+            <a:ext cx="5486400" cy="4114800"/>
+          </a:xfrm>
+          <a:prstGeom prst="rect">
+            <a:avLst/>
+          </a:prstGeom>
+        </p:spPr>
+        <p:txBody>
+          <a:bodyPr anchorCtr="0" anchor="t" bIns="91425" lIns="91425" spcFirstLastPara="1" rIns="91425" wrap="square" tIns="91425">
+            <a:noAutofit/>
+          </a:bodyPr>
+          <a:lstStyle/>
+          <a:p>
+            <a:pPr indent="0" lvl="0" marL="0" rtl="0" algn="l">
+              <a:spcBef>
+                <a:spcPts val="0"/>
+              </a:spcBef>
+              <a:spcAft>
+                <a:spcPts val="0"/>
+              </a:spcAft>
+              <a:buNone/>
+            </a:pPr>
+            <a:r>
+              <a:t/>
+            </a:r>
+            <a:endParaRPr/>
+          </a:p>
+        </p:txBody>
+      </p:sp>
+    </p:spTree>
+  </p:cSld>
+  <p:clrMapOvr>
+    <a:masterClrMapping/>
+  </p:clrMapOvr>
+</p:notes>
+</file>
+
+<file path=ppt/notesSlides/notesSlide15.xml><?xml version="1.0" encoding="utf-8"?>
+<p:notes xmlns:a="http://schemas.openxmlformats.org/drawingml/2006/main" xmlns:r="http://schemas.openxmlformats.org/officeDocument/2006/relationships" xmlns:mc="http://schemas.openxmlformats.org/markup-compatibility/2006" xmlns:mv="urn:schemas-microsoft-com:mac:vml" xmlns:p="http://schemas.openxmlformats.org/presentationml/2006/main" xmlns:c="http://schemas.openxmlformats.org/drawingml/2006/chart" xmlns:dgm="http://schemas.openxmlformats.org/drawingml/2006/diagram" xmlns:o="urn:schemas-microsoft-com:office:office" xmlns:v="urn:schemas-microsoft-com:vml" xmlns:pvml="urn:schemas-microsoft-com:office:powerpoint" xmlns:com="http://schemas.openxmlformats.org/drawingml/2006/compatibility" xmlns:p14="http://schemas.microsoft.com/office/powerpoint/2010/main" xmlns:p15="http://schemas.microsoft.com/office/powerpoint/2012/main" xmlns:ahyp="http://schemas.microsoft.com/office/drawing/2018/hyperlinkcolor" showMasterPhAnim="0" showMasterSp="0">
+  <p:cSld>
+    <p:spTree>
+      <p:nvGrpSpPr>
+        <p:cNvPr id="243" name="Shape 243"/>
+        <p:cNvGrpSpPr/>
+        <p:nvPr/>
+      </p:nvGrpSpPr>
+      <p:grpSpPr>
+        <a:xfrm>
+          <a:off x="0" y="0"/>
+          <a:ext cx="0" cy="0"/>
+          <a:chOff x="0" y="0"/>
+          <a:chExt cx="0" cy="0"/>
+        </a:xfrm>
+      </p:grpSpPr>
+      <p:sp>
+        <p:nvSpPr>
+          <p:cNvPr id="244" name="Google Shape;244;g3bf153cf9ed_0_0:notes"/>
+          <p:cNvSpPr/>
+          <p:nvPr>
+            <p:ph idx="2" type="sldImg"/>
+          </p:nvPr>
+        </p:nvSpPr>
+        <p:spPr>
+          <a:xfrm>
+            <a:off x="381300" y="685800"/>
+            <a:ext cx="6096000" cy="3429000"/>
+          </a:xfrm>
+          <a:custGeom>
+            <a:rect b="b" l="l" r="r" t="t"/>
+            <a:pathLst>
+              <a:path extrusionOk="0" h="120000" w="120000">
+                <a:moveTo>
+                  <a:pt x="0" y="0"/>
+                </a:moveTo>
+                <a:lnTo>
+                  <a:pt x="120000" y="0"/>
+                </a:lnTo>
+                <a:lnTo>
+                  <a:pt x="120000" y="120000"/>
+                </a:lnTo>
+                <a:lnTo>
+                  <a:pt x="0" y="120000"/>
+                </a:lnTo>
+                <a:close/>
+              </a:path>
+            </a:pathLst>
+          </a:custGeom>
+        </p:spPr>
+      </p:sp>
+      <p:sp>
+        <p:nvSpPr>
+          <p:cNvPr id="245" name="Google Shape;245;g3bf153cf9ed_0_0:notes"/>
           <p:cNvSpPr txBox="1"/>
           <p:nvPr>
             <p:ph idx="1" type="body"/>
@@ -1419,7 +1619,7 @@
       </p:grpSpPr>
       <p:sp>
         <p:nvSpPr>
-          <p:cNvPr id="100" name="Google Shape;100;g3bc8ab441a6_0_81:notes"/>
+          <p:cNvPr id="100" name="Google Shape;100;g3c6ad67adee_0_0:notes"/>
           <p:cNvSpPr/>
           <p:nvPr>
             <p:ph idx="2" type="sldImg"/>
@@ -1454,7 +1654,7 @@
       </p:sp>
       <p:sp>
         <p:nvSpPr>
-          <p:cNvPr id="101" name="Google Shape;101;g3bc8ab441a6_0_81:notes"/>
+          <p:cNvPr id="101" name="Google Shape;101;g3c6ad67adee_0_0:notes"/>
           <p:cNvSpPr txBox="1"/>
           <p:nvPr>
             <p:ph idx="1" type="body"/>
@@ -1504,7 +1704,7 @@
   <p:cSld>
     <p:spTree>
       <p:nvGrpSpPr>
-        <p:cNvPr id="105" name="Shape 105"/>
+        <p:cNvPr id="139" name="Shape 139"/>
         <p:cNvGrpSpPr/>
         <p:nvPr/>
       </p:nvGrpSpPr>
@@ -1518,7 +1718,7 @@
       </p:grpSpPr>
       <p:sp>
         <p:nvSpPr>
-          <p:cNvPr id="106" name="Google Shape;106;g3c6ad67adee_0_0:notes"/>
+          <p:cNvPr id="140" name="Google Shape;140;g3bef3d3c229_0_5:notes"/>
           <p:cNvSpPr/>
           <p:nvPr>
             <p:ph idx="2" type="sldImg"/>
@@ -1553,7 +1753,7 @@
       </p:sp>
       <p:sp>
         <p:nvSpPr>
-          <p:cNvPr id="107" name="Google Shape;107;g3c6ad67adee_0_0:notes"/>
+          <p:cNvPr id="141" name="Google Shape;141;g3bef3d3c229_0_5:notes"/>
           <p:cNvSpPr txBox="1"/>
           <p:nvPr>
             <p:ph idx="1" type="body"/>
@@ -1603,7 +1803,7 @@
   <p:cSld>
     <p:spTree>
       <p:nvGrpSpPr>
-        <p:cNvPr id="145" name="Shape 145"/>
+        <p:cNvPr id="181" name="Shape 181"/>
         <p:cNvGrpSpPr/>
         <p:nvPr/>
       </p:nvGrpSpPr>
@@ -1617,7 +1817,7 @@
       </p:grpSpPr>
       <p:sp>
         <p:nvSpPr>
-          <p:cNvPr id="146" name="Google Shape;146;g3bd9592cb7e_0_1:notes"/>
+          <p:cNvPr id="182" name="Google Shape;182;g3bd9592cb7e_0_1:notes"/>
           <p:cNvSpPr/>
           <p:nvPr>
             <p:ph idx="2" type="sldImg"/>
@@ -1652,7 +1852,7 @@
       </p:sp>
       <p:sp>
         <p:nvSpPr>
-          <p:cNvPr id="147" name="Google Shape;147;g3bd9592cb7e_0_1:notes"/>
+          <p:cNvPr id="183" name="Google Shape;183;g3bd9592cb7e_0_1:notes"/>
           <p:cNvSpPr txBox="1"/>
           <p:nvPr>
             <p:ph idx="1" type="body"/>
@@ -1702,7 +1902,7 @@
   <p:cSld>
     <p:spTree>
       <p:nvGrpSpPr>
-        <p:cNvPr id="154" name="Shape 154"/>
+        <p:cNvPr id="191" name="Shape 191"/>
         <p:cNvGrpSpPr/>
         <p:nvPr/>
       </p:nvGrpSpPr>
@@ -1716,7 +1916,7 @@
       </p:grpSpPr>
       <p:sp>
         <p:nvSpPr>
-          <p:cNvPr id="155" name="Google Shape;155;g3bd9592cb7e_0_840:notes"/>
+          <p:cNvPr id="192" name="Google Shape;192;g3bd9592cb7e_0_840:notes"/>
           <p:cNvSpPr/>
           <p:nvPr>
             <p:ph idx="2" type="sldImg"/>
@@ -1751,7 +1951,7 @@
       </p:sp>
       <p:sp>
         <p:nvSpPr>
-          <p:cNvPr id="156" name="Google Shape;156;g3bd9592cb7e_0_840:notes"/>
+          <p:cNvPr id="193" name="Google Shape;193;g3bd9592cb7e_0_840:notes"/>
           <p:cNvSpPr txBox="1"/>
           <p:nvPr>
             <p:ph idx="1" type="body"/>
@@ -1801,7 +2001,7 @@
   <p:cSld>
     <p:spTree>
       <p:nvGrpSpPr>
-        <p:cNvPr id="163" name="Shape 163"/>
+        <p:cNvPr id="200" name="Shape 200"/>
         <p:cNvGrpSpPr/>
         <p:nvPr/>
       </p:nvGrpSpPr>
@@ -1815,7 +2015,7 @@
       </p:grpSpPr>
       <p:sp>
         <p:nvSpPr>
-          <p:cNvPr id="164" name="Google Shape;164;g3bd9592cb7e_1_2:notes"/>
+          <p:cNvPr id="201" name="Google Shape;201;g3bd9592cb7e_1_2:notes"/>
           <p:cNvSpPr/>
           <p:nvPr>
             <p:ph idx="2" type="sldImg"/>
@@ -1850,7 +2050,7 @@
       </p:sp>
       <p:sp>
         <p:nvSpPr>
-          <p:cNvPr id="165" name="Google Shape;165;g3bd9592cb7e_1_2:notes"/>
+          <p:cNvPr id="202" name="Google Shape;202;g3bd9592cb7e_1_2:notes"/>
           <p:cNvSpPr txBox="1"/>
           <p:nvPr>
             <p:ph idx="1" type="body"/>
@@ -1900,7 +2100,7 @@
   <p:cSld>
     <p:spTree>
       <p:nvGrpSpPr>
-        <p:cNvPr id="170" name="Shape 170"/>
+        <p:cNvPr id="207" name="Shape 207"/>
         <p:cNvGrpSpPr/>
         <p:nvPr/>
       </p:nvGrpSpPr>
@@ -1914,7 +2114,7 @@
       </p:grpSpPr>
       <p:sp>
         <p:nvSpPr>
-          <p:cNvPr id="171" name="Google Shape;171;g3bc8ab441a6_0_91:notes"/>
+          <p:cNvPr id="208" name="Google Shape;208;g3bc8ab441a6_0_91:notes"/>
           <p:cNvSpPr/>
           <p:nvPr>
             <p:ph idx="2" type="sldImg"/>
@@ -1949,7 +2149,7 @@
       </p:sp>
       <p:sp>
         <p:nvSpPr>
-          <p:cNvPr id="172" name="Google Shape;172;g3bc8ab441a6_0_91:notes"/>
+          <p:cNvPr id="209" name="Google Shape;209;g3bc8ab441a6_0_91:notes"/>
           <p:cNvSpPr txBox="1"/>
           <p:nvPr>
             <p:ph idx="1" type="body"/>
@@ -8630,7 +8830,7 @@
         </p:spPr>
         <p:txBody>
           <a:bodyPr anchorCtr="0" anchor="b" bIns="91425" lIns="91425" spcFirstLastPara="1" rIns="91425" wrap="square" tIns="91425">
-            <a:normAutofit fontScale="90000"/>
+            <a:normAutofit/>
           </a:bodyPr>
           <a:lstStyle/>
           <a:p>
@@ -8644,10 +8844,10 @@
               <a:buNone/>
             </a:pPr>
             <a:r>
-              <a:rPr lang="en"/>
-              <a:t>Infosys SpringBoard Virtual Internship - ElectViz Election data Visualization for Media</a:t>
+              <a:rPr lang="en" sz="3600"/>
+              <a:t>Infosys SpringBoard Virtual Internship Batch 11 Group 1 - ElectViz Election Data Visualization for Media</a:t>
             </a:r>
-            <a:endParaRPr/>
+            <a:endParaRPr sz="3600"/>
           </a:p>
         </p:txBody>
       </p:sp>
@@ -8712,7 +8912,7 @@
             <a:endParaRPr/>
           </a:p>
           <a:p>
-            <a:pPr indent="0" lvl="0" marL="0" rtl="0" algn="l">
+            <a:pPr indent="0" lvl="0" marL="0" rtl="0" algn="ctr">
               <a:lnSpc>
                 <a:spcPct val="100000"/>
               </a:lnSpc>
@@ -8725,7 +8925,8 @@
               <a:buNone/>
             </a:pPr>
             <a:r>
-              <a:t/>
+              <a:rPr lang="en"/>
+              <a:t>                                                                              </a:t>
             </a:r>
             <a:endParaRPr/>
           </a:p>
@@ -8744,7 +8945,15 @@
             </a:pPr>
             <a:r>
               <a:rPr lang="en"/>
-              <a:t>                                                                                 Interns :</a:t>
+              <a:t>                                                                                 Interns (</a:t>
+            </a:r>
+            <a:r>
+              <a:rPr lang="en"/>
+              <a:t>Team B)</a:t>
+            </a:r>
+            <a:r>
+              <a:rPr lang="en"/>
+              <a:t>:</a:t>
             </a:r>
             <a:endParaRPr/>
           </a:p>
@@ -8838,7 +9047,7 @@
   <p:cSld>
     <p:spTree>
       <p:nvGrpSpPr>
-        <p:cNvPr id="178" name="Shape 178"/>
+        <p:cNvPr id="215" name="Shape 215"/>
         <p:cNvGrpSpPr/>
         <p:nvPr/>
       </p:nvGrpSpPr>
@@ -8852,7 +9061,7 @@
       </p:grpSpPr>
       <p:sp>
         <p:nvSpPr>
-          <p:cNvPr id="179" name="Google Shape;179;p22"/>
+          <p:cNvPr id="216" name="Google Shape;216;p22"/>
           <p:cNvSpPr txBox="1"/>
           <p:nvPr>
             <p:ph type="title"/>
@@ -8902,7 +9111,7 @@
       </p:sp>
       <p:sp>
         <p:nvSpPr>
-          <p:cNvPr id="180" name="Google Shape;180;p22"/>
+          <p:cNvPr id="217" name="Google Shape;217;p22"/>
           <p:cNvSpPr txBox="1"/>
           <p:nvPr>
             <p:ph idx="1" type="body"/>
@@ -9232,7 +9441,7 @@
   <p:cSld>
     <p:spTree>
       <p:nvGrpSpPr>
-        <p:cNvPr id="184" name="Shape 184"/>
+        <p:cNvPr id="221" name="Shape 221"/>
         <p:cNvGrpSpPr/>
         <p:nvPr/>
       </p:nvGrpSpPr>
@@ -9246,7 +9455,7 @@
       </p:grpSpPr>
       <p:sp>
         <p:nvSpPr>
-          <p:cNvPr id="185" name="Google Shape;185;p23"/>
+          <p:cNvPr id="222" name="Google Shape;222;p23"/>
           <p:cNvSpPr txBox="1"/>
           <p:nvPr>
             <p:ph type="title"/>
@@ -9296,7 +9505,7 @@
       </p:sp>
       <p:sp>
         <p:nvSpPr>
-          <p:cNvPr id="186" name="Google Shape;186;p23"/>
+          <p:cNvPr id="223" name="Google Shape;223;p23"/>
           <p:cNvSpPr txBox="1"/>
           <p:nvPr>
             <p:ph idx="1" type="body"/>
@@ -9376,7 +9585,7 @@
   <p:cSld>
     <p:spTree>
       <p:nvGrpSpPr>
-        <p:cNvPr id="190" name="Shape 190"/>
+        <p:cNvPr id="227" name="Shape 227"/>
         <p:cNvGrpSpPr/>
         <p:nvPr/>
       </p:nvGrpSpPr>
@@ -9390,7 +9599,7 @@
       </p:grpSpPr>
       <p:sp>
         <p:nvSpPr>
-          <p:cNvPr id="191" name="Google Shape;191;p24"/>
+          <p:cNvPr id="228" name="Google Shape;228;p24"/>
           <p:cNvSpPr txBox="1"/>
           <p:nvPr>
             <p:ph type="title"/>
@@ -9440,7 +9649,7 @@
       </p:sp>
       <p:sp>
         <p:nvSpPr>
-          <p:cNvPr id="192" name="Google Shape;192;p24"/>
+          <p:cNvPr id="229" name="Google Shape;229;p24"/>
           <p:cNvSpPr txBox="1"/>
           <p:nvPr>
             <p:ph idx="1" type="body"/>
@@ -9844,7 +10053,7 @@
       </p:sp>
       <p:sp>
         <p:nvSpPr>
-          <p:cNvPr id="193" name="Google Shape;193;p24"/>
+          <p:cNvPr id="230" name="Google Shape;230;p24"/>
           <p:cNvSpPr txBox="1"/>
           <p:nvPr>
             <p:ph type="title"/>
@@ -9894,7 +10103,7 @@
       </p:sp>
       <p:sp>
         <p:nvSpPr>
-          <p:cNvPr id="194" name="Google Shape;194;p24"/>
+          <p:cNvPr id="231" name="Google Shape;231;p24"/>
           <p:cNvSpPr txBox="1"/>
           <p:nvPr>
             <p:ph idx="1" type="body"/>
@@ -10133,7 +10342,7 @@
   <p:cSld>
     <p:spTree>
       <p:nvGrpSpPr>
-        <p:cNvPr id="198" name="Shape 198"/>
+        <p:cNvPr id="235" name="Shape 235"/>
         <p:cNvGrpSpPr/>
         <p:nvPr/>
       </p:nvGrpSpPr>
@@ -10147,7 +10356,7 @@
       </p:grpSpPr>
       <p:sp>
         <p:nvSpPr>
-          <p:cNvPr id="199" name="Google Shape;199;p25"/>
+          <p:cNvPr id="236" name="Google Shape;236;p25"/>
           <p:cNvSpPr txBox="1"/>
           <p:nvPr>
             <p:ph type="title"/>
@@ -10192,6 +10401,1157 @@
               <a:ea typeface="Times New Roman"/>
               <a:cs typeface="Times New Roman"/>
               <a:sym typeface="Times New Roman"/>
+            </a:endParaRPr>
+          </a:p>
+        </p:txBody>
+      </p:sp>
+    </p:spTree>
+  </p:cSld>
+  <p:clrMapOvr>
+    <a:masterClrMapping/>
+  </p:clrMapOvr>
+</p:sld>
+</file>
+
+<file path=ppt/slides/slide14.xml><?xml version="1.0" encoding="utf-8"?>
+<p:sld xmlns:a="http://schemas.openxmlformats.org/drawingml/2006/main" xmlns:r="http://schemas.openxmlformats.org/officeDocument/2006/relationships" xmlns:mc="http://schemas.openxmlformats.org/markup-compatibility/2006" xmlns:mv="urn:schemas-microsoft-com:mac:vml" xmlns:p="http://schemas.openxmlformats.org/presentationml/2006/main" xmlns:c="http://schemas.openxmlformats.org/drawingml/2006/chart" xmlns:dgm="http://schemas.openxmlformats.org/drawingml/2006/diagram" xmlns:o="urn:schemas-microsoft-com:office:office" xmlns:v="urn:schemas-microsoft-com:vml" xmlns:pvml="urn:schemas-microsoft-com:office:powerpoint" xmlns:com="http://schemas.openxmlformats.org/drawingml/2006/compatibility" xmlns:p14="http://schemas.microsoft.com/office/powerpoint/2010/main" xmlns:p15="http://schemas.microsoft.com/office/powerpoint/2012/main" xmlns:ahyp="http://schemas.microsoft.com/office/drawing/2018/hyperlinkcolor">
+  <p:cSld>
+    <p:spTree>
+      <p:nvGrpSpPr>
+        <p:cNvPr id="240" name="Shape 240"/>
+        <p:cNvGrpSpPr/>
+        <p:nvPr/>
+      </p:nvGrpSpPr>
+      <p:grpSpPr>
+        <a:xfrm>
+          <a:off x="0" y="0"/>
+          <a:ext cx="0" cy="0"/>
+          <a:chOff x="0" y="0"/>
+          <a:chExt cx="0" cy="0"/>
+        </a:xfrm>
+      </p:grpSpPr>
+      <p:sp>
+        <p:nvSpPr>
+          <p:cNvPr id="241" name="Google Shape;241;p26"/>
+          <p:cNvSpPr txBox="1"/>
+          <p:nvPr>
+            <p:ph type="title"/>
+          </p:nvPr>
+        </p:nvSpPr>
+        <p:spPr>
+          <a:xfrm>
+            <a:off x="311700" y="410000"/>
+            <a:ext cx="8520600" cy="607800"/>
+          </a:xfrm>
+          <a:prstGeom prst="rect">
+            <a:avLst/>
+          </a:prstGeom>
+        </p:spPr>
+        <p:txBody>
+          <a:bodyPr anchorCtr="0" anchor="t" bIns="91425" lIns="91425" spcFirstLastPara="1" rIns="91425" wrap="square" tIns="91425">
+            <a:normAutofit fontScale="90000"/>
+          </a:bodyPr>
+          <a:lstStyle/>
+          <a:p>
+            <a:pPr indent="0" lvl="0" marL="0" rtl="0" algn="l">
+              <a:spcBef>
+                <a:spcPts val="0"/>
+              </a:spcBef>
+              <a:spcAft>
+                <a:spcPts val="0"/>
+              </a:spcAft>
+              <a:buNone/>
+            </a:pPr>
+            <a:r>
+              <a:rPr b="1" lang="en">
+                <a:latin typeface="Times New Roman"/>
+                <a:ea typeface="Times New Roman"/>
+                <a:cs typeface="Times New Roman"/>
+                <a:sym typeface="Times New Roman"/>
+              </a:rPr>
+              <a:t>Milestones</a:t>
+            </a:r>
+            <a:endParaRPr b="1">
+              <a:latin typeface="Times New Roman"/>
+              <a:ea typeface="Times New Roman"/>
+              <a:cs typeface="Times New Roman"/>
+              <a:sym typeface="Times New Roman"/>
+            </a:endParaRPr>
+          </a:p>
+        </p:txBody>
+      </p:sp>
+      <p:sp>
+        <p:nvSpPr>
+          <p:cNvPr id="242" name="Google Shape;242;p26"/>
+          <p:cNvSpPr txBox="1"/>
+          <p:nvPr>
+            <p:ph idx="1" type="body"/>
+          </p:nvPr>
+        </p:nvSpPr>
+        <p:spPr>
+          <a:xfrm>
+            <a:off x="186900" y="1229875"/>
+            <a:ext cx="8799300" cy="3539700"/>
+          </a:xfrm>
+          <a:prstGeom prst="rect">
+            <a:avLst/>
+          </a:prstGeom>
+        </p:spPr>
+        <p:txBody>
+          <a:bodyPr anchorCtr="0" anchor="t" bIns="91425" lIns="91425" spcFirstLastPara="1" rIns="91425" wrap="square" tIns="91425">
+            <a:normAutofit/>
+          </a:bodyPr>
+          <a:lstStyle/>
+          <a:p>
+            <a:pPr indent="0" lvl="0" marL="0" rtl="0" algn="l">
+              <a:spcBef>
+                <a:spcPts val="0"/>
+              </a:spcBef>
+              <a:spcAft>
+                <a:spcPts val="0"/>
+              </a:spcAft>
+              <a:buNone/>
+            </a:pPr>
+            <a:r>
+              <a:rPr lang="en">
+                <a:latin typeface="Times New Roman"/>
+                <a:ea typeface="Times New Roman"/>
+                <a:cs typeface="Times New Roman"/>
+                <a:sym typeface="Times New Roman"/>
+              </a:rPr>
+              <a:t>This project is developed using 4 milestones:</a:t>
+            </a:r>
+            <a:endParaRPr>
+              <a:latin typeface="Times New Roman"/>
+              <a:ea typeface="Times New Roman"/>
+              <a:cs typeface="Times New Roman"/>
+              <a:sym typeface="Times New Roman"/>
+            </a:endParaRPr>
+          </a:p>
+          <a:p>
+            <a:pPr indent="0" lvl="0" marL="0" rtl="0" algn="l">
+              <a:spcBef>
+                <a:spcPts val="1200"/>
+              </a:spcBef>
+              <a:spcAft>
+                <a:spcPts val="0"/>
+              </a:spcAft>
+              <a:buNone/>
+            </a:pPr>
+            <a:r>
+              <a:rPr b="1" lang="en">
+                <a:latin typeface="Times New Roman"/>
+                <a:ea typeface="Times New Roman"/>
+                <a:cs typeface="Times New Roman"/>
+                <a:sym typeface="Times New Roman"/>
+              </a:rPr>
+              <a:t>Milestone 1:</a:t>
+            </a:r>
+            <a:r>
+              <a:rPr lang="en">
+                <a:latin typeface="Times New Roman"/>
+                <a:ea typeface="Times New Roman"/>
+                <a:cs typeface="Times New Roman"/>
+                <a:sym typeface="Times New Roman"/>
+              </a:rPr>
+              <a:t> Team works in Data Collection and Preprocessing .</a:t>
+            </a:r>
+            <a:endParaRPr>
+              <a:latin typeface="Times New Roman"/>
+              <a:ea typeface="Times New Roman"/>
+              <a:cs typeface="Times New Roman"/>
+              <a:sym typeface="Times New Roman"/>
+            </a:endParaRPr>
+          </a:p>
+          <a:p>
+            <a:pPr indent="0" lvl="0" marL="0" rtl="0" algn="l">
+              <a:spcBef>
+                <a:spcPts val="1200"/>
+              </a:spcBef>
+              <a:spcAft>
+                <a:spcPts val="0"/>
+              </a:spcAft>
+              <a:buNone/>
+            </a:pPr>
+            <a:r>
+              <a:rPr b="1" lang="en">
+                <a:latin typeface="Times New Roman"/>
+                <a:ea typeface="Times New Roman"/>
+                <a:cs typeface="Times New Roman"/>
+                <a:sym typeface="Times New Roman"/>
+              </a:rPr>
+              <a:t>Milestone 2 :</a:t>
+            </a:r>
+            <a:r>
+              <a:rPr lang="en">
+                <a:latin typeface="Times New Roman"/>
+                <a:ea typeface="Times New Roman"/>
+                <a:cs typeface="Times New Roman"/>
+                <a:sym typeface="Times New Roman"/>
+              </a:rPr>
+              <a:t>Dashboard creation started , three dashboard are created i.e., election overview , party performance analysis and distribution of parliamentary constituency type.</a:t>
+            </a:r>
+            <a:endParaRPr>
+              <a:latin typeface="Times New Roman"/>
+              <a:ea typeface="Times New Roman"/>
+              <a:cs typeface="Times New Roman"/>
+              <a:sym typeface="Times New Roman"/>
+            </a:endParaRPr>
+          </a:p>
+          <a:p>
+            <a:pPr indent="0" lvl="0" marL="0" rtl="0" algn="l">
+              <a:spcBef>
+                <a:spcPts val="1200"/>
+              </a:spcBef>
+              <a:spcAft>
+                <a:spcPts val="0"/>
+              </a:spcAft>
+              <a:buNone/>
+            </a:pPr>
+            <a:r>
+              <a:rPr b="1" lang="en">
+                <a:latin typeface="Times New Roman"/>
+                <a:ea typeface="Times New Roman"/>
+                <a:cs typeface="Times New Roman"/>
+                <a:sym typeface="Times New Roman"/>
+              </a:rPr>
+              <a:t>Milestone 3</a:t>
+            </a:r>
+            <a:r>
+              <a:rPr lang="en">
+                <a:latin typeface="Times New Roman"/>
+                <a:ea typeface="Times New Roman"/>
+                <a:cs typeface="Times New Roman"/>
+                <a:sym typeface="Times New Roman"/>
+              </a:rPr>
+              <a:t>:Two Dashboard are created on </a:t>
+            </a:r>
+            <a:r>
+              <a:rPr lang="en">
+                <a:latin typeface="Times New Roman"/>
+                <a:ea typeface="Times New Roman"/>
+                <a:cs typeface="Times New Roman"/>
+                <a:sym typeface="Times New Roman"/>
+              </a:rPr>
+              <a:t>year wise analysis and state wise analysis.</a:t>
+            </a:r>
+            <a:endParaRPr>
+              <a:latin typeface="Times New Roman"/>
+              <a:ea typeface="Times New Roman"/>
+              <a:cs typeface="Times New Roman"/>
+              <a:sym typeface="Times New Roman"/>
+            </a:endParaRPr>
+          </a:p>
+          <a:p>
+            <a:pPr indent="0" lvl="0" marL="0" rtl="0" algn="l">
+              <a:spcBef>
+                <a:spcPts val="1200"/>
+              </a:spcBef>
+              <a:spcAft>
+                <a:spcPts val="1200"/>
+              </a:spcAft>
+              <a:buNone/>
+            </a:pPr>
+            <a:r>
+              <a:rPr b="1" lang="en">
+                <a:latin typeface="Times New Roman"/>
+                <a:ea typeface="Times New Roman"/>
+                <a:cs typeface="Times New Roman"/>
+                <a:sym typeface="Times New Roman"/>
+              </a:rPr>
+              <a:t>Milestone 4:</a:t>
+            </a:r>
+            <a:r>
+              <a:rPr lang="en">
+                <a:latin typeface="Times New Roman"/>
+                <a:ea typeface="Times New Roman"/>
+                <a:cs typeface="Times New Roman"/>
+                <a:sym typeface="Times New Roman"/>
+              </a:rPr>
+              <a:t>Three Dashboard are created on gender wise analysis ,candidate performance analysis,and electoral competitiveness</a:t>
+            </a:r>
+            <a:endParaRPr>
+              <a:latin typeface="Times New Roman"/>
+              <a:ea typeface="Times New Roman"/>
+              <a:cs typeface="Times New Roman"/>
+              <a:sym typeface="Times New Roman"/>
+            </a:endParaRPr>
+          </a:p>
+        </p:txBody>
+      </p:sp>
+    </p:spTree>
+  </p:cSld>
+  <p:clrMapOvr>
+    <a:masterClrMapping/>
+  </p:clrMapOvr>
+</p:sld>
+</file>
+
+<file path=ppt/slides/slide15.xml><?xml version="1.0" encoding="utf-8"?>
+<p:sld xmlns:a="http://schemas.openxmlformats.org/drawingml/2006/main" xmlns:r="http://schemas.openxmlformats.org/officeDocument/2006/relationships" xmlns:mc="http://schemas.openxmlformats.org/markup-compatibility/2006" xmlns:mv="urn:schemas-microsoft-com:mac:vml" xmlns:p="http://schemas.openxmlformats.org/presentationml/2006/main" xmlns:c="http://schemas.openxmlformats.org/drawingml/2006/chart" xmlns:dgm="http://schemas.openxmlformats.org/drawingml/2006/diagram" xmlns:o="urn:schemas-microsoft-com:office:office" xmlns:v="urn:schemas-microsoft-com:vml" xmlns:pvml="urn:schemas-microsoft-com:office:powerpoint" xmlns:com="http://schemas.openxmlformats.org/drawingml/2006/compatibility" xmlns:p14="http://schemas.microsoft.com/office/powerpoint/2010/main" xmlns:p15="http://schemas.microsoft.com/office/powerpoint/2012/main" xmlns:ahyp="http://schemas.microsoft.com/office/drawing/2018/hyperlinkcolor">
+  <p:cSld>
+    <p:spTree>
+      <p:nvGrpSpPr>
+        <p:cNvPr id="246" name="Shape 246"/>
+        <p:cNvGrpSpPr/>
+        <p:nvPr/>
+      </p:nvGrpSpPr>
+      <p:grpSpPr>
+        <a:xfrm>
+          <a:off x="0" y="0"/>
+          <a:ext cx="0" cy="0"/>
+          <a:chOff x="0" y="0"/>
+          <a:chExt cx="0" cy="0"/>
+        </a:xfrm>
+      </p:grpSpPr>
+      <p:sp>
+        <p:nvSpPr>
+          <p:cNvPr id="247" name="Google Shape;247;p27"/>
+          <p:cNvSpPr/>
+          <p:nvPr/>
+        </p:nvSpPr>
+        <p:spPr>
+          <a:xfrm>
+            <a:off x="6169150" y="869625"/>
+            <a:ext cx="2078400" cy="504300"/>
+          </a:xfrm>
+          <a:prstGeom prst="rect">
+            <a:avLst/>
+          </a:prstGeom>
+          <a:solidFill>
+            <a:srgbClr val="842F93"/>
+          </a:solidFill>
+          <a:ln cap="flat" cmpd="sng" w="9525">
+            <a:solidFill>
+              <a:schemeClr val="dk2"/>
+            </a:solidFill>
+            <a:prstDash val="solid"/>
+            <a:round/>
+            <a:headEnd len="sm" w="sm" type="none"/>
+            <a:tailEnd len="sm" w="sm" type="none"/>
+          </a:ln>
+        </p:spPr>
+        <p:txBody>
+          <a:bodyPr anchorCtr="0" anchor="ctr" bIns="91425" lIns="91425" spcFirstLastPara="1" rIns="91425" wrap="square" tIns="91425">
+            <a:noAutofit/>
+          </a:bodyPr>
+          <a:lstStyle/>
+          <a:p>
+            <a:pPr indent="0" lvl="0" marL="0" rtl="0" algn="ctr">
+              <a:spcBef>
+                <a:spcPts val="0"/>
+              </a:spcBef>
+              <a:spcAft>
+                <a:spcPts val="0"/>
+              </a:spcAft>
+              <a:buNone/>
+            </a:pPr>
+            <a:r>
+              <a:t/>
+            </a:r>
+            <a:endParaRPr>
+              <a:latin typeface="Roboto"/>
+              <a:ea typeface="Roboto"/>
+              <a:cs typeface="Roboto"/>
+              <a:sym typeface="Roboto"/>
+            </a:endParaRPr>
+          </a:p>
+        </p:txBody>
+      </p:sp>
+      <p:sp>
+        <p:nvSpPr>
+          <p:cNvPr id="248" name="Google Shape;248;p27"/>
+          <p:cNvSpPr/>
+          <p:nvPr/>
+        </p:nvSpPr>
+        <p:spPr>
+          <a:xfrm>
+            <a:off x="6141250" y="1622550"/>
+            <a:ext cx="2134200" cy="560700"/>
+          </a:xfrm>
+          <a:prstGeom prst="rect">
+            <a:avLst/>
+          </a:prstGeom>
+          <a:solidFill>
+            <a:srgbClr val="701C7F"/>
+          </a:solidFill>
+          <a:ln cap="flat" cmpd="sng" w="9525">
+            <a:solidFill>
+              <a:schemeClr val="dk2"/>
+            </a:solidFill>
+            <a:prstDash val="solid"/>
+            <a:round/>
+            <a:headEnd len="sm" w="sm" type="none"/>
+            <a:tailEnd len="sm" w="sm" type="none"/>
+          </a:ln>
+        </p:spPr>
+        <p:txBody>
+          <a:bodyPr anchorCtr="0" anchor="ctr" bIns="91425" lIns="91425" spcFirstLastPara="1" rIns="91425" wrap="square" tIns="91425">
+            <a:noAutofit/>
+          </a:bodyPr>
+          <a:lstStyle/>
+          <a:p>
+            <a:pPr indent="0" lvl="0" marL="0" rtl="0" algn="ctr">
+              <a:spcBef>
+                <a:spcPts val="0"/>
+              </a:spcBef>
+              <a:spcAft>
+                <a:spcPts val="0"/>
+              </a:spcAft>
+              <a:buNone/>
+            </a:pPr>
+            <a:r>
+              <a:t/>
+            </a:r>
+            <a:endParaRPr>
+              <a:latin typeface="Roboto"/>
+              <a:ea typeface="Roboto"/>
+              <a:cs typeface="Roboto"/>
+              <a:sym typeface="Roboto"/>
+            </a:endParaRPr>
+          </a:p>
+        </p:txBody>
+      </p:sp>
+      <p:sp>
+        <p:nvSpPr>
+          <p:cNvPr id="249" name="Google Shape;249;p27"/>
+          <p:cNvSpPr/>
+          <p:nvPr/>
+        </p:nvSpPr>
+        <p:spPr>
+          <a:xfrm>
+            <a:off x="5874000" y="2278950"/>
+            <a:ext cx="2134200" cy="585600"/>
+          </a:xfrm>
+          <a:prstGeom prst="rect">
+            <a:avLst/>
+          </a:prstGeom>
+          <a:solidFill>
+            <a:srgbClr val="842F93"/>
+          </a:solidFill>
+          <a:ln cap="flat" cmpd="sng" w="9525">
+            <a:solidFill>
+              <a:schemeClr val="dk2"/>
+            </a:solidFill>
+            <a:prstDash val="solid"/>
+            <a:round/>
+            <a:headEnd len="sm" w="sm" type="none"/>
+            <a:tailEnd len="sm" w="sm" type="none"/>
+          </a:ln>
+        </p:spPr>
+        <p:txBody>
+          <a:bodyPr anchorCtr="0" anchor="ctr" bIns="91425" lIns="91425" spcFirstLastPara="1" rIns="91425" wrap="square" tIns="91425">
+            <a:noAutofit/>
+          </a:bodyPr>
+          <a:lstStyle/>
+          <a:p>
+            <a:pPr indent="0" lvl="0" marL="0" rtl="0" algn="ctr">
+              <a:spcBef>
+                <a:spcPts val="0"/>
+              </a:spcBef>
+              <a:spcAft>
+                <a:spcPts val="0"/>
+              </a:spcAft>
+              <a:buNone/>
+            </a:pPr>
+            <a:r>
+              <a:t/>
+            </a:r>
+            <a:endParaRPr>
+              <a:latin typeface="Roboto"/>
+              <a:ea typeface="Roboto"/>
+              <a:cs typeface="Roboto"/>
+              <a:sym typeface="Roboto"/>
+            </a:endParaRPr>
+          </a:p>
+        </p:txBody>
+      </p:sp>
+      <p:sp>
+        <p:nvSpPr>
+          <p:cNvPr id="250" name="Google Shape;250;p27"/>
+          <p:cNvSpPr/>
+          <p:nvPr/>
+        </p:nvSpPr>
+        <p:spPr>
+          <a:xfrm>
+            <a:off x="5764550" y="3144925"/>
+            <a:ext cx="2171400" cy="504300"/>
+          </a:xfrm>
+          <a:prstGeom prst="rect">
+            <a:avLst/>
+          </a:prstGeom>
+          <a:solidFill>
+            <a:srgbClr val="701C7F"/>
+          </a:solidFill>
+          <a:ln cap="flat" cmpd="sng" w="9525">
+            <a:solidFill>
+              <a:schemeClr val="dk2"/>
+            </a:solidFill>
+            <a:prstDash val="solid"/>
+            <a:round/>
+            <a:headEnd len="sm" w="sm" type="none"/>
+            <a:tailEnd len="sm" w="sm" type="none"/>
+          </a:ln>
+        </p:spPr>
+        <p:txBody>
+          <a:bodyPr anchorCtr="0" anchor="ctr" bIns="91425" lIns="91425" spcFirstLastPara="1" rIns="91425" wrap="square" tIns="91425">
+            <a:noAutofit/>
+          </a:bodyPr>
+          <a:lstStyle/>
+          <a:p>
+            <a:pPr indent="0" lvl="0" marL="0" rtl="0" algn="ctr">
+              <a:spcBef>
+                <a:spcPts val="0"/>
+              </a:spcBef>
+              <a:spcAft>
+                <a:spcPts val="0"/>
+              </a:spcAft>
+              <a:buNone/>
+            </a:pPr>
+            <a:r>
+              <a:t/>
+            </a:r>
+            <a:endParaRPr>
+              <a:latin typeface="Roboto"/>
+              <a:ea typeface="Roboto"/>
+              <a:cs typeface="Roboto"/>
+              <a:sym typeface="Roboto"/>
+            </a:endParaRPr>
+          </a:p>
+        </p:txBody>
+      </p:sp>
+      <p:sp>
+        <p:nvSpPr>
+          <p:cNvPr id="251" name="Google Shape;251;p27"/>
+          <p:cNvSpPr/>
+          <p:nvPr/>
+        </p:nvSpPr>
+        <p:spPr>
+          <a:xfrm>
+            <a:off x="5231050" y="3988975"/>
+            <a:ext cx="2216400" cy="560700"/>
+          </a:xfrm>
+          <a:prstGeom prst="rect">
+            <a:avLst/>
+          </a:prstGeom>
+          <a:solidFill>
+            <a:srgbClr val="842F93"/>
+          </a:solidFill>
+          <a:ln cap="flat" cmpd="sng" w="9525">
+            <a:solidFill>
+              <a:schemeClr val="dk2"/>
+            </a:solidFill>
+            <a:prstDash val="solid"/>
+            <a:round/>
+            <a:headEnd len="sm" w="sm" type="none"/>
+            <a:tailEnd len="sm" w="sm" type="none"/>
+          </a:ln>
+        </p:spPr>
+        <p:txBody>
+          <a:bodyPr anchorCtr="0" anchor="ctr" bIns="91425" lIns="91425" spcFirstLastPara="1" rIns="91425" wrap="square" tIns="91425">
+            <a:noAutofit/>
+          </a:bodyPr>
+          <a:lstStyle/>
+          <a:p>
+            <a:pPr indent="0" lvl="0" marL="0" rtl="0" algn="ctr">
+              <a:spcBef>
+                <a:spcPts val="0"/>
+              </a:spcBef>
+              <a:spcAft>
+                <a:spcPts val="0"/>
+              </a:spcAft>
+              <a:buNone/>
+            </a:pPr>
+            <a:r>
+              <a:t/>
+            </a:r>
+            <a:endParaRPr>
+              <a:latin typeface="Roboto"/>
+              <a:ea typeface="Roboto"/>
+              <a:cs typeface="Roboto"/>
+              <a:sym typeface="Roboto"/>
+            </a:endParaRPr>
+          </a:p>
+        </p:txBody>
+      </p:sp>
+      <p:sp>
+        <p:nvSpPr>
+          <p:cNvPr id="252" name="Google Shape;252;p27"/>
+          <p:cNvSpPr/>
+          <p:nvPr/>
+        </p:nvSpPr>
+        <p:spPr>
+          <a:xfrm>
+            <a:off x="2113325" y="1223675"/>
+            <a:ext cx="254100" cy="322200"/>
+          </a:xfrm>
+          <a:prstGeom prst="downArrow">
+            <a:avLst>
+              <a:gd fmla="val 50000" name="adj1"/>
+              <a:gd fmla="val 50000" name="adj2"/>
+            </a:avLst>
+          </a:prstGeom>
+          <a:solidFill>
+            <a:srgbClr val="F4B400"/>
+          </a:solidFill>
+          <a:ln cap="flat" cmpd="sng" w="9525">
+            <a:solidFill>
+              <a:srgbClr val="F4B400"/>
+            </a:solidFill>
+            <a:prstDash val="solid"/>
+            <a:round/>
+            <a:headEnd len="sm" w="sm" type="none"/>
+            <a:tailEnd len="sm" w="sm" type="none"/>
+          </a:ln>
+        </p:spPr>
+        <p:txBody>
+          <a:bodyPr anchorCtr="0" anchor="ctr" bIns="91425" lIns="91425" spcFirstLastPara="1" rIns="91425" wrap="square" tIns="91425">
+            <a:noAutofit/>
+          </a:bodyPr>
+          <a:lstStyle/>
+          <a:p>
+            <a:pPr indent="0" lvl="0" marL="0" rtl="0" algn="ctr">
+              <a:spcBef>
+                <a:spcPts val="0"/>
+              </a:spcBef>
+              <a:spcAft>
+                <a:spcPts val="0"/>
+              </a:spcAft>
+              <a:buNone/>
+            </a:pPr>
+            <a:r>
+              <a:t/>
+            </a:r>
+            <a:endParaRPr>
+              <a:latin typeface="Roboto"/>
+              <a:ea typeface="Roboto"/>
+              <a:cs typeface="Roboto"/>
+              <a:sym typeface="Roboto"/>
+            </a:endParaRPr>
+          </a:p>
+        </p:txBody>
+      </p:sp>
+      <p:sp>
+        <p:nvSpPr>
+          <p:cNvPr id="253" name="Google Shape;253;p27"/>
+          <p:cNvSpPr/>
+          <p:nvPr/>
+        </p:nvSpPr>
+        <p:spPr>
+          <a:xfrm>
+            <a:off x="4317900" y="2161038"/>
+            <a:ext cx="254100" cy="322200"/>
+          </a:xfrm>
+          <a:prstGeom prst="downArrow">
+            <a:avLst>
+              <a:gd fmla="val 50000" name="adj1"/>
+              <a:gd fmla="val 50000" name="adj2"/>
+            </a:avLst>
+          </a:prstGeom>
+          <a:solidFill>
+            <a:srgbClr val="F4B400"/>
+          </a:solidFill>
+          <a:ln cap="flat" cmpd="sng" w="9525">
+            <a:solidFill>
+              <a:srgbClr val="F4B400"/>
+            </a:solidFill>
+            <a:prstDash val="solid"/>
+            <a:round/>
+            <a:headEnd len="sm" w="sm" type="none"/>
+            <a:tailEnd len="sm" w="sm" type="none"/>
+          </a:ln>
+        </p:spPr>
+        <p:txBody>
+          <a:bodyPr anchorCtr="0" anchor="ctr" bIns="91425" lIns="91425" spcFirstLastPara="1" rIns="91425" wrap="square" tIns="91425">
+            <a:noAutofit/>
+          </a:bodyPr>
+          <a:lstStyle/>
+          <a:p>
+            <a:pPr indent="0" lvl="0" marL="0" rtl="0" algn="ctr">
+              <a:spcBef>
+                <a:spcPts val="0"/>
+              </a:spcBef>
+              <a:spcAft>
+                <a:spcPts val="0"/>
+              </a:spcAft>
+              <a:buNone/>
+            </a:pPr>
+            <a:r>
+              <a:t/>
+            </a:r>
+            <a:endParaRPr>
+              <a:latin typeface="Roboto"/>
+              <a:ea typeface="Roboto"/>
+              <a:cs typeface="Roboto"/>
+              <a:sym typeface="Roboto"/>
+            </a:endParaRPr>
+          </a:p>
+        </p:txBody>
+      </p:sp>
+      <p:sp>
+        <p:nvSpPr>
+          <p:cNvPr id="254" name="Google Shape;254;p27"/>
+          <p:cNvSpPr/>
+          <p:nvPr/>
+        </p:nvSpPr>
+        <p:spPr>
+          <a:xfrm>
+            <a:off x="4312025" y="3043663"/>
+            <a:ext cx="254100" cy="322200"/>
+          </a:xfrm>
+          <a:prstGeom prst="downArrow">
+            <a:avLst>
+              <a:gd fmla="val 50000" name="adj1"/>
+              <a:gd fmla="val 50000" name="adj2"/>
+            </a:avLst>
+          </a:prstGeom>
+          <a:solidFill>
+            <a:srgbClr val="F4B400"/>
+          </a:solidFill>
+          <a:ln cap="flat" cmpd="sng" w="9525">
+            <a:solidFill>
+              <a:srgbClr val="F4B400"/>
+            </a:solidFill>
+            <a:prstDash val="solid"/>
+            <a:round/>
+            <a:headEnd len="sm" w="sm" type="none"/>
+            <a:tailEnd len="sm" w="sm" type="none"/>
+          </a:ln>
+        </p:spPr>
+        <p:txBody>
+          <a:bodyPr anchorCtr="0" anchor="ctr" bIns="91425" lIns="91425" spcFirstLastPara="1" rIns="91425" wrap="square" tIns="91425">
+            <a:noAutofit/>
+          </a:bodyPr>
+          <a:lstStyle/>
+          <a:p>
+            <a:pPr indent="0" lvl="0" marL="0" rtl="0" algn="ctr">
+              <a:spcBef>
+                <a:spcPts val="0"/>
+              </a:spcBef>
+              <a:spcAft>
+                <a:spcPts val="0"/>
+              </a:spcAft>
+              <a:buNone/>
+            </a:pPr>
+            <a:r>
+              <a:t/>
+            </a:r>
+            <a:endParaRPr>
+              <a:latin typeface="Roboto"/>
+              <a:ea typeface="Roboto"/>
+              <a:cs typeface="Roboto"/>
+              <a:sym typeface="Roboto"/>
+            </a:endParaRPr>
+          </a:p>
+        </p:txBody>
+      </p:sp>
+      <p:sp>
+        <p:nvSpPr>
+          <p:cNvPr id="255" name="Google Shape;255;p27"/>
+          <p:cNvSpPr/>
+          <p:nvPr/>
+        </p:nvSpPr>
+        <p:spPr>
+          <a:xfrm>
+            <a:off x="4312025" y="3851450"/>
+            <a:ext cx="254100" cy="322200"/>
+          </a:xfrm>
+          <a:prstGeom prst="downArrow">
+            <a:avLst>
+              <a:gd fmla="val 50000" name="adj1"/>
+              <a:gd fmla="val 50000" name="adj2"/>
+            </a:avLst>
+          </a:prstGeom>
+          <a:solidFill>
+            <a:srgbClr val="F4B400"/>
+          </a:solidFill>
+          <a:ln cap="flat" cmpd="sng" w="9525">
+            <a:solidFill>
+              <a:srgbClr val="F4B400"/>
+            </a:solidFill>
+            <a:prstDash val="solid"/>
+            <a:round/>
+            <a:headEnd len="sm" w="sm" type="none"/>
+            <a:tailEnd len="sm" w="sm" type="none"/>
+          </a:ln>
+        </p:spPr>
+        <p:txBody>
+          <a:bodyPr anchorCtr="0" anchor="ctr" bIns="91425" lIns="91425" spcFirstLastPara="1" rIns="91425" wrap="square" tIns="91425">
+            <a:noAutofit/>
+          </a:bodyPr>
+          <a:lstStyle/>
+          <a:p>
+            <a:pPr indent="0" lvl="0" marL="0" rtl="0" algn="ctr">
+              <a:spcBef>
+                <a:spcPts val="0"/>
+              </a:spcBef>
+              <a:spcAft>
+                <a:spcPts val="0"/>
+              </a:spcAft>
+              <a:buNone/>
+            </a:pPr>
+            <a:r>
+              <a:t/>
+            </a:r>
+            <a:endParaRPr>
+              <a:latin typeface="Roboto"/>
+              <a:ea typeface="Roboto"/>
+              <a:cs typeface="Roboto"/>
+              <a:sym typeface="Roboto"/>
+            </a:endParaRPr>
+          </a:p>
+        </p:txBody>
+      </p:sp>
+      <p:sp>
+        <p:nvSpPr>
+          <p:cNvPr id="256" name="Google Shape;256;p27"/>
+          <p:cNvSpPr/>
+          <p:nvPr/>
+        </p:nvSpPr>
+        <p:spPr>
+          <a:xfrm>
+            <a:off x="1204650" y="566975"/>
+            <a:ext cx="1265400" cy="656700"/>
+          </a:xfrm>
+          <a:prstGeom prst="roundRect">
+            <a:avLst>
+              <a:gd fmla="val 16667" name="adj"/>
+            </a:avLst>
+          </a:prstGeom>
+          <a:solidFill>
+            <a:srgbClr val="842F93"/>
+          </a:solidFill>
+          <a:ln cap="flat" cmpd="sng" w="9525">
+            <a:solidFill>
+              <a:schemeClr val="dk2"/>
+            </a:solidFill>
+            <a:prstDash val="solid"/>
+            <a:round/>
+            <a:headEnd len="sm" w="sm" type="none"/>
+            <a:tailEnd len="sm" w="sm" type="none"/>
+          </a:ln>
+        </p:spPr>
+        <p:txBody>
+          <a:bodyPr anchorCtr="0" anchor="ctr" bIns="91425" lIns="91425" spcFirstLastPara="1" rIns="91425" wrap="square" tIns="91425">
+            <a:noAutofit/>
+          </a:bodyPr>
+          <a:lstStyle/>
+          <a:p>
+            <a:pPr indent="0" lvl="0" marL="0" rtl="0" algn="ctr">
+              <a:spcBef>
+                <a:spcPts val="0"/>
+              </a:spcBef>
+              <a:spcAft>
+                <a:spcPts val="0"/>
+              </a:spcAft>
+              <a:buNone/>
+            </a:pPr>
+            <a:r>
+              <a:t/>
+            </a:r>
+            <a:endParaRPr>
+              <a:solidFill>
+                <a:schemeClr val="lt1"/>
+              </a:solidFill>
+              <a:latin typeface="Roboto"/>
+              <a:ea typeface="Roboto"/>
+              <a:cs typeface="Roboto"/>
+              <a:sym typeface="Roboto"/>
+            </a:endParaRPr>
+          </a:p>
+        </p:txBody>
+      </p:sp>
+      <p:sp>
+        <p:nvSpPr>
+          <p:cNvPr id="257" name="Google Shape;257;p27"/>
+          <p:cNvSpPr/>
+          <p:nvPr/>
+        </p:nvSpPr>
+        <p:spPr>
+          <a:xfrm>
+            <a:off x="1896550" y="1450125"/>
+            <a:ext cx="1265400" cy="656700"/>
+          </a:xfrm>
+          <a:prstGeom prst="roundRect">
+            <a:avLst>
+              <a:gd fmla="val 16667" name="adj"/>
+            </a:avLst>
+          </a:prstGeom>
+          <a:solidFill>
+            <a:srgbClr val="842F93"/>
+          </a:solidFill>
+          <a:ln cap="flat" cmpd="sng" w="9525">
+            <a:solidFill>
+              <a:schemeClr val="dk2"/>
+            </a:solidFill>
+            <a:prstDash val="solid"/>
+            <a:round/>
+            <a:headEnd len="sm" w="sm" type="none"/>
+            <a:tailEnd len="sm" w="sm" type="none"/>
+          </a:ln>
+        </p:spPr>
+        <p:txBody>
+          <a:bodyPr anchorCtr="0" anchor="ctr" bIns="91425" lIns="91425" spcFirstLastPara="1" rIns="91425" wrap="square" tIns="91425">
+            <a:noAutofit/>
+          </a:bodyPr>
+          <a:lstStyle/>
+          <a:p>
+            <a:pPr indent="0" lvl="0" marL="0" rtl="0" algn="ctr">
+              <a:spcBef>
+                <a:spcPts val="0"/>
+              </a:spcBef>
+              <a:spcAft>
+                <a:spcPts val="0"/>
+              </a:spcAft>
+              <a:buNone/>
+            </a:pPr>
+            <a:r>
+              <a:t/>
+            </a:r>
+            <a:endParaRPr>
+              <a:solidFill>
+                <a:schemeClr val="lt1"/>
+              </a:solidFill>
+              <a:latin typeface="Roboto"/>
+              <a:ea typeface="Roboto"/>
+              <a:cs typeface="Roboto"/>
+              <a:sym typeface="Roboto"/>
+            </a:endParaRPr>
+          </a:p>
+        </p:txBody>
+      </p:sp>
+      <p:sp>
+        <p:nvSpPr>
+          <p:cNvPr id="258" name="Google Shape;258;p27"/>
+          <p:cNvSpPr/>
+          <p:nvPr/>
+        </p:nvSpPr>
+        <p:spPr>
+          <a:xfrm>
+            <a:off x="2106300" y="1574550"/>
+            <a:ext cx="1265400" cy="656700"/>
+          </a:xfrm>
+          <a:prstGeom prst="roundRect">
+            <a:avLst>
+              <a:gd fmla="val 16667" name="adj"/>
+            </a:avLst>
+          </a:prstGeom>
+          <a:solidFill>
+            <a:srgbClr val="842F93"/>
+          </a:solidFill>
+          <a:ln cap="flat" cmpd="sng" w="9525">
+            <a:solidFill>
+              <a:schemeClr val="dk2"/>
+            </a:solidFill>
+            <a:prstDash val="solid"/>
+            <a:round/>
+            <a:headEnd len="sm" w="sm" type="none"/>
+            <a:tailEnd len="sm" w="sm" type="none"/>
+          </a:ln>
+        </p:spPr>
+        <p:txBody>
+          <a:bodyPr anchorCtr="0" anchor="ctr" bIns="91425" lIns="91425" spcFirstLastPara="1" rIns="91425" wrap="square" tIns="91425">
+            <a:noAutofit/>
+          </a:bodyPr>
+          <a:lstStyle/>
+          <a:p>
+            <a:pPr indent="0" lvl="0" marL="0" rtl="0" algn="ctr">
+              <a:spcBef>
+                <a:spcPts val="0"/>
+              </a:spcBef>
+              <a:spcAft>
+                <a:spcPts val="0"/>
+              </a:spcAft>
+              <a:buNone/>
+            </a:pPr>
+            <a:r>
+              <a:t/>
+            </a:r>
+            <a:endParaRPr>
+              <a:solidFill>
+                <a:schemeClr val="lt1"/>
+              </a:solidFill>
+              <a:latin typeface="Roboto"/>
+              <a:ea typeface="Roboto"/>
+              <a:cs typeface="Roboto"/>
+              <a:sym typeface="Roboto"/>
+            </a:endParaRPr>
+          </a:p>
+        </p:txBody>
+      </p:sp>
+      <p:sp>
+        <p:nvSpPr>
+          <p:cNvPr id="259" name="Google Shape;259;p27"/>
+          <p:cNvSpPr/>
+          <p:nvPr/>
+        </p:nvSpPr>
+        <p:spPr>
+          <a:xfrm>
+            <a:off x="2256075" y="1873050"/>
+            <a:ext cx="1265400" cy="656700"/>
+          </a:xfrm>
+          <a:prstGeom prst="roundRect">
+            <a:avLst>
+              <a:gd fmla="val 16667" name="adj"/>
+            </a:avLst>
+          </a:prstGeom>
+          <a:solidFill>
+            <a:srgbClr val="842F93"/>
+          </a:solidFill>
+          <a:ln cap="flat" cmpd="sng" w="9525">
+            <a:solidFill>
+              <a:schemeClr val="dk2"/>
+            </a:solidFill>
+            <a:prstDash val="solid"/>
+            <a:round/>
+            <a:headEnd len="sm" w="sm" type="none"/>
+            <a:tailEnd len="sm" w="sm" type="none"/>
+          </a:ln>
+        </p:spPr>
+        <p:txBody>
+          <a:bodyPr anchorCtr="0" anchor="ctr" bIns="91425" lIns="91425" spcFirstLastPara="1" rIns="91425" wrap="square" tIns="91425">
+            <a:noAutofit/>
+          </a:bodyPr>
+          <a:lstStyle/>
+          <a:p>
+            <a:pPr indent="0" lvl="0" marL="0" rtl="0" algn="ctr">
+              <a:spcBef>
+                <a:spcPts val="0"/>
+              </a:spcBef>
+              <a:spcAft>
+                <a:spcPts val="0"/>
+              </a:spcAft>
+              <a:buNone/>
+            </a:pPr>
+            <a:r>
+              <a:t/>
+            </a:r>
+            <a:endParaRPr>
+              <a:solidFill>
+                <a:schemeClr val="lt1"/>
+              </a:solidFill>
+              <a:latin typeface="Roboto"/>
+              <a:ea typeface="Roboto"/>
+              <a:cs typeface="Roboto"/>
+              <a:sym typeface="Roboto"/>
+            </a:endParaRPr>
+          </a:p>
+        </p:txBody>
+      </p:sp>
+      <p:sp>
+        <p:nvSpPr>
+          <p:cNvPr id="260" name="Google Shape;260;p27"/>
+          <p:cNvSpPr/>
+          <p:nvPr/>
+        </p:nvSpPr>
+        <p:spPr>
+          <a:xfrm>
+            <a:off x="2367425" y="2183250"/>
+            <a:ext cx="1265400" cy="656700"/>
+          </a:xfrm>
+          <a:prstGeom prst="roundRect">
+            <a:avLst>
+              <a:gd fmla="val 16667" name="adj"/>
+            </a:avLst>
+          </a:prstGeom>
+          <a:solidFill>
+            <a:srgbClr val="842F93"/>
+          </a:solidFill>
+          <a:ln cap="flat" cmpd="sng" w="9525">
+            <a:solidFill>
+              <a:schemeClr val="dk2"/>
+            </a:solidFill>
+            <a:prstDash val="solid"/>
+            <a:round/>
+            <a:headEnd len="sm" w="sm" type="none"/>
+            <a:tailEnd len="sm" w="sm" type="none"/>
+          </a:ln>
+        </p:spPr>
+        <p:txBody>
+          <a:bodyPr anchorCtr="0" anchor="ctr" bIns="91425" lIns="91425" spcFirstLastPara="1" rIns="91425" wrap="square" tIns="91425">
+            <a:noAutofit/>
+          </a:bodyPr>
+          <a:lstStyle/>
+          <a:p>
+            <a:pPr indent="0" lvl="0" marL="0" rtl="0" algn="ctr">
+              <a:spcBef>
+                <a:spcPts val="0"/>
+              </a:spcBef>
+              <a:spcAft>
+                <a:spcPts val="0"/>
+              </a:spcAft>
+              <a:buNone/>
+            </a:pPr>
+            <a:r>
+              <a:t/>
+            </a:r>
+            <a:endParaRPr>
+              <a:solidFill>
+                <a:schemeClr val="lt1"/>
+              </a:solidFill>
+              <a:latin typeface="Roboto"/>
+              <a:ea typeface="Roboto"/>
+              <a:cs typeface="Roboto"/>
+              <a:sym typeface="Roboto"/>
+            </a:endParaRPr>
+          </a:p>
+        </p:txBody>
+      </p:sp>
+      <p:sp>
+        <p:nvSpPr>
+          <p:cNvPr id="261" name="Google Shape;261;p27"/>
+          <p:cNvSpPr/>
+          <p:nvPr/>
+        </p:nvSpPr>
+        <p:spPr>
+          <a:xfrm>
+            <a:off x="2547175" y="2560900"/>
+            <a:ext cx="1265400" cy="656700"/>
+          </a:xfrm>
+          <a:prstGeom prst="roundRect">
+            <a:avLst>
+              <a:gd fmla="val 16667" name="adj"/>
+            </a:avLst>
+          </a:prstGeom>
+          <a:solidFill>
+            <a:srgbClr val="842F93"/>
+          </a:solidFill>
+          <a:ln cap="flat" cmpd="sng" w="9525">
+            <a:solidFill>
+              <a:schemeClr val="dk2"/>
+            </a:solidFill>
+            <a:prstDash val="solid"/>
+            <a:round/>
+            <a:headEnd len="sm" w="sm" type="none"/>
+            <a:tailEnd len="sm" w="sm" type="none"/>
+          </a:ln>
+        </p:spPr>
+        <p:txBody>
+          <a:bodyPr anchorCtr="0" anchor="ctr" bIns="91425" lIns="91425" spcFirstLastPara="1" rIns="91425" wrap="square" tIns="91425">
+            <a:noAutofit/>
+          </a:bodyPr>
+          <a:lstStyle/>
+          <a:p>
+            <a:pPr indent="0" lvl="0" marL="0" rtl="0" algn="ctr">
+              <a:spcBef>
+                <a:spcPts val="0"/>
+              </a:spcBef>
+              <a:spcAft>
+                <a:spcPts val="0"/>
+              </a:spcAft>
+              <a:buNone/>
+            </a:pPr>
+            <a:r>
+              <a:t/>
+            </a:r>
+            <a:endParaRPr>
+              <a:solidFill>
+                <a:schemeClr val="lt1"/>
+              </a:solidFill>
+              <a:latin typeface="Roboto"/>
+              <a:ea typeface="Roboto"/>
+              <a:cs typeface="Roboto"/>
+              <a:sym typeface="Roboto"/>
             </a:endParaRPr>
           </a:p>
         </p:txBody>
@@ -10606,304 +11966,30 @@
           <a:chExt cx="0" cy="0"/>
         </a:xfrm>
       </p:grpSpPr>
-      <p:sp>
-        <p:nvSpPr>
-          <p:cNvPr id="103" name="Google Shape;103;p16"/>
-          <p:cNvSpPr txBox="1"/>
-          <p:nvPr>
-            <p:ph type="title"/>
-          </p:nvPr>
-        </p:nvSpPr>
-        <p:spPr>
-          <a:xfrm>
-            <a:off x="311700" y="410000"/>
-            <a:ext cx="8520600" cy="607800"/>
-          </a:xfrm>
-          <a:prstGeom prst="rect">
-            <a:avLst/>
-          </a:prstGeom>
-        </p:spPr>
-        <p:txBody>
-          <a:bodyPr anchorCtr="0" anchor="t" bIns="91425" lIns="91425" spcFirstLastPara="1" rIns="91425" wrap="square" tIns="91425">
-            <a:normAutofit fontScale="90000"/>
-          </a:bodyPr>
-          <a:lstStyle/>
-          <a:p>
-            <a:pPr indent="0" lvl="0" marL="0" rtl="0" algn="l">
-              <a:spcBef>
-                <a:spcPts val="0"/>
-              </a:spcBef>
-              <a:spcAft>
-                <a:spcPts val="0"/>
-              </a:spcAft>
-              <a:buNone/>
-            </a:pPr>
-            <a:r>
-              <a:rPr b="1" lang="en">
-                <a:latin typeface="Times New Roman"/>
-                <a:ea typeface="Times New Roman"/>
-                <a:cs typeface="Times New Roman"/>
-                <a:sym typeface="Times New Roman"/>
-              </a:rPr>
-              <a:t>Milestones</a:t>
-            </a:r>
-            <a:endParaRPr b="1">
-              <a:latin typeface="Times New Roman"/>
-              <a:ea typeface="Times New Roman"/>
-              <a:cs typeface="Times New Roman"/>
-              <a:sym typeface="Times New Roman"/>
-            </a:endParaRPr>
-          </a:p>
-        </p:txBody>
-      </p:sp>
-      <p:sp>
-        <p:nvSpPr>
-          <p:cNvPr id="104" name="Google Shape;104;p16"/>
-          <p:cNvSpPr txBox="1"/>
-          <p:nvPr>
-            <p:ph idx="1" type="body"/>
-          </p:nvPr>
-        </p:nvSpPr>
-        <p:spPr>
-          <a:xfrm>
-            <a:off x="186900" y="1229875"/>
-            <a:ext cx="8799300" cy="3539700"/>
-          </a:xfrm>
-          <a:prstGeom prst="rect">
-            <a:avLst/>
-          </a:prstGeom>
-        </p:spPr>
-        <p:txBody>
-          <a:bodyPr anchorCtr="0" anchor="t" bIns="91425" lIns="91425" spcFirstLastPara="1" rIns="91425" wrap="square" tIns="91425">
-            <a:normAutofit/>
-          </a:bodyPr>
-          <a:lstStyle/>
-          <a:p>
-            <a:pPr indent="0" lvl="0" marL="0" rtl="0" algn="l">
-              <a:spcBef>
-                <a:spcPts val="0"/>
-              </a:spcBef>
-              <a:spcAft>
-                <a:spcPts val="0"/>
-              </a:spcAft>
-              <a:buNone/>
-            </a:pPr>
-            <a:r>
-              <a:rPr lang="en">
-                <a:latin typeface="Times New Roman"/>
-                <a:ea typeface="Times New Roman"/>
-                <a:cs typeface="Times New Roman"/>
-                <a:sym typeface="Times New Roman"/>
-              </a:rPr>
-              <a:t>This project is developed using 4 milestones:</a:t>
-            </a:r>
-            <a:endParaRPr>
-              <a:latin typeface="Times New Roman"/>
-              <a:ea typeface="Times New Roman"/>
-              <a:cs typeface="Times New Roman"/>
-              <a:sym typeface="Times New Roman"/>
-            </a:endParaRPr>
-          </a:p>
-          <a:p>
-            <a:pPr indent="0" lvl="0" marL="0" rtl="0" algn="l">
-              <a:spcBef>
-                <a:spcPts val="1200"/>
-              </a:spcBef>
-              <a:spcAft>
-                <a:spcPts val="0"/>
-              </a:spcAft>
-              <a:buNone/>
-            </a:pPr>
-            <a:r>
-              <a:rPr b="1" lang="en">
-                <a:latin typeface="Times New Roman"/>
-                <a:ea typeface="Times New Roman"/>
-                <a:cs typeface="Times New Roman"/>
-                <a:sym typeface="Times New Roman"/>
-              </a:rPr>
-              <a:t>Milestone 1:</a:t>
-            </a:r>
-            <a:r>
-              <a:rPr lang="en">
-                <a:latin typeface="Times New Roman"/>
-                <a:ea typeface="Times New Roman"/>
-                <a:cs typeface="Times New Roman"/>
-                <a:sym typeface="Times New Roman"/>
-              </a:rPr>
-              <a:t> Team works in Data Collection and Preprocessing .</a:t>
-            </a:r>
-            <a:endParaRPr>
-              <a:latin typeface="Times New Roman"/>
-              <a:ea typeface="Times New Roman"/>
-              <a:cs typeface="Times New Roman"/>
-              <a:sym typeface="Times New Roman"/>
-            </a:endParaRPr>
-          </a:p>
-          <a:p>
-            <a:pPr indent="0" lvl="0" marL="0" rtl="0" algn="l">
-              <a:spcBef>
-                <a:spcPts val="1200"/>
-              </a:spcBef>
-              <a:spcAft>
-                <a:spcPts val="0"/>
-              </a:spcAft>
-              <a:buNone/>
-            </a:pPr>
-            <a:r>
-              <a:rPr b="1" lang="en">
-                <a:latin typeface="Times New Roman"/>
-                <a:ea typeface="Times New Roman"/>
-                <a:cs typeface="Times New Roman"/>
-                <a:sym typeface="Times New Roman"/>
-              </a:rPr>
-              <a:t>Milestone 2 :</a:t>
-            </a:r>
-            <a:r>
-              <a:rPr lang="en">
-                <a:latin typeface="Times New Roman"/>
-                <a:ea typeface="Times New Roman"/>
-                <a:cs typeface="Times New Roman"/>
-                <a:sym typeface="Times New Roman"/>
-              </a:rPr>
-              <a:t>Dashboard creation started , three dashboard are created i.e., election overview , party performance analysis and distribution of parliamentary constituency type.</a:t>
-            </a:r>
-            <a:endParaRPr>
-              <a:latin typeface="Times New Roman"/>
-              <a:ea typeface="Times New Roman"/>
-              <a:cs typeface="Times New Roman"/>
-              <a:sym typeface="Times New Roman"/>
-            </a:endParaRPr>
-          </a:p>
-          <a:p>
-            <a:pPr indent="0" lvl="0" marL="0" rtl="0" algn="l">
-              <a:spcBef>
-                <a:spcPts val="1200"/>
-              </a:spcBef>
-              <a:spcAft>
-                <a:spcPts val="0"/>
-              </a:spcAft>
-              <a:buNone/>
-            </a:pPr>
-            <a:r>
-              <a:rPr b="1" lang="en">
-                <a:latin typeface="Times New Roman"/>
-                <a:ea typeface="Times New Roman"/>
-                <a:cs typeface="Times New Roman"/>
-                <a:sym typeface="Times New Roman"/>
-              </a:rPr>
-              <a:t>Milestone 3</a:t>
-            </a:r>
-            <a:r>
-              <a:rPr lang="en">
-                <a:latin typeface="Times New Roman"/>
-                <a:ea typeface="Times New Roman"/>
-                <a:cs typeface="Times New Roman"/>
-                <a:sym typeface="Times New Roman"/>
-              </a:rPr>
-              <a:t>:Two Dashboard are created on </a:t>
-            </a:r>
-            <a:r>
-              <a:rPr lang="en">
-                <a:latin typeface="Times New Roman"/>
-                <a:ea typeface="Times New Roman"/>
-                <a:cs typeface="Times New Roman"/>
-                <a:sym typeface="Times New Roman"/>
-              </a:rPr>
-              <a:t>year wise analysis and state wise analysis.</a:t>
-            </a:r>
-            <a:endParaRPr>
-              <a:latin typeface="Times New Roman"/>
-              <a:ea typeface="Times New Roman"/>
-              <a:cs typeface="Times New Roman"/>
-              <a:sym typeface="Times New Roman"/>
-            </a:endParaRPr>
-          </a:p>
-          <a:p>
-            <a:pPr indent="0" lvl="0" marL="0" rtl="0" algn="l">
-              <a:spcBef>
-                <a:spcPts val="1200"/>
-              </a:spcBef>
-              <a:spcAft>
-                <a:spcPts val="1200"/>
-              </a:spcAft>
-              <a:buNone/>
-            </a:pPr>
-            <a:r>
-              <a:rPr b="1" lang="en">
-                <a:latin typeface="Times New Roman"/>
-                <a:ea typeface="Times New Roman"/>
-                <a:cs typeface="Times New Roman"/>
-                <a:sym typeface="Times New Roman"/>
-              </a:rPr>
-              <a:t>Milestone 4:</a:t>
-            </a:r>
-            <a:r>
-              <a:rPr lang="en">
-                <a:latin typeface="Times New Roman"/>
-                <a:ea typeface="Times New Roman"/>
-                <a:cs typeface="Times New Roman"/>
-                <a:sym typeface="Times New Roman"/>
-              </a:rPr>
-              <a:t>Three Dashboard are created on gender wise analysis ,candidate performance analysis,and electoral competitiveness</a:t>
-            </a:r>
-            <a:endParaRPr>
-              <a:latin typeface="Times New Roman"/>
-              <a:ea typeface="Times New Roman"/>
-              <a:cs typeface="Times New Roman"/>
-              <a:sym typeface="Times New Roman"/>
-            </a:endParaRPr>
-          </a:p>
-        </p:txBody>
-      </p:sp>
-    </p:spTree>
-  </p:cSld>
-  <p:clrMapOvr>
-    <a:masterClrMapping/>
-  </p:clrMapOvr>
-</p:sld>
-</file>
-
-<file path=ppt/slides/slide5.xml><?xml version="1.0" encoding="utf-8"?>
-<p:sld xmlns:a="http://schemas.openxmlformats.org/drawingml/2006/main" xmlns:r="http://schemas.openxmlformats.org/officeDocument/2006/relationships" xmlns:mc="http://schemas.openxmlformats.org/markup-compatibility/2006" xmlns:mv="urn:schemas-microsoft-com:mac:vml" xmlns:p="http://schemas.openxmlformats.org/presentationml/2006/main" xmlns:c="http://schemas.openxmlformats.org/drawingml/2006/chart" xmlns:dgm="http://schemas.openxmlformats.org/drawingml/2006/diagram" xmlns:o="urn:schemas-microsoft-com:office:office" xmlns:v="urn:schemas-microsoft-com:vml" xmlns:pvml="urn:schemas-microsoft-com:office:powerpoint" xmlns:com="http://schemas.openxmlformats.org/drawingml/2006/compatibility" xmlns:p14="http://schemas.microsoft.com/office/powerpoint/2010/main" xmlns:p15="http://schemas.microsoft.com/office/powerpoint/2012/main" xmlns:ahyp="http://schemas.microsoft.com/office/drawing/2018/hyperlinkcolor">
-  <p:cSld>
-    <p:spTree>
-      <p:nvGrpSpPr>
-        <p:cNvPr id="108" name="Shape 108"/>
-        <p:cNvGrpSpPr/>
-        <p:nvPr/>
-      </p:nvGrpSpPr>
-      <p:grpSpPr>
-        <a:xfrm>
-          <a:off x="0" y="0"/>
-          <a:ext cx="0" cy="0"/>
-          <a:chOff x="0" y="0"/>
-          <a:chExt cx="0" cy="0"/>
-        </a:xfrm>
-      </p:grpSpPr>
       <p:grpSp>
         <p:nvGrpSpPr>
-          <p:cNvPr id="109" name="Google Shape;109;p17"/>
+          <p:cNvPr id="103" name="Google Shape;103;p16"/>
           <p:cNvGrpSpPr/>
           <p:nvPr/>
         </p:nvGrpSpPr>
         <p:grpSpPr>
           <a:xfrm flipH="1">
-            <a:off x="5543897" y="2571755"/>
-            <a:ext cx="3158557" cy="1047300"/>
-            <a:chOff x="722970" y="1727625"/>
-            <a:chExt cx="3158557" cy="1047300"/>
+            <a:off x="5543897" y="2611639"/>
+            <a:ext cx="3231128" cy="1243361"/>
+            <a:chOff x="650399" y="1767509"/>
+            <a:chExt cx="3231128" cy="1243361"/>
           </a:xfrm>
         </p:grpSpPr>
         <p:sp>
           <p:nvSpPr>
-            <p:cNvPr id="110" name="Google Shape;110;p17"/>
+            <p:cNvPr id="104" name="Google Shape;104;p16"/>
             <p:cNvSpPr txBox="1"/>
             <p:nvPr/>
           </p:nvSpPr>
           <p:spPr>
             <a:xfrm>
-              <a:off x="722970" y="1727625"/>
-              <a:ext cx="2077200" cy="1047300"/>
+              <a:off x="650399" y="1923970"/>
+              <a:ext cx="2077200" cy="1086900"/>
             </a:xfrm>
             <a:prstGeom prst="rect">
               <a:avLst/>
@@ -10957,7 +12043,7 @@
               <a:r>
                 <a:t/>
               </a:r>
-              <a:endParaRPr b="1" sz="1200">
+              <a:endParaRPr b="1" sz="800">
                 <a:latin typeface="Times New Roman"/>
                 <a:ea typeface="Times New Roman"/>
                 <a:cs typeface="Times New Roman"/>
@@ -10975,7 +12061,7 @@
                 <a:buNone/>
               </a:pPr>
               <a:r>
-                <a:rPr lang="en" sz="900">
+                <a:rPr lang="en" sz="1150">
                   <a:latin typeface="Times New Roman"/>
                   <a:ea typeface="Times New Roman"/>
                   <a:cs typeface="Times New Roman"/>
@@ -10983,7 +12069,7 @@
                 </a:rPr>
                 <a:t>After analysing party performance and distribution of parliamentary constituency . The two more dashboard i.e. Year wise analysis and state level analysis added .</a:t>
               </a:r>
-              <a:endParaRPr sz="900">
+              <a:endParaRPr sz="1150">
                 <a:latin typeface="Times New Roman"/>
                 <a:ea typeface="Times New Roman"/>
                 <a:cs typeface="Times New Roman"/>
@@ -10994,9 +12080,9 @@
         </p:sp>
         <p:cxnSp>
           <p:nvCxnSpPr>
-            <p:cNvPr id="111" name="Google Shape;111;p17"/>
+            <p:cNvPr id="105" name="Google Shape;105;p16"/>
             <p:cNvCxnSpPr>
-              <a:endCxn id="112" idx="3"/>
+              <a:endCxn id="106" idx="3"/>
             </p:cNvCxnSpPr>
             <p:nvPr/>
           </p:nvCxnSpPr>
@@ -11022,7 +12108,7 @@
         </p:cxnSp>
         <p:sp>
           <p:nvSpPr>
-            <p:cNvPr id="113" name="Google Shape;113;p17"/>
+            <p:cNvPr id="107" name="Google Shape;107;p16"/>
             <p:cNvSpPr/>
             <p:nvPr/>
           </p:nvSpPr>
@@ -11065,7 +12151,7 @@
         </p:sp>
         <p:sp>
           <p:nvSpPr>
-            <p:cNvPr id="112" name="Google Shape;112;p17"/>
+            <p:cNvPr id="106" name="Google Shape;106;p16"/>
             <p:cNvSpPr txBox="1"/>
             <p:nvPr/>
           </p:nvSpPr>
@@ -11120,13 +12206,13 @@
       </p:grpSp>
       <p:grpSp>
         <p:nvGrpSpPr>
-          <p:cNvPr id="114" name="Google Shape;114;p17"/>
+          <p:cNvPr id="108" name="Google Shape;108;p16"/>
           <p:cNvGrpSpPr/>
           <p:nvPr/>
         </p:nvGrpSpPr>
         <p:grpSpPr>
           <a:xfrm>
-            <a:off x="306525" y="2668950"/>
+            <a:off x="306525" y="2788575"/>
             <a:ext cx="3548729" cy="1282800"/>
             <a:chOff x="628505" y="1448770"/>
             <a:chExt cx="3548729" cy="1282800"/>
@@ -11134,7 +12220,7 @@
         </p:grpSpPr>
         <p:sp>
           <p:nvSpPr>
-            <p:cNvPr id="115" name="Google Shape;115;p17"/>
+            <p:cNvPr id="109" name="Google Shape;109;p16"/>
             <p:cNvSpPr txBox="1"/>
             <p:nvPr/>
           </p:nvSpPr>
@@ -11222,7 +12308,7 @@
                 <a:buNone/>
               </a:pPr>
               <a:r>
-                <a:rPr lang="en" sz="900">
+                <a:rPr lang="en" sz="1150">
                   <a:latin typeface="Times New Roman"/>
                   <a:ea typeface="Times New Roman"/>
                   <a:cs typeface="Times New Roman"/>
@@ -11230,7 +12316,7 @@
                 </a:rPr>
                 <a:t>After year wise and state level analysis , the three dashboard i.e. candidate performance analysis , Gender wise analysis and electoral competitiveness to understand gender representation , party performance and competitive nature of election.</a:t>
               </a:r>
-              <a:endParaRPr b="1" sz="900">
+              <a:endParaRPr b="1" sz="1150">
                 <a:latin typeface="Times New Roman"/>
                 <a:ea typeface="Times New Roman"/>
                 <a:cs typeface="Times New Roman"/>
@@ -11241,7 +12327,7 @@
         </p:sp>
         <p:cxnSp>
           <p:nvCxnSpPr>
-            <p:cNvPr id="116" name="Google Shape;116;p17"/>
+            <p:cNvPr id="110" name="Google Shape;110;p16"/>
             <p:cNvCxnSpPr/>
             <p:nvPr/>
           </p:nvCxnSpPr>
@@ -11267,7 +12353,7 @@
         </p:cxnSp>
         <p:sp>
           <p:nvSpPr>
-            <p:cNvPr id="117" name="Google Shape;117;p17"/>
+            <p:cNvPr id="111" name="Google Shape;111;p16"/>
             <p:cNvSpPr/>
             <p:nvPr/>
           </p:nvSpPr>
@@ -11310,7 +12396,7 @@
         </p:sp>
         <p:sp>
           <p:nvSpPr>
-            <p:cNvPr id="118" name="Google Shape;118;p17"/>
+            <p:cNvPr id="112" name="Google Shape;112;p16"/>
             <p:cNvSpPr txBox="1"/>
             <p:nvPr/>
           </p:nvSpPr>
@@ -11365,7 +12451,7 @@
       </p:grpSp>
       <p:grpSp>
         <p:nvGrpSpPr>
-          <p:cNvPr id="119" name="Google Shape;119;p17"/>
+          <p:cNvPr id="113" name="Google Shape;113;p16"/>
           <p:cNvGrpSpPr/>
           <p:nvPr/>
         </p:nvGrpSpPr>
@@ -11379,7 +12465,7 @@
         </p:grpSpPr>
         <p:sp>
           <p:nvSpPr>
-            <p:cNvPr id="120" name="Google Shape;120;p17"/>
+            <p:cNvPr id="114" name="Google Shape;114;p16"/>
             <p:cNvSpPr txBox="1"/>
             <p:nvPr/>
           </p:nvSpPr>
@@ -11421,7 +12507,16 @@
                   <a:cs typeface="Times New Roman"/>
                   <a:sym typeface="Times New Roman"/>
                 </a:rPr>
-                <a:t>Data Collection and Preprocessing</a:t>
+                <a:t>Milestone 1  (</a:t>
+              </a:r>
+              <a:r>
+                <a:rPr b="1" lang="en" sz="1200">
+                  <a:latin typeface="Times New Roman"/>
+                  <a:ea typeface="Times New Roman"/>
+                  <a:cs typeface="Times New Roman"/>
+                  <a:sym typeface="Times New Roman"/>
+                </a:rPr>
+                <a:t>Data Collection and Preprocessing )</a:t>
               </a:r>
               <a:endParaRPr b="1" sz="1200">
                 <a:latin typeface="Times New Roman"/>
@@ -11433,7 +12528,7 @@
             <a:p>
               <a:pPr indent="0" lvl="0" marL="0" rtl="0" algn="l">
                 <a:lnSpc>
-                  <a:spcPct val="150000"/>
+                  <a:spcPct val="100000"/>
                 </a:lnSpc>
                 <a:spcBef>
                   <a:spcPts val="0"/>
@@ -11444,9 +12539,15 @@
                 <a:buNone/>
               </a:pPr>
               <a:r>
-                <a:t/>
+                <a:rPr lang="en" sz="1150">
+                  <a:latin typeface="Times New Roman"/>
+                  <a:ea typeface="Times New Roman"/>
+                  <a:cs typeface="Times New Roman"/>
+                  <a:sym typeface="Times New Roman"/>
+                </a:rPr>
+                <a:t>The dataset collected from kaggle ‘Indian Election Dataset’.</a:t>
               </a:r>
-              <a:endParaRPr sz="100">
+              <a:endParaRPr sz="1150">
                 <a:latin typeface="Times New Roman"/>
                 <a:ea typeface="Times New Roman"/>
                 <a:cs typeface="Times New Roman"/>
@@ -11455,9 +12556,6 @@
             </a:p>
             <a:p>
               <a:pPr indent="0" lvl="0" marL="0" rtl="0" algn="l">
-                <a:lnSpc>
-                  <a:spcPct val="150000"/>
-                </a:lnSpc>
                 <a:spcBef>
                   <a:spcPts val="0"/>
                 </a:spcBef>
@@ -11467,15 +12565,15 @@
                 <a:buNone/>
               </a:pPr>
               <a:r>
-                <a:rPr lang="en" sz="900">
+                <a:rPr lang="en" sz="1150">
                   <a:latin typeface="Times New Roman"/>
                   <a:ea typeface="Times New Roman"/>
                   <a:cs typeface="Times New Roman"/>
                   <a:sym typeface="Times New Roman"/>
                 </a:rPr>
-                <a:t>The dataset collected from kaggle ‘Indian Election Dataset’</a:t>
+                <a:t>Before creating dashboard we first preprocessed the data by handling null values and missing values , identifying duplicate rows and standardising values of categorical columns like state name and party name .</a:t>
               </a:r>
-              <a:endParaRPr sz="900">
+              <a:endParaRPr sz="1150">
                 <a:latin typeface="Times New Roman"/>
                 <a:ea typeface="Times New Roman"/>
                 <a:cs typeface="Times New Roman"/>
@@ -11484,9 +12582,6 @@
             </a:p>
             <a:p>
               <a:pPr indent="0" lvl="0" marL="0" rtl="0" algn="l">
-                <a:lnSpc>
-                  <a:spcPct val="150000"/>
-                </a:lnSpc>
                 <a:spcBef>
                   <a:spcPts val="0"/>
                 </a:spcBef>
@@ -11496,155 +12591,15 @@
                 <a:buNone/>
               </a:pPr>
               <a:r>
-                <a:rPr lang="en" sz="900">
+                <a:rPr lang="en" sz="1150">
                   <a:latin typeface="Times New Roman"/>
                   <a:ea typeface="Times New Roman"/>
                   <a:cs typeface="Times New Roman"/>
                   <a:sym typeface="Times New Roman"/>
                 </a:rPr>
-                <a:t>Data Preprocessing Steps:</a:t>
+                <a:t>Also custom column creation like turnout% and winner.</a:t>
               </a:r>
-              <a:endParaRPr sz="900">
-                <a:latin typeface="Times New Roman"/>
-                <a:ea typeface="Times New Roman"/>
-                <a:cs typeface="Times New Roman"/>
-                <a:sym typeface="Times New Roman"/>
-              </a:endParaRPr>
-            </a:p>
-            <a:p>
-              <a:pPr indent="-285750" lvl="0" marL="457200" rtl="0" algn="l">
-                <a:spcBef>
-                  <a:spcPts val="0"/>
-                </a:spcBef>
-                <a:spcAft>
-                  <a:spcPts val="0"/>
-                </a:spcAft>
-                <a:buSzPts val="900"/>
-                <a:buFont typeface="Times New Roman"/>
-                <a:buAutoNum type="arabicPeriod"/>
-              </a:pPr>
-              <a:r>
-                <a:rPr lang="en" sz="900">
-                  <a:latin typeface="Times New Roman"/>
-                  <a:ea typeface="Times New Roman"/>
-                  <a:cs typeface="Times New Roman"/>
-                  <a:sym typeface="Times New Roman"/>
-                </a:rPr>
-                <a:t>Checking the data types of each column.</a:t>
-              </a:r>
-              <a:endParaRPr sz="900">
-                <a:latin typeface="Times New Roman"/>
-                <a:ea typeface="Times New Roman"/>
-                <a:cs typeface="Times New Roman"/>
-                <a:sym typeface="Times New Roman"/>
-              </a:endParaRPr>
-            </a:p>
-            <a:p>
-              <a:pPr indent="-285750" lvl="0" marL="457200" rtl="0" algn="l">
-                <a:spcBef>
-                  <a:spcPts val="0"/>
-                </a:spcBef>
-                <a:spcAft>
-                  <a:spcPts val="0"/>
-                </a:spcAft>
-                <a:buSzPts val="900"/>
-                <a:buFont typeface="Times New Roman"/>
-                <a:buAutoNum type="arabicPeriod"/>
-              </a:pPr>
-              <a:r>
-                <a:rPr lang="en" sz="900">
-                  <a:latin typeface="Times New Roman"/>
-                  <a:ea typeface="Times New Roman"/>
-                  <a:cs typeface="Times New Roman"/>
-                  <a:sym typeface="Times New Roman"/>
-                </a:rPr>
-                <a:t>Checking for null /empty values </a:t>
-              </a:r>
-              <a:endParaRPr sz="900">
-                <a:latin typeface="Times New Roman"/>
-                <a:ea typeface="Times New Roman"/>
-                <a:cs typeface="Times New Roman"/>
-                <a:sym typeface="Times New Roman"/>
-              </a:endParaRPr>
-            </a:p>
-            <a:p>
-              <a:pPr indent="-285750" lvl="0" marL="457200" rtl="0" algn="l">
-                <a:spcBef>
-                  <a:spcPts val="0"/>
-                </a:spcBef>
-                <a:spcAft>
-                  <a:spcPts val="0"/>
-                </a:spcAft>
-                <a:buSzPts val="900"/>
-                <a:buFont typeface="Times New Roman"/>
-                <a:buAutoNum type="arabicPeriod"/>
-              </a:pPr>
-              <a:r>
-                <a:rPr lang="en" sz="900">
-                  <a:latin typeface="Times New Roman"/>
-                  <a:ea typeface="Times New Roman"/>
-                  <a:cs typeface="Times New Roman"/>
-                  <a:sym typeface="Times New Roman"/>
-                </a:rPr>
-                <a:t>Checking for duplicates</a:t>
-              </a:r>
-              <a:endParaRPr sz="900">
-                <a:latin typeface="Times New Roman"/>
-                <a:ea typeface="Times New Roman"/>
-                <a:cs typeface="Times New Roman"/>
-                <a:sym typeface="Times New Roman"/>
-              </a:endParaRPr>
-            </a:p>
-            <a:p>
-              <a:pPr indent="-285750" lvl="0" marL="457200" rtl="0" algn="l">
-                <a:spcBef>
-                  <a:spcPts val="0"/>
-                </a:spcBef>
-                <a:spcAft>
-                  <a:spcPts val="0"/>
-                </a:spcAft>
-                <a:buSzPts val="900"/>
-                <a:buFont typeface="Times New Roman"/>
-                <a:buAutoNum type="arabicPeriod"/>
-              </a:pPr>
-              <a:r>
-                <a:rPr lang="en" sz="900">
-                  <a:latin typeface="Times New Roman"/>
-                  <a:ea typeface="Times New Roman"/>
-                  <a:cs typeface="Times New Roman"/>
-                  <a:sym typeface="Times New Roman"/>
-                </a:rPr>
-                <a:t>Replaced mismatching or different spelling values in ‘state name’ and ‘party name’ column like Chhattisgarh and Chattisgarh and BJP and Bhartiya Janta Party and similarly 9 values. Got 45 distinct values reduced to 36 distincts.</a:t>
-              </a:r>
-              <a:endParaRPr sz="900">
-                <a:latin typeface="Times New Roman"/>
-                <a:ea typeface="Times New Roman"/>
-                <a:cs typeface="Times New Roman"/>
-                <a:sym typeface="Times New Roman"/>
-              </a:endParaRPr>
-            </a:p>
-            <a:p>
-              <a:pPr indent="-285750" lvl="0" marL="457200" rtl="0" algn="l">
-                <a:spcBef>
-                  <a:spcPts val="0"/>
-                </a:spcBef>
-                <a:spcAft>
-                  <a:spcPts val="0"/>
-                </a:spcAft>
-                <a:buSzPts val="900"/>
-                <a:buFont typeface="Times New Roman"/>
-                <a:buAutoNum type="arabicPeriod"/>
-              </a:pPr>
-              <a:r>
-                <a:rPr lang="en" sz="900">
-                  <a:latin typeface="Times New Roman"/>
-                  <a:ea typeface="Times New Roman"/>
-                  <a:cs typeface="Times New Roman"/>
-                  <a:sym typeface="Times New Roman"/>
-                </a:rPr>
-                <a:t>Added a custom column ‘voters_turnout_%’ to calculate percentage of totvotpoll over electors.</a:t>
-              </a:r>
-              <a:endParaRPr sz="900">
+              <a:endParaRPr sz="1150">
                 <a:latin typeface="Times New Roman"/>
                 <a:ea typeface="Times New Roman"/>
                 <a:cs typeface="Times New Roman"/>
@@ -11655,9 +12610,9 @@
         </p:sp>
         <p:cxnSp>
           <p:nvCxnSpPr>
-            <p:cNvPr id="121" name="Google Shape;121;p17"/>
+            <p:cNvPr id="115" name="Google Shape;115;p16"/>
             <p:cNvCxnSpPr>
-              <a:endCxn id="122" idx="1"/>
+              <a:endCxn id="116" idx="1"/>
             </p:cNvCxnSpPr>
             <p:nvPr/>
           </p:nvCxnSpPr>
@@ -11683,7 +12638,7 @@
         </p:cxnSp>
         <p:sp>
           <p:nvSpPr>
-            <p:cNvPr id="123" name="Google Shape;123;p17"/>
+            <p:cNvPr id="117" name="Google Shape;117;p16"/>
             <p:cNvSpPr/>
             <p:nvPr/>
           </p:nvSpPr>
@@ -11726,7 +12681,7 @@
         </p:sp>
         <p:sp>
           <p:nvSpPr>
-            <p:cNvPr id="122" name="Google Shape;122;p17"/>
+            <p:cNvPr id="116" name="Google Shape;116;p16"/>
             <p:cNvSpPr txBox="1"/>
             <p:nvPr/>
           </p:nvSpPr>
@@ -11781,13 +12736,13 @@
       </p:grpSp>
       <p:grpSp>
         <p:nvGrpSpPr>
-          <p:cNvPr id="124" name="Google Shape;124;p17"/>
+          <p:cNvPr id="118" name="Google Shape;118;p16"/>
           <p:cNvGrpSpPr/>
           <p:nvPr/>
         </p:nvGrpSpPr>
         <p:grpSpPr>
           <a:xfrm>
-            <a:off x="2787347" y="756110"/>
+            <a:off x="2817247" y="771060"/>
             <a:ext cx="3671622" cy="3900367"/>
             <a:chOff x="3217473" y="1225350"/>
             <a:chExt cx="3118150" cy="3159727"/>
@@ -11795,7 +12750,7 @@
         </p:grpSpPr>
         <p:sp>
           <p:nvSpPr>
-            <p:cNvPr id="125" name="Google Shape;125;p17"/>
+            <p:cNvPr id="119" name="Google Shape;119;p16"/>
             <p:cNvSpPr/>
             <p:nvPr/>
           </p:nvSpPr>
@@ -11834,7 +12789,7 @@
         </p:sp>
         <p:sp>
           <p:nvSpPr>
-            <p:cNvPr id="126" name="Google Shape;126;p17"/>
+            <p:cNvPr id="120" name="Google Shape;120;p16"/>
             <p:cNvSpPr/>
             <p:nvPr/>
           </p:nvSpPr>
@@ -11873,7 +12828,7 @@
         </p:sp>
         <p:sp>
           <p:nvSpPr>
-            <p:cNvPr id="127" name="Google Shape;127;p17"/>
+            <p:cNvPr id="121" name="Google Shape;121;p16"/>
             <p:cNvSpPr/>
             <p:nvPr/>
           </p:nvSpPr>
@@ -11912,7 +12867,7 @@
         </p:sp>
         <p:sp>
           <p:nvSpPr>
-            <p:cNvPr id="128" name="Google Shape;128;p17"/>
+            <p:cNvPr id="122" name="Google Shape;122;p16"/>
             <p:cNvSpPr/>
             <p:nvPr/>
           </p:nvSpPr>
@@ -11951,7 +12906,7 @@
         </p:sp>
         <p:sp>
           <p:nvSpPr>
-            <p:cNvPr id="129" name="Google Shape;129;p17"/>
+            <p:cNvPr id="123" name="Google Shape;123;p16"/>
             <p:cNvSpPr/>
             <p:nvPr/>
           </p:nvSpPr>
@@ -11990,7 +12945,7 @@
         </p:sp>
         <p:sp>
           <p:nvSpPr>
-            <p:cNvPr id="130" name="Google Shape;130;p17"/>
+            <p:cNvPr id="124" name="Google Shape;124;p16"/>
             <p:cNvSpPr/>
             <p:nvPr/>
           </p:nvSpPr>
@@ -12037,7 +12992,7 @@
         </p:sp>
         <p:sp>
           <p:nvSpPr>
-            <p:cNvPr id="131" name="Google Shape;131;p17"/>
+            <p:cNvPr id="125" name="Google Shape;125;p16"/>
             <p:cNvSpPr/>
             <p:nvPr/>
           </p:nvSpPr>
@@ -12076,7 +13031,7 @@
         </p:sp>
         <p:sp>
           <p:nvSpPr>
-            <p:cNvPr id="132" name="Google Shape;132;p17"/>
+            <p:cNvPr id="126" name="Google Shape;126;p16"/>
             <p:cNvSpPr/>
             <p:nvPr/>
           </p:nvSpPr>
@@ -12115,7 +13070,7 @@
         </p:sp>
         <p:sp>
           <p:nvSpPr>
-            <p:cNvPr id="133" name="Google Shape;133;p17"/>
+            <p:cNvPr id="127" name="Google Shape;127;p16"/>
             <p:cNvSpPr/>
             <p:nvPr/>
           </p:nvSpPr>
@@ -12154,7 +13109,7 @@
         </p:sp>
         <p:sp>
           <p:nvSpPr>
-            <p:cNvPr id="134" name="Google Shape;134;p17"/>
+            <p:cNvPr id="128" name="Google Shape;128;p16"/>
             <p:cNvSpPr/>
             <p:nvPr/>
           </p:nvSpPr>
@@ -12190,7 +13145,7 @@
         </p:sp>
         <p:sp>
           <p:nvSpPr>
-            <p:cNvPr id="135" name="Google Shape;135;p17"/>
+            <p:cNvPr id="129" name="Google Shape;129;p16"/>
             <p:cNvSpPr/>
             <p:nvPr/>
           </p:nvSpPr>
@@ -12226,7 +13181,7 @@
         </p:sp>
         <p:sp>
           <p:nvSpPr>
-            <p:cNvPr id="136" name="Google Shape;136;p17"/>
+            <p:cNvPr id="130" name="Google Shape;130;p16"/>
             <p:cNvSpPr/>
             <p:nvPr/>
           </p:nvSpPr>
@@ -12265,7 +13220,7 @@
         </p:sp>
         <p:sp>
           <p:nvSpPr>
-            <p:cNvPr id="137" name="Google Shape;137;p17"/>
+            <p:cNvPr id="131" name="Google Shape;131;p16"/>
             <p:cNvSpPr/>
             <p:nvPr/>
           </p:nvSpPr>
@@ -12304,7 +13259,7 @@
         </p:sp>
         <p:sp>
           <p:nvSpPr>
-            <p:cNvPr id="138" name="Google Shape;138;p17"/>
+            <p:cNvPr id="132" name="Google Shape;132;p16"/>
             <p:cNvSpPr/>
             <p:nvPr/>
           </p:nvSpPr>
@@ -12344,7 +13299,7 @@
       </p:grpSp>
       <p:grpSp>
         <p:nvGrpSpPr>
-          <p:cNvPr id="139" name="Google Shape;139;p17"/>
+          <p:cNvPr id="133" name="Google Shape;133;p16"/>
           <p:cNvGrpSpPr/>
           <p:nvPr/>
         </p:nvGrpSpPr>
@@ -12358,7 +13313,7 @@
         </p:grpSpPr>
         <p:sp>
           <p:nvSpPr>
-            <p:cNvPr id="140" name="Google Shape;140;p17"/>
+            <p:cNvPr id="134" name="Google Shape;134;p16"/>
             <p:cNvSpPr txBox="1"/>
             <p:nvPr/>
           </p:nvSpPr>
@@ -12381,7 +13336,7 @@
             </a:bodyPr>
             <a:lstStyle/>
             <a:p>
-              <a:pPr indent="0" lvl="0" marL="0" rtl="0" algn="r">
+              <a:pPr indent="0" lvl="0" marL="0" rtl="0" algn="l">
                 <a:spcBef>
                   <a:spcPts val="0"/>
                 </a:spcBef>
@@ -12397,7 +13352,7 @@
                   <a:cs typeface="Times New Roman"/>
                   <a:sym typeface="Times New Roman"/>
                 </a:rPr>
-                <a:t>Dashboard creation started </a:t>
+                <a:t>Milestone 2 (Dashboard creation started )</a:t>
               </a:r>
               <a:endParaRPr b="1" sz="1200">
                 <a:latin typeface="Times New Roman"/>
@@ -12437,7 +13392,7 @@
                 <a:buNone/>
               </a:pPr>
               <a:r>
-                <a:rPr lang="en" sz="900">
+                <a:rPr lang="en" sz="1150">
                   <a:latin typeface="Times New Roman"/>
                   <a:ea typeface="Times New Roman"/>
                   <a:cs typeface="Times New Roman"/>
@@ -12445,7 +13400,7 @@
                 </a:rPr>
                 <a:t>Dashboard development started in milestone 2 .The three dashboard i.e. election overview , party performance analysis and distribution of parliamentary constituency created in milestone 2.</a:t>
               </a:r>
-              <a:endParaRPr b="1" sz="900">
+              <a:endParaRPr b="1" sz="1150">
                 <a:latin typeface="Times New Roman"/>
                 <a:ea typeface="Times New Roman"/>
                 <a:cs typeface="Times New Roman"/>
@@ -12456,7 +13411,7 @@
         </p:sp>
         <p:cxnSp>
           <p:nvCxnSpPr>
-            <p:cNvPr id="141" name="Google Shape;141;p17"/>
+            <p:cNvPr id="135" name="Google Shape;135;p16"/>
             <p:cNvCxnSpPr/>
             <p:nvPr/>
           </p:nvCxnSpPr>
@@ -12482,7 +13437,7 @@
         </p:cxnSp>
         <p:sp>
           <p:nvSpPr>
-            <p:cNvPr id="142" name="Google Shape;142;p17"/>
+            <p:cNvPr id="136" name="Google Shape;136;p16"/>
             <p:cNvSpPr/>
             <p:nvPr/>
           </p:nvSpPr>
@@ -12525,7 +13480,7 @@
         </p:sp>
         <p:sp>
           <p:nvSpPr>
-            <p:cNvPr id="143" name="Google Shape;143;p17"/>
+            <p:cNvPr id="137" name="Google Shape;137;p16"/>
             <p:cNvSpPr txBox="1"/>
             <p:nvPr/>
           </p:nvSpPr>
@@ -12580,7 +13535,1870 @@
       </p:grpSp>
       <p:sp>
         <p:nvSpPr>
-          <p:cNvPr id="144" name="Google Shape;144;p17"/>
+          <p:cNvPr id="138" name="Google Shape;138;p16"/>
+          <p:cNvSpPr txBox="1"/>
+          <p:nvPr/>
+        </p:nvSpPr>
+        <p:spPr>
+          <a:xfrm>
+            <a:off x="229450" y="276750"/>
+            <a:ext cx="3625800" cy="711300"/>
+          </a:xfrm>
+          <a:prstGeom prst="rect">
+            <a:avLst/>
+          </a:prstGeom>
+          <a:noFill/>
+          <a:ln>
+            <a:noFill/>
+          </a:ln>
+        </p:spPr>
+        <p:txBody>
+          <a:bodyPr anchorCtr="0" anchor="t" bIns="91425" lIns="91425" spcFirstLastPara="1" rIns="91425" wrap="square" tIns="91425">
+            <a:noAutofit/>
+          </a:bodyPr>
+          <a:lstStyle/>
+          <a:p>
+            <a:pPr indent="0" lvl="0" marL="0" rtl="0" algn="l">
+              <a:spcBef>
+                <a:spcPts val="0"/>
+              </a:spcBef>
+              <a:spcAft>
+                <a:spcPts val="0"/>
+              </a:spcAft>
+              <a:buNone/>
+            </a:pPr>
+            <a:r>
+              <a:rPr b="1" lang="en" sz="2700">
+                <a:solidFill>
+                  <a:schemeClr val="accent1"/>
+                </a:solidFill>
+                <a:latin typeface="Times New Roman"/>
+                <a:ea typeface="Times New Roman"/>
+                <a:cs typeface="Times New Roman"/>
+                <a:sym typeface="Times New Roman"/>
+              </a:rPr>
+              <a:t>Milestones</a:t>
+            </a:r>
+            <a:endParaRPr b="1" sz="2700">
+              <a:solidFill>
+                <a:schemeClr val="accent1"/>
+              </a:solidFill>
+              <a:latin typeface="Times New Roman"/>
+              <a:ea typeface="Times New Roman"/>
+              <a:cs typeface="Times New Roman"/>
+              <a:sym typeface="Times New Roman"/>
+            </a:endParaRPr>
+          </a:p>
+        </p:txBody>
+      </p:sp>
+    </p:spTree>
+  </p:cSld>
+  <p:clrMapOvr>
+    <a:masterClrMapping/>
+  </p:clrMapOvr>
+</p:sld>
+</file>
+
+<file path=ppt/slides/slide5.xml><?xml version="1.0" encoding="utf-8"?>
+<p:sld xmlns:a="http://schemas.openxmlformats.org/drawingml/2006/main" xmlns:r="http://schemas.openxmlformats.org/officeDocument/2006/relationships" xmlns:mc="http://schemas.openxmlformats.org/markup-compatibility/2006" xmlns:mv="urn:schemas-microsoft-com:mac:vml" xmlns:p="http://schemas.openxmlformats.org/presentationml/2006/main" xmlns:c="http://schemas.openxmlformats.org/drawingml/2006/chart" xmlns:dgm="http://schemas.openxmlformats.org/drawingml/2006/diagram" xmlns:o="urn:schemas-microsoft-com:office:office" xmlns:v="urn:schemas-microsoft-com:vml" xmlns:pvml="urn:schemas-microsoft-com:office:powerpoint" xmlns:com="http://schemas.openxmlformats.org/drawingml/2006/compatibility" xmlns:p14="http://schemas.microsoft.com/office/powerpoint/2010/main" xmlns:p15="http://schemas.microsoft.com/office/powerpoint/2012/main" xmlns:ahyp="http://schemas.microsoft.com/office/drawing/2018/hyperlinkcolor">
+  <p:cSld>
+    <p:spTree>
+      <p:nvGrpSpPr>
+        <p:cNvPr id="142" name="Shape 142"/>
+        <p:cNvGrpSpPr/>
+        <p:nvPr/>
+      </p:nvGrpSpPr>
+      <p:grpSpPr>
+        <a:xfrm>
+          <a:off x="0" y="0"/>
+          <a:ext cx="0" cy="0"/>
+          <a:chOff x="0" y="0"/>
+          <a:chExt cx="0" cy="0"/>
+        </a:xfrm>
+      </p:grpSpPr>
+      <p:grpSp>
+        <p:nvGrpSpPr>
+          <p:cNvPr id="143" name="Google Shape;143;p17"/>
+          <p:cNvGrpSpPr/>
+          <p:nvPr/>
+        </p:nvGrpSpPr>
+        <p:grpSpPr>
+          <a:xfrm>
+            <a:off x="294175" y="1465300"/>
+            <a:ext cx="2417388" cy="924600"/>
+            <a:chOff x="373375" y="1465300"/>
+            <a:chExt cx="2417388" cy="924600"/>
+          </a:xfrm>
+        </p:grpSpPr>
+        <p:cxnSp>
+          <p:nvCxnSpPr>
+            <p:cNvPr id="144" name="Google Shape;144;p17"/>
+            <p:cNvCxnSpPr/>
+            <p:nvPr/>
+          </p:nvCxnSpPr>
+          <p:spPr>
+            <a:xfrm flipH="1">
+              <a:off x="2325163" y="1923125"/>
+              <a:ext cx="465600" cy="117900"/>
+            </a:xfrm>
+            <a:prstGeom prst="straightConnector1">
+              <a:avLst/>
+            </a:prstGeom>
+            <a:noFill/>
+            <a:ln cap="flat" cmpd="sng" w="9525">
+              <a:solidFill>
+                <a:srgbClr val="F4B400"/>
+              </a:solidFill>
+              <a:prstDash val="solid"/>
+              <a:round/>
+              <a:headEnd len="sm" w="sm" type="none"/>
+              <a:tailEnd len="med" w="med" type="oval"/>
+            </a:ln>
+          </p:spPr>
+        </p:cxnSp>
+        <p:sp>
+          <p:nvSpPr>
+            <p:cNvPr id="145" name="Google Shape;145;p17"/>
+            <p:cNvSpPr txBox="1"/>
+            <p:nvPr/>
+          </p:nvSpPr>
+          <p:spPr>
+            <a:xfrm>
+              <a:off x="373375" y="1465300"/>
+              <a:ext cx="1990200" cy="924600"/>
+            </a:xfrm>
+            <a:prstGeom prst="rect">
+              <a:avLst/>
+            </a:prstGeom>
+            <a:noFill/>
+            <a:ln>
+              <a:noFill/>
+            </a:ln>
+          </p:spPr>
+          <p:txBody>
+            <a:bodyPr anchorCtr="0" anchor="ctr" bIns="91425" lIns="91425" spcFirstLastPara="1" rIns="91425" wrap="square" tIns="91425">
+              <a:noAutofit/>
+            </a:bodyPr>
+            <a:lstStyle/>
+            <a:p>
+              <a:pPr indent="0" lvl="0" marL="0" rtl="0" algn="l">
+                <a:spcBef>
+                  <a:spcPts val="0"/>
+                </a:spcBef>
+                <a:spcAft>
+                  <a:spcPts val="0"/>
+                </a:spcAft>
+                <a:buNone/>
+              </a:pPr>
+              <a:r>
+                <a:rPr b="1" lang="en" sz="1200">
+                  <a:latin typeface="Roboto"/>
+                  <a:ea typeface="Roboto"/>
+                  <a:cs typeface="Roboto"/>
+                  <a:sym typeface="Roboto"/>
+                </a:rPr>
+                <a:t>Data Collection</a:t>
+              </a:r>
+              <a:endParaRPr b="1" sz="1200">
+                <a:latin typeface="Roboto"/>
+                <a:ea typeface="Roboto"/>
+                <a:cs typeface="Roboto"/>
+                <a:sym typeface="Roboto"/>
+              </a:endParaRPr>
+            </a:p>
+            <a:p>
+              <a:pPr indent="0" lvl="0" marL="0" rtl="0" algn="l">
+                <a:spcBef>
+                  <a:spcPts val="0"/>
+                </a:spcBef>
+                <a:spcAft>
+                  <a:spcPts val="0"/>
+                </a:spcAft>
+                <a:buNone/>
+              </a:pPr>
+              <a:r>
+                <a:rPr lang="en" sz="1000">
+                  <a:latin typeface="Times New Roman"/>
+                  <a:ea typeface="Times New Roman"/>
+                  <a:cs typeface="Times New Roman"/>
+                  <a:sym typeface="Times New Roman"/>
+                </a:rPr>
+                <a:t>The dataset used for this project was sourced from Kaggle, titled “Indian Election Dataset” by </a:t>
+              </a:r>
+              <a:r>
+                <a:rPr lang="en" sz="1000">
+                  <a:latin typeface="Times New Roman"/>
+                  <a:ea typeface="Times New Roman"/>
+                  <a:cs typeface="Times New Roman"/>
+                  <a:sym typeface="Times New Roman"/>
+                </a:rPr>
+                <a:t>Nandan</a:t>
+              </a:r>
+              <a:r>
+                <a:rPr lang="en" sz="1000">
+                  <a:latin typeface="Times New Roman"/>
+                  <a:ea typeface="Times New Roman"/>
+                  <a:cs typeface="Times New Roman"/>
+                  <a:sym typeface="Times New Roman"/>
+                </a:rPr>
+                <a:t> Pandey. </a:t>
+              </a:r>
+              <a:endParaRPr sz="1000">
+                <a:latin typeface="Times New Roman"/>
+                <a:ea typeface="Times New Roman"/>
+                <a:cs typeface="Times New Roman"/>
+                <a:sym typeface="Times New Roman"/>
+              </a:endParaRPr>
+            </a:p>
+            <a:p>
+              <a:pPr indent="0" lvl="0" marL="0" rtl="0" algn="l">
+                <a:spcBef>
+                  <a:spcPts val="0"/>
+                </a:spcBef>
+                <a:spcAft>
+                  <a:spcPts val="0"/>
+                </a:spcAft>
+                <a:buNone/>
+              </a:pPr>
+              <a:r>
+                <a:rPr lang="en" sz="1000">
+                  <a:latin typeface="Times New Roman"/>
+                  <a:ea typeface="Times New Roman"/>
+                  <a:cs typeface="Times New Roman"/>
+                  <a:sym typeface="Times New Roman"/>
+                </a:rPr>
+                <a:t>This dataset contains detailed candidate-level election data.</a:t>
+              </a:r>
+              <a:endParaRPr sz="1000">
+                <a:latin typeface="Roboto"/>
+                <a:ea typeface="Roboto"/>
+                <a:cs typeface="Roboto"/>
+                <a:sym typeface="Roboto"/>
+              </a:endParaRPr>
+            </a:p>
+          </p:txBody>
+        </p:sp>
+      </p:grpSp>
+      <p:grpSp>
+        <p:nvGrpSpPr>
+          <p:cNvPr id="146" name="Google Shape;146;p17"/>
+          <p:cNvGrpSpPr/>
+          <p:nvPr/>
+        </p:nvGrpSpPr>
+        <p:grpSpPr>
+          <a:xfrm>
+            <a:off x="308850" y="3064775"/>
+            <a:ext cx="2553813" cy="1540500"/>
+            <a:chOff x="308850" y="3064775"/>
+            <a:chExt cx="2553813" cy="1540500"/>
+          </a:xfrm>
+        </p:grpSpPr>
+        <p:cxnSp>
+          <p:nvCxnSpPr>
+            <p:cNvPr id="147" name="Google Shape;147;p17"/>
+            <p:cNvCxnSpPr>
+              <a:stCxn id="148" idx="1"/>
+            </p:cNvCxnSpPr>
+            <p:nvPr/>
+          </p:nvCxnSpPr>
+          <p:spPr>
+            <a:xfrm flipH="1">
+              <a:off x="2289663" y="3435460"/>
+              <a:ext cx="573000" cy="301200"/>
+            </a:xfrm>
+            <a:prstGeom prst="straightConnector1">
+              <a:avLst/>
+            </a:prstGeom>
+            <a:noFill/>
+            <a:ln cap="flat" cmpd="sng" w="9525">
+              <a:solidFill>
+                <a:srgbClr val="F4B400"/>
+              </a:solidFill>
+              <a:prstDash val="solid"/>
+              <a:round/>
+              <a:headEnd len="sm" w="sm" type="none"/>
+              <a:tailEnd len="med" w="med" type="oval"/>
+            </a:ln>
+          </p:spPr>
+        </p:cxnSp>
+        <p:sp>
+          <p:nvSpPr>
+            <p:cNvPr id="149" name="Google Shape;149;p17"/>
+            <p:cNvSpPr txBox="1"/>
+            <p:nvPr/>
+          </p:nvSpPr>
+          <p:spPr>
+            <a:xfrm>
+              <a:off x="308850" y="3064775"/>
+              <a:ext cx="2124000" cy="1540500"/>
+            </a:xfrm>
+            <a:prstGeom prst="rect">
+              <a:avLst/>
+            </a:prstGeom>
+            <a:noFill/>
+            <a:ln>
+              <a:noFill/>
+            </a:ln>
+          </p:spPr>
+          <p:txBody>
+            <a:bodyPr anchorCtr="0" anchor="ctr" bIns="91425" lIns="91425" spcFirstLastPara="1" rIns="91425" wrap="square" tIns="91425">
+              <a:noAutofit/>
+            </a:bodyPr>
+            <a:lstStyle/>
+            <a:p>
+              <a:pPr indent="0" lvl="0" marL="0" rtl="0" algn="l">
+                <a:spcBef>
+                  <a:spcPts val="0"/>
+                </a:spcBef>
+                <a:spcAft>
+                  <a:spcPts val="0"/>
+                </a:spcAft>
+                <a:buNone/>
+              </a:pPr>
+              <a:r>
+                <a:rPr b="1" lang="en" sz="1200">
+                  <a:latin typeface="Roboto"/>
+                  <a:ea typeface="Roboto"/>
+                  <a:cs typeface="Roboto"/>
+                  <a:sym typeface="Roboto"/>
+                </a:rPr>
+                <a:t>Data Preprocessing</a:t>
+              </a:r>
+              <a:endParaRPr b="1" sz="1200">
+                <a:latin typeface="Roboto"/>
+                <a:ea typeface="Roboto"/>
+                <a:cs typeface="Roboto"/>
+                <a:sym typeface="Roboto"/>
+              </a:endParaRPr>
+            </a:p>
+            <a:p>
+              <a:pPr indent="0" lvl="0" marL="0" rtl="0" algn="l">
+                <a:spcBef>
+                  <a:spcPts val="0"/>
+                </a:spcBef>
+                <a:spcAft>
+                  <a:spcPts val="0"/>
+                </a:spcAft>
+                <a:buNone/>
+              </a:pPr>
+              <a:r>
+                <a:rPr lang="en" sz="1000">
+                  <a:latin typeface="Times New Roman"/>
+                  <a:ea typeface="Times New Roman"/>
+                  <a:cs typeface="Times New Roman"/>
+                  <a:sym typeface="Times New Roman"/>
+                </a:rPr>
+                <a:t>Before creating dashboard we first preprocessed the data by handling null values and missing values , identifying duplicate rows and standardising values of categorical columns like state name and party name .</a:t>
+              </a:r>
+              <a:endParaRPr sz="1000">
+                <a:latin typeface="Times New Roman"/>
+                <a:ea typeface="Times New Roman"/>
+                <a:cs typeface="Times New Roman"/>
+                <a:sym typeface="Times New Roman"/>
+              </a:endParaRPr>
+            </a:p>
+            <a:p>
+              <a:pPr indent="0" lvl="0" marL="0" rtl="0" algn="l">
+                <a:spcBef>
+                  <a:spcPts val="0"/>
+                </a:spcBef>
+                <a:spcAft>
+                  <a:spcPts val="0"/>
+                </a:spcAft>
+                <a:buNone/>
+              </a:pPr>
+              <a:r>
+                <a:rPr lang="en" sz="1000">
+                  <a:latin typeface="Times New Roman"/>
+                  <a:ea typeface="Times New Roman"/>
+                  <a:cs typeface="Times New Roman"/>
+                  <a:sym typeface="Times New Roman"/>
+                </a:rPr>
+                <a:t>Also custom column creation like turnout% and winner.</a:t>
+              </a:r>
+              <a:endParaRPr sz="1000">
+                <a:latin typeface="Times New Roman"/>
+                <a:ea typeface="Times New Roman"/>
+                <a:cs typeface="Times New Roman"/>
+                <a:sym typeface="Times New Roman"/>
+              </a:endParaRPr>
+            </a:p>
+            <a:p>
+              <a:pPr indent="0" lvl="0" marL="0" rtl="0" algn="r">
+                <a:spcBef>
+                  <a:spcPts val="0"/>
+                </a:spcBef>
+                <a:spcAft>
+                  <a:spcPts val="1600"/>
+                </a:spcAft>
+                <a:buNone/>
+              </a:pPr>
+              <a:r>
+                <a:t/>
+              </a:r>
+              <a:endParaRPr sz="800">
+                <a:latin typeface="Roboto"/>
+                <a:ea typeface="Roboto"/>
+                <a:cs typeface="Roboto"/>
+                <a:sym typeface="Roboto"/>
+              </a:endParaRPr>
+            </a:p>
+          </p:txBody>
+        </p:sp>
+      </p:grpSp>
+      <p:grpSp>
+        <p:nvGrpSpPr>
+          <p:cNvPr id="150" name="Google Shape;150;p17"/>
+          <p:cNvGrpSpPr/>
+          <p:nvPr/>
+        </p:nvGrpSpPr>
+        <p:grpSpPr>
+          <a:xfrm>
+            <a:off x="3586475" y="3427200"/>
+            <a:ext cx="2596200" cy="1476950"/>
+            <a:chOff x="3616375" y="3337475"/>
+            <a:chExt cx="2596200" cy="1476950"/>
+          </a:xfrm>
+        </p:grpSpPr>
+        <p:cxnSp>
+          <p:nvCxnSpPr>
+            <p:cNvPr id="151" name="Google Shape;151;p17"/>
+            <p:cNvCxnSpPr/>
+            <p:nvPr/>
+          </p:nvCxnSpPr>
+          <p:spPr>
+            <a:xfrm>
+              <a:off x="4256300" y="3337475"/>
+              <a:ext cx="338400" cy="259200"/>
+            </a:xfrm>
+            <a:prstGeom prst="straightConnector1">
+              <a:avLst/>
+            </a:prstGeom>
+            <a:noFill/>
+            <a:ln cap="flat" cmpd="sng" w="9525">
+              <a:solidFill>
+                <a:srgbClr val="F4B400"/>
+              </a:solidFill>
+              <a:prstDash val="solid"/>
+              <a:round/>
+              <a:headEnd len="sm" w="sm" type="none"/>
+              <a:tailEnd len="med" w="med" type="oval"/>
+            </a:ln>
+          </p:spPr>
+        </p:cxnSp>
+        <p:sp>
+          <p:nvSpPr>
+            <p:cNvPr id="152" name="Google Shape;152;p17"/>
+            <p:cNvSpPr txBox="1"/>
+            <p:nvPr/>
+          </p:nvSpPr>
+          <p:spPr>
+            <a:xfrm>
+              <a:off x="3616375" y="3837325"/>
+              <a:ext cx="2596200" cy="977100"/>
+            </a:xfrm>
+            <a:prstGeom prst="rect">
+              <a:avLst/>
+            </a:prstGeom>
+            <a:noFill/>
+            <a:ln>
+              <a:noFill/>
+            </a:ln>
+          </p:spPr>
+          <p:txBody>
+            <a:bodyPr anchorCtr="0" anchor="ctr" bIns="91425" lIns="91425" spcFirstLastPara="1" rIns="91425" wrap="square" tIns="91425">
+              <a:noAutofit/>
+            </a:bodyPr>
+            <a:lstStyle/>
+            <a:p>
+              <a:pPr indent="0" lvl="0" marL="0" rtl="0" algn="l">
+                <a:spcBef>
+                  <a:spcPts val="0"/>
+                </a:spcBef>
+                <a:spcAft>
+                  <a:spcPts val="0"/>
+                </a:spcAft>
+                <a:buNone/>
+              </a:pPr>
+              <a:r>
+                <a:rPr b="1" lang="en" sz="1200">
+                  <a:latin typeface="Roboto"/>
+                  <a:ea typeface="Roboto"/>
+                  <a:cs typeface="Roboto"/>
+                  <a:sym typeface="Roboto"/>
+                </a:rPr>
+                <a:t>Documentation and presentation</a:t>
+              </a:r>
+              <a:endParaRPr b="1" sz="1200">
+                <a:latin typeface="Roboto"/>
+                <a:ea typeface="Roboto"/>
+                <a:cs typeface="Roboto"/>
+                <a:sym typeface="Roboto"/>
+              </a:endParaRPr>
+            </a:p>
+            <a:p>
+              <a:pPr indent="0" lvl="0" marL="0" rtl="0" algn="l">
+                <a:lnSpc>
+                  <a:spcPct val="115000"/>
+                </a:lnSpc>
+                <a:spcBef>
+                  <a:spcPts val="0"/>
+                </a:spcBef>
+                <a:spcAft>
+                  <a:spcPts val="0"/>
+                </a:spcAft>
+                <a:buNone/>
+              </a:pPr>
+              <a:r>
+                <a:rPr lang="en" sz="900">
+                  <a:latin typeface="Times New Roman"/>
+                  <a:ea typeface="Times New Roman"/>
+                  <a:cs typeface="Times New Roman"/>
+                  <a:sym typeface="Times New Roman"/>
+                </a:rPr>
+                <a:t>After building the dashboard and analyzing insights, we documented the complete project including methodology, calculations, and findings, and prepared a structured presentation for demonstration.</a:t>
+              </a:r>
+              <a:endParaRPr sz="900">
+                <a:latin typeface="Times New Roman"/>
+                <a:ea typeface="Times New Roman"/>
+                <a:cs typeface="Times New Roman"/>
+                <a:sym typeface="Times New Roman"/>
+              </a:endParaRPr>
+            </a:p>
+            <a:p>
+              <a:pPr indent="0" lvl="0" marL="0" rtl="0" algn="l">
+                <a:spcBef>
+                  <a:spcPts val="0"/>
+                </a:spcBef>
+                <a:spcAft>
+                  <a:spcPts val="1600"/>
+                </a:spcAft>
+                <a:buNone/>
+              </a:pPr>
+              <a:r>
+                <a:t/>
+              </a:r>
+              <a:endParaRPr sz="600">
+                <a:latin typeface="Roboto"/>
+                <a:ea typeface="Roboto"/>
+                <a:cs typeface="Roboto"/>
+                <a:sym typeface="Roboto"/>
+              </a:endParaRPr>
+            </a:p>
+          </p:txBody>
+        </p:sp>
+      </p:grpSp>
+      <p:grpSp>
+        <p:nvGrpSpPr>
+          <p:cNvPr id="153" name="Google Shape;153;p17"/>
+          <p:cNvGrpSpPr/>
+          <p:nvPr/>
+        </p:nvGrpSpPr>
+        <p:grpSpPr>
+          <a:xfrm>
+            <a:off x="3758400" y="754750"/>
+            <a:ext cx="2836650" cy="924600"/>
+            <a:chOff x="4087350" y="851925"/>
+            <a:chExt cx="2836650" cy="924600"/>
+          </a:xfrm>
+        </p:grpSpPr>
+        <p:sp>
+          <p:nvSpPr>
+            <p:cNvPr id="154" name="Google Shape;154;p17"/>
+            <p:cNvSpPr txBox="1"/>
+            <p:nvPr/>
+          </p:nvSpPr>
+          <p:spPr>
+            <a:xfrm>
+              <a:off x="5028300" y="851925"/>
+              <a:ext cx="1895700" cy="924600"/>
+            </a:xfrm>
+            <a:prstGeom prst="rect">
+              <a:avLst/>
+            </a:prstGeom>
+            <a:noFill/>
+            <a:ln>
+              <a:noFill/>
+            </a:ln>
+          </p:spPr>
+          <p:txBody>
+            <a:bodyPr anchorCtr="0" anchor="ctr" bIns="91425" lIns="91425" spcFirstLastPara="1" rIns="91425" wrap="square" tIns="91425">
+              <a:noAutofit/>
+            </a:bodyPr>
+            <a:lstStyle/>
+            <a:p>
+              <a:pPr indent="0" lvl="0" marL="0" rtl="0" algn="l">
+                <a:spcBef>
+                  <a:spcPts val="0"/>
+                </a:spcBef>
+                <a:spcAft>
+                  <a:spcPts val="0"/>
+                </a:spcAft>
+                <a:buNone/>
+              </a:pPr>
+              <a:r>
+                <a:rPr b="1" lang="en" sz="1200">
+                  <a:latin typeface="Roboto"/>
+                  <a:ea typeface="Roboto"/>
+                  <a:cs typeface="Roboto"/>
+                  <a:sym typeface="Roboto"/>
+                </a:rPr>
+                <a:t>Problem Identification</a:t>
+              </a:r>
+              <a:endParaRPr b="1" sz="1200">
+                <a:latin typeface="Roboto"/>
+                <a:ea typeface="Roboto"/>
+                <a:cs typeface="Roboto"/>
+                <a:sym typeface="Roboto"/>
+              </a:endParaRPr>
+            </a:p>
+            <a:p>
+              <a:pPr indent="0" lvl="0" marL="0" rtl="0" algn="l">
+                <a:spcBef>
+                  <a:spcPts val="0"/>
+                </a:spcBef>
+                <a:spcAft>
+                  <a:spcPts val="0"/>
+                </a:spcAft>
+                <a:buNone/>
+              </a:pPr>
+              <a:r>
+                <a:rPr lang="en" sz="900">
+                  <a:latin typeface="Times New Roman"/>
+                  <a:ea typeface="Times New Roman"/>
+                  <a:cs typeface="Times New Roman"/>
+                  <a:sym typeface="Times New Roman"/>
+                </a:rPr>
+                <a:t>The analysis and interpretation of election data pose significant challenges due to the large volume, complexity, and multidimensional structure of electoral datasets. This problem addressed by the ElectViz project which is the the interactive dashboard that can simplify complex election datasets into interactive visuals.</a:t>
+              </a:r>
+              <a:endParaRPr sz="900">
+                <a:latin typeface="Times New Roman"/>
+                <a:ea typeface="Times New Roman"/>
+                <a:cs typeface="Times New Roman"/>
+                <a:sym typeface="Times New Roman"/>
+              </a:endParaRPr>
+            </a:p>
+            <a:p>
+              <a:pPr indent="0" lvl="0" marL="0" rtl="0" algn="l">
+                <a:spcBef>
+                  <a:spcPts val="0"/>
+                </a:spcBef>
+                <a:spcAft>
+                  <a:spcPts val="1600"/>
+                </a:spcAft>
+                <a:buNone/>
+              </a:pPr>
+              <a:r>
+                <a:t/>
+              </a:r>
+              <a:endParaRPr sz="800">
+                <a:latin typeface="Roboto"/>
+                <a:ea typeface="Roboto"/>
+                <a:cs typeface="Roboto"/>
+                <a:sym typeface="Roboto"/>
+              </a:endParaRPr>
+            </a:p>
+          </p:txBody>
+        </p:sp>
+        <p:cxnSp>
+          <p:nvCxnSpPr>
+            <p:cNvPr id="155" name="Google Shape;155;p17"/>
+            <p:cNvCxnSpPr/>
+            <p:nvPr/>
+          </p:nvCxnSpPr>
+          <p:spPr>
+            <a:xfrm flipH="1" rot="10800000">
+              <a:off x="4087350" y="1313975"/>
+              <a:ext cx="871200" cy="187200"/>
+            </a:xfrm>
+            <a:prstGeom prst="straightConnector1">
+              <a:avLst/>
+            </a:prstGeom>
+            <a:noFill/>
+            <a:ln cap="flat" cmpd="sng" w="9525">
+              <a:solidFill>
+                <a:srgbClr val="F4B400"/>
+              </a:solidFill>
+              <a:prstDash val="solid"/>
+              <a:round/>
+              <a:headEnd len="sm" w="sm" type="none"/>
+              <a:tailEnd len="med" w="med" type="oval"/>
+            </a:ln>
+          </p:spPr>
+        </p:cxnSp>
+      </p:grpSp>
+      <p:grpSp>
+        <p:nvGrpSpPr>
+          <p:cNvPr id="156" name="Google Shape;156;p17"/>
+          <p:cNvGrpSpPr/>
+          <p:nvPr/>
+        </p:nvGrpSpPr>
+        <p:grpSpPr>
+          <a:xfrm>
+            <a:off x="4636950" y="2140175"/>
+            <a:ext cx="2173996" cy="924600"/>
+            <a:chOff x="4291000" y="2717050"/>
+            <a:chExt cx="2173996" cy="924600"/>
+          </a:xfrm>
+        </p:grpSpPr>
+        <p:cxnSp>
+          <p:nvCxnSpPr>
+            <p:cNvPr id="157" name="Google Shape;157;p17"/>
+            <p:cNvCxnSpPr>
+              <a:stCxn id="158" idx="3"/>
+            </p:cNvCxnSpPr>
+            <p:nvPr/>
+          </p:nvCxnSpPr>
+          <p:spPr>
+            <a:xfrm flipH="1" rot="10800000">
+              <a:off x="4291000" y="2813437"/>
+              <a:ext cx="766500" cy="10800"/>
+            </a:xfrm>
+            <a:prstGeom prst="straightConnector1">
+              <a:avLst/>
+            </a:prstGeom>
+            <a:noFill/>
+            <a:ln cap="flat" cmpd="sng" w="9525">
+              <a:solidFill>
+                <a:srgbClr val="F4B400"/>
+              </a:solidFill>
+              <a:prstDash val="solid"/>
+              <a:round/>
+              <a:headEnd len="sm" w="sm" type="none"/>
+              <a:tailEnd len="med" w="med" type="oval"/>
+            </a:ln>
+          </p:spPr>
+        </p:cxnSp>
+        <p:sp>
+          <p:nvSpPr>
+            <p:cNvPr id="159" name="Google Shape;159;p17"/>
+            <p:cNvSpPr txBox="1"/>
+            <p:nvPr/>
+          </p:nvSpPr>
+          <p:spPr>
+            <a:xfrm>
+              <a:off x="5033096" y="2717050"/>
+              <a:ext cx="1431900" cy="924600"/>
+            </a:xfrm>
+            <a:prstGeom prst="rect">
+              <a:avLst/>
+            </a:prstGeom>
+            <a:noFill/>
+            <a:ln>
+              <a:noFill/>
+            </a:ln>
+          </p:spPr>
+          <p:txBody>
+            <a:bodyPr anchorCtr="0" anchor="ctr" bIns="91425" lIns="91425" spcFirstLastPara="1" rIns="91425" wrap="square" tIns="91425">
+              <a:noAutofit/>
+            </a:bodyPr>
+            <a:lstStyle/>
+            <a:p>
+              <a:pPr indent="0" lvl="0" marL="0" rtl="0" algn="l">
+                <a:spcBef>
+                  <a:spcPts val="0"/>
+                </a:spcBef>
+                <a:spcAft>
+                  <a:spcPts val="0"/>
+                </a:spcAft>
+                <a:buNone/>
+              </a:pPr>
+              <a:r>
+                <a:rPr b="1" lang="en" sz="1200">
+                  <a:latin typeface="Roboto"/>
+                  <a:ea typeface="Roboto"/>
+                  <a:cs typeface="Roboto"/>
+                  <a:sym typeface="Roboto"/>
+                </a:rPr>
+                <a:t>Dashboard Creation and KPI calculation</a:t>
+              </a:r>
+              <a:endParaRPr b="1" sz="800">
+                <a:latin typeface="Roboto"/>
+                <a:ea typeface="Roboto"/>
+                <a:cs typeface="Roboto"/>
+                <a:sym typeface="Roboto"/>
+              </a:endParaRPr>
+            </a:p>
+            <a:p>
+              <a:pPr indent="0" lvl="0" marL="0" rtl="0" algn="l">
+                <a:lnSpc>
+                  <a:spcPct val="115000"/>
+                </a:lnSpc>
+                <a:spcBef>
+                  <a:spcPts val="0"/>
+                </a:spcBef>
+                <a:spcAft>
+                  <a:spcPts val="0"/>
+                </a:spcAft>
+                <a:buNone/>
+              </a:pPr>
+              <a:r>
+                <a:rPr lang="en" sz="1000">
+                  <a:latin typeface="Times New Roman"/>
+                  <a:ea typeface="Times New Roman"/>
+                  <a:cs typeface="Times New Roman"/>
+                  <a:sym typeface="Times New Roman"/>
+                </a:rPr>
+                <a:t>Created a simple and elegant dashboard using different visuals and DAX measures like victory margin %.  </a:t>
+              </a:r>
+              <a:endParaRPr sz="800">
+                <a:latin typeface="Roboto"/>
+                <a:ea typeface="Roboto"/>
+                <a:cs typeface="Roboto"/>
+                <a:sym typeface="Roboto"/>
+              </a:endParaRPr>
+            </a:p>
+          </p:txBody>
+        </p:sp>
+      </p:grpSp>
+      <p:grpSp>
+        <p:nvGrpSpPr>
+          <p:cNvPr id="160" name="Google Shape;160;p17"/>
+          <p:cNvGrpSpPr/>
+          <p:nvPr/>
+        </p:nvGrpSpPr>
+        <p:grpSpPr>
+          <a:xfrm rot="189957">
+            <a:off x="1932258" y="920133"/>
+            <a:ext cx="3231333" cy="3226634"/>
+            <a:chOff x="2610905" y="610653"/>
+            <a:chExt cx="3922200" cy="3922200"/>
+          </a:xfrm>
+        </p:grpSpPr>
+        <p:sp>
+          <p:nvSpPr>
+            <p:cNvPr id="161" name="Google Shape;161;p17"/>
+            <p:cNvSpPr/>
+            <p:nvPr/>
+          </p:nvSpPr>
+          <p:spPr>
+            <a:xfrm rot="-4980021">
+              <a:off x="3204123" y="1186472"/>
+              <a:ext cx="2771960" cy="2771960"/>
+            </a:xfrm>
+            <a:prstGeom prst="blockArc">
+              <a:avLst>
+                <a:gd fmla="val 12602522" name="adj1"/>
+                <a:gd fmla="val 16867657" name="adj2"/>
+                <a:gd fmla="val 20844" name="adj3"/>
+              </a:avLst>
+            </a:prstGeom>
+            <a:solidFill>
+              <a:srgbClr val="C06ECF"/>
+            </a:solidFill>
+            <a:ln>
+              <a:noFill/>
+            </a:ln>
+          </p:spPr>
+          <p:txBody>
+            <a:bodyPr anchorCtr="0" anchor="ctr" bIns="75325" lIns="75325" spcFirstLastPara="1" rIns="75325" wrap="square" tIns="75325">
+              <a:noAutofit/>
+            </a:bodyPr>
+            <a:lstStyle/>
+            <a:p>
+              <a:pPr indent="0" lvl="0" marL="0" rtl="0" algn="l">
+                <a:spcBef>
+                  <a:spcPts val="0"/>
+                </a:spcBef>
+                <a:spcAft>
+                  <a:spcPts val="0"/>
+                </a:spcAft>
+                <a:buNone/>
+              </a:pPr>
+              <a:r>
+                <a:t/>
+              </a:r>
+              <a:endParaRPr sz="1161"/>
+            </a:p>
+          </p:txBody>
+        </p:sp>
+        <p:sp>
+          <p:nvSpPr>
+            <p:cNvPr id="162" name="Google Shape;162;p17"/>
+            <p:cNvSpPr/>
+            <p:nvPr/>
+          </p:nvSpPr>
+          <p:spPr>
+            <a:xfrm rot="7920309">
+              <a:off x="3183402" y="1183149"/>
+              <a:ext cx="2777207" cy="2777207"/>
+            </a:xfrm>
+            <a:prstGeom prst="blockArc">
+              <a:avLst>
+                <a:gd fmla="val 12602522" name="adj1"/>
+                <a:gd fmla="val 16867657" name="adj2"/>
+                <a:gd fmla="val 20844" name="adj3"/>
+              </a:avLst>
+            </a:prstGeom>
+            <a:solidFill>
+              <a:srgbClr val="842F93"/>
+            </a:solidFill>
+            <a:ln>
+              <a:noFill/>
+            </a:ln>
+          </p:spPr>
+          <p:txBody>
+            <a:bodyPr anchorCtr="0" anchor="ctr" bIns="75325" lIns="75325" spcFirstLastPara="1" rIns="75325" wrap="square" tIns="75325">
+              <a:noAutofit/>
+            </a:bodyPr>
+            <a:lstStyle/>
+            <a:p>
+              <a:pPr indent="0" lvl="0" marL="0" rtl="0" algn="l">
+                <a:spcBef>
+                  <a:spcPts val="0"/>
+                </a:spcBef>
+                <a:spcAft>
+                  <a:spcPts val="0"/>
+                </a:spcAft>
+                <a:buNone/>
+              </a:pPr>
+              <a:r>
+                <a:t/>
+              </a:r>
+              <a:endParaRPr/>
+            </a:p>
+          </p:txBody>
+        </p:sp>
+        <p:sp>
+          <p:nvSpPr>
+            <p:cNvPr id="163" name="Google Shape;163;p17"/>
+            <p:cNvSpPr/>
+            <p:nvPr/>
+          </p:nvSpPr>
+          <p:spPr>
+            <a:xfrm rot="3600063">
+              <a:off x="3186335" y="1195681"/>
+              <a:ext cx="2777488" cy="2777488"/>
+            </a:xfrm>
+            <a:prstGeom prst="blockArc">
+              <a:avLst>
+                <a:gd fmla="val 12602522" name="adj1"/>
+                <a:gd fmla="val 16867657" name="adj2"/>
+                <a:gd fmla="val 20844" name="adj3"/>
+              </a:avLst>
+            </a:prstGeom>
+            <a:solidFill>
+              <a:srgbClr val="9325A5"/>
+            </a:solidFill>
+            <a:ln>
+              <a:noFill/>
+            </a:ln>
+          </p:spPr>
+          <p:txBody>
+            <a:bodyPr anchorCtr="0" anchor="ctr" bIns="75325" lIns="75325" spcFirstLastPara="1" rIns="75325" wrap="square" tIns="75325">
+              <a:noAutofit/>
+            </a:bodyPr>
+            <a:lstStyle/>
+            <a:p>
+              <a:pPr indent="0" lvl="0" marL="0" rtl="0" algn="l">
+                <a:spcBef>
+                  <a:spcPts val="0"/>
+                </a:spcBef>
+                <a:spcAft>
+                  <a:spcPts val="0"/>
+                </a:spcAft>
+                <a:buNone/>
+              </a:pPr>
+              <a:r>
+                <a:t/>
+              </a:r>
+              <a:endParaRPr/>
+            </a:p>
+          </p:txBody>
+        </p:sp>
+        <p:sp>
+          <p:nvSpPr>
+            <p:cNvPr id="164" name="Google Shape;164;p17"/>
+            <p:cNvSpPr/>
+            <p:nvPr/>
+          </p:nvSpPr>
+          <p:spPr>
+            <a:xfrm rot="4024705">
+              <a:off x="5326681" y="1940898"/>
+              <a:ext cx="578477" cy="579147"/>
+            </a:xfrm>
+            <a:prstGeom prst="pie">
+              <a:avLst>
+                <a:gd fmla="val 6190354" name="adj1"/>
+                <a:gd fmla="val 14996165" name="adj2"/>
+              </a:avLst>
+            </a:prstGeom>
+            <a:solidFill>
+              <a:srgbClr val="701C7F"/>
+            </a:solidFill>
+            <a:ln>
+              <a:noFill/>
+            </a:ln>
+            <a:effectLst>
+              <a:outerShdw blurRad="117711" rotWithShape="0" algn="bl">
+                <a:srgbClr val="000000">
+                  <a:alpha val="43000"/>
+                </a:srgbClr>
+              </a:outerShdw>
+            </a:effectLst>
+          </p:spPr>
+          <p:txBody>
+            <a:bodyPr anchorCtr="0" anchor="ctr" bIns="75325" lIns="75325" spcFirstLastPara="1" rIns="75325" wrap="square" tIns="75325">
+              <a:noAutofit/>
+            </a:bodyPr>
+            <a:lstStyle/>
+            <a:p>
+              <a:pPr indent="0" lvl="0" marL="0" rtl="0" algn="l">
+                <a:spcBef>
+                  <a:spcPts val="0"/>
+                </a:spcBef>
+                <a:spcAft>
+                  <a:spcPts val="0"/>
+                </a:spcAft>
+                <a:buNone/>
+              </a:pPr>
+              <a:r>
+                <a:t/>
+              </a:r>
+              <a:endParaRPr/>
+            </a:p>
+          </p:txBody>
+        </p:sp>
+        <p:sp>
+          <p:nvSpPr>
+            <p:cNvPr id="165" name="Google Shape;165;p17"/>
+            <p:cNvSpPr/>
+            <p:nvPr/>
+          </p:nvSpPr>
+          <p:spPr>
+            <a:xfrm rot="-6816027">
+              <a:off x="5326729" y="1940918"/>
+              <a:ext cx="578485" cy="579035"/>
+            </a:xfrm>
+            <a:prstGeom prst="pie">
+              <a:avLst>
+                <a:gd fmla="val 4028252" name="adj1"/>
+                <a:gd fmla="val 17183677" name="adj2"/>
+              </a:avLst>
+            </a:prstGeom>
+            <a:solidFill>
+              <a:srgbClr val="701C7F"/>
+            </a:solidFill>
+            <a:ln>
+              <a:noFill/>
+            </a:ln>
+          </p:spPr>
+          <p:txBody>
+            <a:bodyPr anchorCtr="0" anchor="ctr" bIns="75325" lIns="75325" spcFirstLastPara="1" rIns="75325" wrap="square" tIns="75325">
+              <a:noAutofit/>
+            </a:bodyPr>
+            <a:lstStyle/>
+            <a:p>
+              <a:pPr indent="0" lvl="0" marL="0" rtl="0" algn="l">
+                <a:spcBef>
+                  <a:spcPts val="0"/>
+                </a:spcBef>
+                <a:spcAft>
+                  <a:spcPts val="0"/>
+                </a:spcAft>
+                <a:buNone/>
+              </a:pPr>
+              <a:r>
+                <a:t/>
+              </a:r>
+              <a:endParaRPr/>
+            </a:p>
+          </p:txBody>
+        </p:sp>
+        <p:sp>
+          <p:nvSpPr>
+            <p:cNvPr id="166" name="Google Shape;166;p17"/>
+            <p:cNvSpPr/>
+            <p:nvPr/>
+          </p:nvSpPr>
+          <p:spPr>
+            <a:xfrm rot="-9359762">
+              <a:off x="3193941" y="1176205"/>
+              <a:ext cx="2777287" cy="2777287"/>
+            </a:xfrm>
+            <a:prstGeom prst="blockArc">
+              <a:avLst>
+                <a:gd fmla="val 12602522" name="adj1"/>
+                <a:gd fmla="val 16867657" name="adj2"/>
+                <a:gd fmla="val 20844" name="adj3"/>
+              </a:avLst>
+            </a:prstGeom>
+            <a:solidFill>
+              <a:srgbClr val="771E86"/>
+            </a:solidFill>
+            <a:ln>
+              <a:noFill/>
+            </a:ln>
+          </p:spPr>
+          <p:txBody>
+            <a:bodyPr anchorCtr="0" anchor="ctr" bIns="75325" lIns="75325" spcFirstLastPara="1" rIns="75325" wrap="square" tIns="75325">
+              <a:noAutofit/>
+            </a:bodyPr>
+            <a:lstStyle/>
+            <a:p>
+              <a:pPr indent="0" lvl="0" marL="0" rtl="0" algn="l">
+                <a:spcBef>
+                  <a:spcPts val="0"/>
+                </a:spcBef>
+                <a:spcAft>
+                  <a:spcPts val="0"/>
+                </a:spcAft>
+                <a:buNone/>
+              </a:pPr>
+              <a:r>
+                <a:t/>
+              </a:r>
+              <a:endParaRPr/>
+            </a:p>
+          </p:txBody>
+        </p:sp>
+        <p:sp>
+          <p:nvSpPr>
+            <p:cNvPr id="167" name="Google Shape;167;p17"/>
+            <p:cNvSpPr/>
+            <p:nvPr/>
+          </p:nvSpPr>
+          <p:spPr>
+            <a:xfrm rot="-8936366">
+              <a:off x="3659126" y="3173505"/>
+              <a:ext cx="578551" cy="578963"/>
+            </a:xfrm>
+            <a:prstGeom prst="pie">
+              <a:avLst>
+                <a:gd fmla="val 6190354" name="adj1"/>
+                <a:gd fmla="val 14996165" name="adj2"/>
+              </a:avLst>
+            </a:prstGeom>
+            <a:solidFill>
+              <a:srgbClr val="701C7F"/>
+            </a:solidFill>
+            <a:ln>
+              <a:noFill/>
+            </a:ln>
+            <a:effectLst>
+              <a:outerShdw blurRad="117711" rotWithShape="0" algn="bl">
+                <a:srgbClr val="000000">
+                  <a:alpha val="43000"/>
+                </a:srgbClr>
+              </a:outerShdw>
+            </a:effectLst>
+          </p:spPr>
+          <p:txBody>
+            <a:bodyPr anchorCtr="0" anchor="ctr" bIns="75325" lIns="75325" spcFirstLastPara="1" rIns="75325" wrap="square" tIns="75325">
+              <a:noAutofit/>
+            </a:bodyPr>
+            <a:lstStyle/>
+            <a:p>
+              <a:pPr indent="0" lvl="0" marL="0" rtl="0" algn="l">
+                <a:spcBef>
+                  <a:spcPts val="0"/>
+                </a:spcBef>
+                <a:spcAft>
+                  <a:spcPts val="0"/>
+                </a:spcAft>
+                <a:buNone/>
+              </a:pPr>
+              <a:r>
+                <a:t/>
+              </a:r>
+              <a:endParaRPr/>
+            </a:p>
+          </p:txBody>
+        </p:sp>
+        <p:sp>
+          <p:nvSpPr>
+            <p:cNvPr id="148" name="Google Shape;148;p17"/>
+            <p:cNvSpPr/>
+            <p:nvPr/>
+          </p:nvSpPr>
+          <p:spPr>
+            <a:xfrm rot="1824498">
+              <a:off x="3659375" y="3173497"/>
+              <a:ext cx="578475" cy="578885"/>
+            </a:xfrm>
+            <a:prstGeom prst="pie">
+              <a:avLst>
+                <a:gd fmla="val 4028252" name="adj1"/>
+                <a:gd fmla="val 17183677" name="adj2"/>
+              </a:avLst>
+            </a:prstGeom>
+            <a:solidFill>
+              <a:srgbClr val="701C7F"/>
+            </a:solidFill>
+            <a:ln>
+              <a:noFill/>
+            </a:ln>
+          </p:spPr>
+          <p:txBody>
+            <a:bodyPr anchorCtr="0" anchor="ctr" bIns="75325" lIns="75325" spcFirstLastPara="1" rIns="75325" wrap="square" tIns="75325">
+              <a:noAutofit/>
+            </a:bodyPr>
+            <a:lstStyle/>
+            <a:p>
+              <a:pPr indent="0" lvl="0" marL="0" rtl="0" algn="l">
+                <a:spcBef>
+                  <a:spcPts val="0"/>
+                </a:spcBef>
+                <a:spcAft>
+                  <a:spcPts val="0"/>
+                </a:spcAft>
+                <a:buNone/>
+              </a:pPr>
+              <a:r>
+                <a:t/>
+              </a:r>
+              <a:endParaRPr/>
+            </a:p>
+          </p:txBody>
+        </p:sp>
+        <p:sp>
+          <p:nvSpPr>
+            <p:cNvPr id="168" name="Google Shape;168;p17"/>
+            <p:cNvSpPr/>
+            <p:nvPr/>
+          </p:nvSpPr>
+          <p:spPr>
+            <a:xfrm rot="-600092">
+              <a:off x="3198852" y="1195456"/>
+              <a:ext cx="2777611" cy="2777611"/>
+            </a:xfrm>
+            <a:prstGeom prst="blockArc">
+              <a:avLst>
+                <a:gd fmla="val 12513247" name="adj1"/>
+                <a:gd fmla="val 16867657" name="adj2"/>
+                <a:gd fmla="val 20844" name="adj3"/>
+              </a:avLst>
+            </a:prstGeom>
+            <a:solidFill>
+              <a:srgbClr val="701C7F"/>
+            </a:solidFill>
+            <a:ln>
+              <a:noFill/>
+            </a:ln>
+          </p:spPr>
+          <p:txBody>
+            <a:bodyPr anchorCtr="0" anchor="ctr" bIns="75325" lIns="75325" spcFirstLastPara="1" rIns="75325" wrap="square" tIns="75325">
+              <a:noAutofit/>
+            </a:bodyPr>
+            <a:lstStyle/>
+            <a:p>
+              <a:pPr indent="0" lvl="0" marL="0" rtl="0" algn="l">
+                <a:spcBef>
+                  <a:spcPts val="0"/>
+                </a:spcBef>
+                <a:spcAft>
+                  <a:spcPts val="0"/>
+                </a:spcAft>
+                <a:buNone/>
+              </a:pPr>
+              <a:r>
+                <a:t/>
+              </a:r>
+              <a:endParaRPr/>
+            </a:p>
+          </p:txBody>
+        </p:sp>
+        <p:sp>
+          <p:nvSpPr>
+            <p:cNvPr id="169" name="Google Shape;169;p17"/>
+            <p:cNvSpPr/>
+            <p:nvPr/>
+          </p:nvSpPr>
+          <p:spPr>
+            <a:xfrm rot="-176551">
+              <a:off x="4312105" y="1195442"/>
+              <a:ext cx="578563" cy="579162"/>
+            </a:xfrm>
+            <a:prstGeom prst="pie">
+              <a:avLst>
+                <a:gd fmla="val 6190354" name="adj1"/>
+                <a:gd fmla="val 14996165" name="adj2"/>
+              </a:avLst>
+            </a:prstGeom>
+            <a:solidFill>
+              <a:srgbClr val="701C7F"/>
+            </a:solidFill>
+            <a:ln>
+              <a:noFill/>
+            </a:ln>
+            <a:effectLst>
+              <a:outerShdw blurRad="117711" rotWithShape="0" algn="bl">
+                <a:srgbClr val="000000">
+                  <a:alpha val="43000"/>
+                </a:srgbClr>
+              </a:outerShdw>
+            </a:effectLst>
+          </p:spPr>
+          <p:txBody>
+            <a:bodyPr anchorCtr="0" anchor="ctr" bIns="75325" lIns="75325" spcFirstLastPara="1" rIns="75325" wrap="square" tIns="75325">
+              <a:noAutofit/>
+            </a:bodyPr>
+            <a:lstStyle/>
+            <a:p>
+              <a:pPr indent="0" lvl="0" marL="0" rtl="0" algn="l">
+                <a:spcBef>
+                  <a:spcPts val="0"/>
+                </a:spcBef>
+                <a:spcAft>
+                  <a:spcPts val="0"/>
+                </a:spcAft>
+                <a:buNone/>
+              </a:pPr>
+              <a:r>
+                <a:t/>
+              </a:r>
+              <a:endParaRPr/>
+            </a:p>
+          </p:txBody>
+        </p:sp>
+        <p:sp>
+          <p:nvSpPr>
+            <p:cNvPr id="170" name="Google Shape;170;p17"/>
+            <p:cNvSpPr/>
+            <p:nvPr/>
+          </p:nvSpPr>
+          <p:spPr>
+            <a:xfrm rot="10584085">
+              <a:off x="4312088" y="1195622"/>
+              <a:ext cx="578340" cy="578939"/>
+            </a:xfrm>
+            <a:prstGeom prst="pie">
+              <a:avLst>
+                <a:gd fmla="val 4028252" name="adj1"/>
+                <a:gd fmla="val 17183677" name="adj2"/>
+              </a:avLst>
+            </a:prstGeom>
+            <a:solidFill>
+              <a:srgbClr val="701C7F"/>
+            </a:solidFill>
+            <a:ln>
+              <a:noFill/>
+            </a:ln>
+          </p:spPr>
+          <p:txBody>
+            <a:bodyPr anchorCtr="0" anchor="ctr" bIns="75325" lIns="75325" spcFirstLastPara="1" rIns="75325" wrap="square" tIns="75325">
+              <a:noAutofit/>
+            </a:bodyPr>
+            <a:lstStyle/>
+            <a:p>
+              <a:pPr indent="0" lvl="0" marL="0" rtl="0" algn="l">
+                <a:spcBef>
+                  <a:spcPts val="0"/>
+                </a:spcBef>
+                <a:spcAft>
+                  <a:spcPts val="0"/>
+                </a:spcAft>
+                <a:buNone/>
+              </a:pPr>
+              <a:r>
+                <a:t/>
+              </a:r>
+              <a:endParaRPr/>
+            </a:p>
+          </p:txBody>
+        </p:sp>
+        <p:sp>
+          <p:nvSpPr>
+            <p:cNvPr id="171" name="Google Shape;171;p17"/>
+            <p:cNvSpPr/>
+            <p:nvPr/>
+          </p:nvSpPr>
+          <p:spPr>
+            <a:xfrm rot="8344778">
+              <a:off x="4940929" y="3162886"/>
+              <a:ext cx="578465" cy="578888"/>
+            </a:xfrm>
+            <a:prstGeom prst="pie">
+              <a:avLst>
+                <a:gd fmla="val 6190354" name="adj1"/>
+                <a:gd fmla="val 14996165" name="adj2"/>
+              </a:avLst>
+            </a:prstGeom>
+            <a:solidFill>
+              <a:srgbClr val="701C7F"/>
+            </a:solidFill>
+            <a:ln>
+              <a:noFill/>
+            </a:ln>
+            <a:effectLst>
+              <a:outerShdw blurRad="117711" rotWithShape="0" algn="bl">
+                <a:srgbClr val="000000">
+                  <a:alpha val="43000"/>
+                </a:srgbClr>
+              </a:outerShdw>
+            </a:effectLst>
+          </p:spPr>
+          <p:txBody>
+            <a:bodyPr anchorCtr="0" anchor="ctr" bIns="75325" lIns="75325" spcFirstLastPara="1" rIns="75325" wrap="square" tIns="75325">
+              <a:noAutofit/>
+            </a:bodyPr>
+            <a:lstStyle/>
+            <a:p>
+              <a:pPr indent="0" lvl="0" marL="0" rtl="0" algn="l">
+                <a:spcBef>
+                  <a:spcPts val="0"/>
+                </a:spcBef>
+                <a:spcAft>
+                  <a:spcPts val="0"/>
+                </a:spcAft>
+                <a:buNone/>
+              </a:pPr>
+              <a:r>
+                <a:t/>
+              </a:r>
+              <a:endParaRPr/>
+            </a:p>
+          </p:txBody>
+        </p:sp>
+        <p:sp>
+          <p:nvSpPr>
+            <p:cNvPr id="172" name="Google Shape;172;p17"/>
+            <p:cNvSpPr/>
+            <p:nvPr/>
+          </p:nvSpPr>
+          <p:spPr>
+            <a:xfrm rot="-2495643">
+              <a:off x="4941000" y="3162728"/>
+              <a:ext cx="578445" cy="579093"/>
+            </a:xfrm>
+            <a:prstGeom prst="pie">
+              <a:avLst>
+                <a:gd fmla="val 4028252" name="adj1"/>
+                <a:gd fmla="val 17183677" name="adj2"/>
+              </a:avLst>
+            </a:prstGeom>
+            <a:solidFill>
+              <a:srgbClr val="701C7F"/>
+            </a:solidFill>
+            <a:ln>
+              <a:noFill/>
+            </a:ln>
+          </p:spPr>
+          <p:txBody>
+            <a:bodyPr anchorCtr="0" anchor="ctr" bIns="75325" lIns="75325" spcFirstLastPara="1" rIns="75325" wrap="square" tIns="75325">
+              <a:noAutofit/>
+            </a:bodyPr>
+            <a:lstStyle/>
+            <a:p>
+              <a:pPr indent="0" lvl="0" marL="0" rtl="0" algn="l">
+                <a:spcBef>
+                  <a:spcPts val="0"/>
+                </a:spcBef>
+                <a:spcAft>
+                  <a:spcPts val="0"/>
+                </a:spcAft>
+                <a:buNone/>
+              </a:pPr>
+              <a:r>
+                <a:t/>
+              </a:r>
+              <a:endParaRPr/>
+            </a:p>
+          </p:txBody>
+        </p:sp>
+        <p:sp>
+          <p:nvSpPr>
+            <p:cNvPr id="173" name="Google Shape;173;p17"/>
+            <p:cNvSpPr/>
+            <p:nvPr/>
+          </p:nvSpPr>
+          <p:spPr>
+            <a:xfrm rot="-4556960">
+              <a:off x="3257335" y="1939059"/>
+              <a:ext cx="578302" cy="578957"/>
+            </a:xfrm>
+            <a:prstGeom prst="pie">
+              <a:avLst>
+                <a:gd fmla="val 6190354" name="adj1"/>
+                <a:gd fmla="val 14996165" name="adj2"/>
+              </a:avLst>
+            </a:prstGeom>
+            <a:solidFill>
+              <a:srgbClr val="701C7F"/>
+            </a:solidFill>
+            <a:ln>
+              <a:noFill/>
+            </a:ln>
+            <a:effectLst>
+              <a:outerShdw blurRad="117711" rotWithShape="0" algn="bl">
+                <a:srgbClr val="000000">
+                  <a:alpha val="43000"/>
+                </a:srgbClr>
+              </a:outerShdw>
+            </a:effectLst>
+          </p:spPr>
+          <p:txBody>
+            <a:bodyPr anchorCtr="0" anchor="ctr" bIns="75325" lIns="75325" spcFirstLastPara="1" rIns="75325" wrap="square" tIns="75325">
+              <a:noAutofit/>
+            </a:bodyPr>
+            <a:lstStyle/>
+            <a:p>
+              <a:pPr indent="0" lvl="0" marL="0" rtl="0" algn="l">
+                <a:spcBef>
+                  <a:spcPts val="0"/>
+                </a:spcBef>
+                <a:spcAft>
+                  <a:spcPts val="0"/>
+                </a:spcAft>
+                <a:buNone/>
+              </a:pPr>
+              <a:r>
+                <a:t/>
+              </a:r>
+              <a:endParaRPr/>
+            </a:p>
+          </p:txBody>
+        </p:sp>
+        <p:sp>
+          <p:nvSpPr>
+            <p:cNvPr id="174" name="Google Shape;174;p17"/>
+            <p:cNvSpPr/>
+            <p:nvPr/>
+          </p:nvSpPr>
+          <p:spPr>
+            <a:xfrm rot="6204541">
+              <a:off x="3257468" y="1938977"/>
+              <a:ext cx="578264" cy="578917"/>
+            </a:xfrm>
+            <a:prstGeom prst="pie">
+              <a:avLst>
+                <a:gd fmla="val 4028252" name="adj1"/>
+                <a:gd fmla="val 17183677" name="adj2"/>
+              </a:avLst>
+            </a:prstGeom>
+            <a:solidFill>
+              <a:srgbClr val="701C7F"/>
+            </a:solidFill>
+            <a:ln>
+              <a:noFill/>
+            </a:ln>
+          </p:spPr>
+          <p:txBody>
+            <a:bodyPr anchorCtr="0" anchor="ctr" bIns="75325" lIns="75325" spcFirstLastPara="1" rIns="75325" wrap="square" tIns="75325">
+              <a:noAutofit/>
+            </a:bodyPr>
+            <a:lstStyle/>
+            <a:p>
+              <a:pPr indent="0" lvl="0" marL="0" rtl="0" algn="l">
+                <a:spcBef>
+                  <a:spcPts val="0"/>
+                </a:spcBef>
+                <a:spcAft>
+                  <a:spcPts val="0"/>
+                </a:spcAft>
+                <a:buNone/>
+              </a:pPr>
+              <a:r>
+                <a:t/>
+              </a:r>
+              <a:endParaRPr/>
+            </a:p>
+          </p:txBody>
+        </p:sp>
+        <p:sp>
+          <p:nvSpPr>
+            <p:cNvPr id="175" name="Google Shape;175;p17"/>
+            <p:cNvSpPr txBox="1"/>
+            <p:nvPr/>
+          </p:nvSpPr>
+          <p:spPr>
+            <a:xfrm>
+              <a:off x="4341900" y="1271896"/>
+              <a:ext cx="507900" cy="266100"/>
+            </a:xfrm>
+            <a:prstGeom prst="rect">
+              <a:avLst/>
+            </a:prstGeom>
+            <a:solidFill>
+              <a:srgbClr val="701C7F"/>
+            </a:solidFill>
+            <a:ln>
+              <a:noFill/>
+            </a:ln>
+          </p:spPr>
+          <p:txBody>
+            <a:bodyPr anchorCtr="0" anchor="t" bIns="75325" lIns="75325" spcFirstLastPara="1" rIns="75325" wrap="square" tIns="75325">
+              <a:noAutofit/>
+            </a:bodyPr>
+            <a:lstStyle/>
+            <a:p>
+              <a:pPr indent="0" lvl="0" marL="0" rtl="0" algn="ctr">
+                <a:spcBef>
+                  <a:spcPts val="0"/>
+                </a:spcBef>
+                <a:spcAft>
+                  <a:spcPts val="0"/>
+                </a:spcAft>
+                <a:buNone/>
+              </a:pPr>
+              <a:r>
+                <a:rPr b="1" lang="en" sz="1318">
+                  <a:solidFill>
+                    <a:srgbClr val="FFFFFF"/>
+                  </a:solidFill>
+                  <a:latin typeface="Roboto"/>
+                  <a:ea typeface="Roboto"/>
+                  <a:cs typeface="Roboto"/>
+                  <a:sym typeface="Roboto"/>
+                </a:rPr>
+                <a:t>01</a:t>
+              </a:r>
+              <a:endParaRPr b="1" sz="1318">
+                <a:solidFill>
+                  <a:srgbClr val="FFFFFF"/>
+                </a:solidFill>
+                <a:latin typeface="Roboto"/>
+                <a:ea typeface="Roboto"/>
+                <a:cs typeface="Roboto"/>
+                <a:sym typeface="Roboto"/>
+              </a:endParaRPr>
+            </a:p>
+          </p:txBody>
+        </p:sp>
+        <p:sp>
+          <p:nvSpPr>
+            <p:cNvPr id="176" name="Google Shape;176;p17"/>
+            <p:cNvSpPr txBox="1"/>
+            <p:nvPr/>
+          </p:nvSpPr>
+          <p:spPr>
+            <a:xfrm>
+              <a:off x="3274219" y="2018364"/>
+              <a:ext cx="507900" cy="266100"/>
+            </a:xfrm>
+            <a:prstGeom prst="rect">
+              <a:avLst/>
+            </a:prstGeom>
+            <a:solidFill>
+              <a:srgbClr val="701C7F"/>
+            </a:solidFill>
+            <a:ln>
+              <a:noFill/>
+            </a:ln>
+          </p:spPr>
+          <p:txBody>
+            <a:bodyPr anchorCtr="0" anchor="t" bIns="75325" lIns="75325" spcFirstLastPara="1" rIns="75325" wrap="square" tIns="75325">
+              <a:noAutofit/>
+            </a:bodyPr>
+            <a:lstStyle/>
+            <a:p>
+              <a:pPr indent="0" lvl="0" marL="0" rtl="0" algn="ctr">
+                <a:spcBef>
+                  <a:spcPts val="0"/>
+                </a:spcBef>
+                <a:spcAft>
+                  <a:spcPts val="0"/>
+                </a:spcAft>
+                <a:buNone/>
+              </a:pPr>
+              <a:r>
+                <a:rPr b="1" lang="en" sz="1318">
+                  <a:solidFill>
+                    <a:srgbClr val="FFFFFF"/>
+                  </a:solidFill>
+                  <a:latin typeface="Roboto"/>
+                  <a:ea typeface="Roboto"/>
+                  <a:cs typeface="Roboto"/>
+                  <a:sym typeface="Roboto"/>
+                </a:rPr>
+                <a:t>02</a:t>
+              </a:r>
+              <a:endParaRPr b="1" sz="1318">
+                <a:solidFill>
+                  <a:srgbClr val="FFFFFF"/>
+                </a:solidFill>
+                <a:latin typeface="Roboto"/>
+                <a:ea typeface="Roboto"/>
+                <a:cs typeface="Roboto"/>
+                <a:sym typeface="Roboto"/>
+              </a:endParaRPr>
+            </a:p>
+          </p:txBody>
+        </p:sp>
+        <p:sp>
+          <p:nvSpPr>
+            <p:cNvPr id="177" name="Google Shape;177;p17"/>
+            <p:cNvSpPr txBox="1"/>
+            <p:nvPr/>
+          </p:nvSpPr>
+          <p:spPr>
+            <a:xfrm>
+              <a:off x="3685317" y="3247321"/>
+              <a:ext cx="507900" cy="266100"/>
+            </a:xfrm>
+            <a:prstGeom prst="rect">
+              <a:avLst/>
+            </a:prstGeom>
+            <a:solidFill>
+              <a:srgbClr val="701C7F"/>
+            </a:solidFill>
+            <a:ln>
+              <a:noFill/>
+            </a:ln>
+          </p:spPr>
+          <p:txBody>
+            <a:bodyPr anchorCtr="0" anchor="t" bIns="75325" lIns="75325" spcFirstLastPara="1" rIns="75325" wrap="square" tIns="75325">
+              <a:noAutofit/>
+            </a:bodyPr>
+            <a:lstStyle/>
+            <a:p>
+              <a:pPr indent="0" lvl="0" marL="0" rtl="0" algn="ctr">
+                <a:spcBef>
+                  <a:spcPts val="0"/>
+                </a:spcBef>
+                <a:spcAft>
+                  <a:spcPts val="0"/>
+                </a:spcAft>
+                <a:buNone/>
+              </a:pPr>
+              <a:r>
+                <a:rPr b="1" lang="en" sz="1318">
+                  <a:solidFill>
+                    <a:srgbClr val="FFFFFF"/>
+                  </a:solidFill>
+                  <a:latin typeface="Roboto"/>
+                  <a:ea typeface="Roboto"/>
+                  <a:cs typeface="Roboto"/>
+                  <a:sym typeface="Roboto"/>
+                </a:rPr>
+                <a:t>03</a:t>
+              </a:r>
+              <a:endParaRPr b="1" sz="1318">
+                <a:solidFill>
+                  <a:srgbClr val="FFFFFF"/>
+                </a:solidFill>
+                <a:latin typeface="Roboto"/>
+                <a:ea typeface="Roboto"/>
+                <a:cs typeface="Roboto"/>
+                <a:sym typeface="Roboto"/>
+              </a:endParaRPr>
+            </a:p>
+          </p:txBody>
+        </p:sp>
+        <p:sp>
+          <p:nvSpPr>
+            <p:cNvPr id="178" name="Google Shape;178;p17"/>
+            <p:cNvSpPr txBox="1"/>
+            <p:nvPr/>
+          </p:nvSpPr>
+          <p:spPr>
+            <a:xfrm>
+              <a:off x="4955323" y="3247321"/>
+              <a:ext cx="507900" cy="266100"/>
+            </a:xfrm>
+            <a:prstGeom prst="rect">
+              <a:avLst/>
+            </a:prstGeom>
+            <a:solidFill>
+              <a:srgbClr val="701C7F"/>
+            </a:solidFill>
+            <a:ln>
+              <a:noFill/>
+            </a:ln>
+          </p:spPr>
+          <p:txBody>
+            <a:bodyPr anchorCtr="0" anchor="t" bIns="75325" lIns="75325" spcFirstLastPara="1" rIns="75325" wrap="square" tIns="75325">
+              <a:noAutofit/>
+            </a:bodyPr>
+            <a:lstStyle/>
+            <a:p>
+              <a:pPr indent="0" lvl="0" marL="0" rtl="0" algn="ctr">
+                <a:spcBef>
+                  <a:spcPts val="0"/>
+                </a:spcBef>
+                <a:spcAft>
+                  <a:spcPts val="0"/>
+                </a:spcAft>
+                <a:buNone/>
+              </a:pPr>
+              <a:r>
+                <a:rPr b="1" lang="en" sz="1318">
+                  <a:solidFill>
+                    <a:srgbClr val="FFFFFF"/>
+                  </a:solidFill>
+                  <a:latin typeface="Roboto"/>
+                  <a:ea typeface="Roboto"/>
+                  <a:cs typeface="Roboto"/>
+                  <a:sym typeface="Roboto"/>
+                </a:rPr>
+                <a:t>04</a:t>
+              </a:r>
+              <a:endParaRPr b="1" sz="1318">
+                <a:solidFill>
+                  <a:srgbClr val="FFFFFF"/>
+                </a:solidFill>
+                <a:latin typeface="Roboto"/>
+                <a:ea typeface="Roboto"/>
+                <a:cs typeface="Roboto"/>
+                <a:sym typeface="Roboto"/>
+              </a:endParaRPr>
+            </a:p>
+          </p:txBody>
+        </p:sp>
+        <p:sp>
+          <p:nvSpPr>
+            <p:cNvPr id="158" name="Google Shape;158;p17"/>
+            <p:cNvSpPr txBox="1"/>
+            <p:nvPr/>
+          </p:nvSpPr>
+          <p:spPr>
+            <a:xfrm>
+              <a:off x="5364737" y="2018364"/>
+              <a:ext cx="507900" cy="266100"/>
+            </a:xfrm>
+            <a:prstGeom prst="rect">
+              <a:avLst/>
+            </a:prstGeom>
+            <a:solidFill>
+              <a:srgbClr val="701C7F"/>
+            </a:solidFill>
+            <a:ln>
+              <a:noFill/>
+            </a:ln>
+          </p:spPr>
+          <p:txBody>
+            <a:bodyPr anchorCtr="0" anchor="t" bIns="75325" lIns="75325" spcFirstLastPara="1" rIns="75325" wrap="square" tIns="75325">
+              <a:noAutofit/>
+            </a:bodyPr>
+            <a:lstStyle/>
+            <a:p>
+              <a:pPr indent="0" lvl="0" marL="0" rtl="0" algn="ctr">
+                <a:spcBef>
+                  <a:spcPts val="0"/>
+                </a:spcBef>
+                <a:spcAft>
+                  <a:spcPts val="0"/>
+                </a:spcAft>
+                <a:buNone/>
+              </a:pPr>
+              <a:r>
+                <a:rPr b="1" lang="en" sz="1318">
+                  <a:solidFill>
+                    <a:srgbClr val="FFFFFF"/>
+                  </a:solidFill>
+                  <a:latin typeface="Roboto"/>
+                  <a:ea typeface="Roboto"/>
+                  <a:cs typeface="Roboto"/>
+                  <a:sym typeface="Roboto"/>
+                </a:rPr>
+                <a:t>05</a:t>
+              </a:r>
+              <a:endParaRPr b="1" sz="1318">
+                <a:solidFill>
+                  <a:srgbClr val="FFFFFF"/>
+                </a:solidFill>
+                <a:latin typeface="Roboto"/>
+                <a:ea typeface="Roboto"/>
+                <a:cs typeface="Roboto"/>
+                <a:sym typeface="Roboto"/>
+              </a:endParaRPr>
+            </a:p>
+          </p:txBody>
+        </p:sp>
+      </p:grpSp>
+      <p:sp>
+        <p:nvSpPr>
+          <p:cNvPr id="179" name="Google Shape;179;p17"/>
           <p:cNvSpPr txBox="1"/>
           <p:nvPr/>
         </p:nvSpPr>
@@ -12622,7 +15440,7 @@
                 <a:cs typeface="Times New Roman"/>
                 <a:sym typeface="Times New Roman"/>
               </a:rPr>
-              <a:t>Execution of Milestone</a:t>
+              <a:t>Project Execution</a:t>
             </a:r>
             <a:endParaRPr b="1" sz="2700">
               <a:solidFill>
@@ -12636,6 +15454,34 @@
           </a:p>
         </p:txBody>
       </p:sp>
+      <p:pic>
+        <p:nvPicPr>
+          <p:cNvPr id="180" name="Google Shape;180;p17"/>
+          <p:cNvPicPr preferRelativeResize="0"/>
+          <p:nvPr/>
+        </p:nvPicPr>
+        <p:blipFill>
+          <a:blip r:embed="rId3">
+            <a:alphaModFix/>
+          </a:blip>
+          <a:stretch>
+            <a:fillRect/>
+          </a:stretch>
+        </p:blipFill>
+        <p:spPr>
+          <a:xfrm>
+            <a:off x="6940800" y="276625"/>
+            <a:ext cx="2062001" cy="3471450"/>
+          </a:xfrm>
+          <a:prstGeom prst="rect">
+            <a:avLst/>
+          </a:prstGeom>
+          <a:noFill/>
+          <a:ln>
+            <a:noFill/>
+          </a:ln>
+        </p:spPr>
+      </p:pic>
     </p:spTree>
   </p:cSld>
   <p:clrMapOvr>
@@ -12649,7 +15495,7 @@
   <p:cSld>
     <p:spTree>
       <p:nvGrpSpPr>
-        <p:cNvPr id="148" name="Shape 148"/>
+        <p:cNvPr id="184" name="Shape 184"/>
         <p:cNvGrpSpPr/>
         <p:nvPr/>
       </p:nvGrpSpPr>
@@ -12663,7 +15509,7 @@
       </p:grpSpPr>
       <p:sp>
         <p:nvSpPr>
-          <p:cNvPr id="149" name="Google Shape;149;p18"/>
+          <p:cNvPr id="185" name="Google Shape;185;p18"/>
           <p:cNvSpPr txBox="1"/>
           <p:nvPr>
             <p:ph type="title"/>
@@ -12713,7 +15559,7 @@
       </p:sp>
       <p:pic>
         <p:nvPicPr>
-          <p:cNvPr id="150" name="Google Shape;150;p18"/>
+          <p:cNvPr id="186" name="Google Shape;186;p18"/>
           <p:cNvPicPr preferRelativeResize="0"/>
           <p:nvPr/>
         </p:nvPicPr>
@@ -12728,7 +15574,7 @@
         <p:spPr>
           <a:xfrm>
             <a:off x="737825" y="1166600"/>
-            <a:ext cx="3313875" cy="1687975"/>
+            <a:ext cx="3366500" cy="1687975"/>
           </a:xfrm>
           <a:prstGeom prst="rect">
             <a:avLst/>
@@ -12741,7 +15587,7 @@
       </p:pic>
       <p:pic>
         <p:nvPicPr>
-          <p:cNvPr id="151" name="Google Shape;151;p18"/>
+          <p:cNvPr id="187" name="Google Shape;187;p18"/>
           <p:cNvPicPr preferRelativeResize="0"/>
           <p:nvPr/>
         </p:nvPicPr>
@@ -12756,7 +15602,7 @@
         <p:spPr>
           <a:xfrm>
             <a:off x="737825" y="2919525"/>
-            <a:ext cx="3313874" cy="1687975"/>
+            <a:ext cx="3366501" cy="1687975"/>
           </a:xfrm>
           <a:prstGeom prst="rect">
             <a:avLst/>
@@ -12769,7 +15615,7 @@
       </p:pic>
       <p:pic>
         <p:nvPicPr>
-          <p:cNvPr id="152" name="Google Shape;152;p18"/>
+          <p:cNvPr id="188" name="Google Shape;188;p18"/>
           <p:cNvPicPr preferRelativeResize="0"/>
           <p:nvPr/>
         </p:nvPicPr>
@@ -12783,8 +15629,8 @@
         </p:blipFill>
         <p:spPr>
           <a:xfrm>
-            <a:off x="5221750" y="2919525"/>
-            <a:ext cx="3199425" cy="1687975"/>
+            <a:off x="5221750" y="1145070"/>
+            <a:ext cx="3206325" cy="1709505"/>
           </a:xfrm>
           <a:prstGeom prst="rect">
             <a:avLst/>
@@ -12797,7 +15643,7 @@
       </p:pic>
       <p:pic>
         <p:nvPicPr>
-          <p:cNvPr id="153" name="Google Shape;153;p18"/>
+          <p:cNvPr id="189" name="Google Shape;189;p18"/>
           <p:cNvPicPr preferRelativeResize="0"/>
           <p:nvPr/>
         </p:nvPicPr>
@@ -12811,8 +15657,36 @@
         </p:blipFill>
         <p:spPr>
           <a:xfrm>
-            <a:off x="5221750" y="1181100"/>
-            <a:ext cx="3172699" cy="1658975"/>
+            <a:off x="5221750" y="2919525"/>
+            <a:ext cx="3206325" cy="1687975"/>
+          </a:xfrm>
+          <a:prstGeom prst="rect">
+            <a:avLst/>
+          </a:prstGeom>
+          <a:noFill/>
+          <a:ln>
+            <a:noFill/>
+          </a:ln>
+        </p:spPr>
+      </p:pic>
+      <p:pic>
+        <p:nvPicPr>
+          <p:cNvPr id="190" name="Google Shape;190;p18"/>
+          <p:cNvPicPr preferRelativeResize="0"/>
+          <p:nvPr/>
+        </p:nvPicPr>
+        <p:blipFill>
+          <a:blip r:embed="rId7">
+            <a:alphaModFix/>
+          </a:blip>
+          <a:stretch>
+            <a:fillRect/>
+          </a:stretch>
+        </p:blipFill>
+        <p:spPr>
+          <a:xfrm>
+            <a:off x="3452450" y="1166600"/>
+            <a:ext cx="651875" cy="265325"/>
           </a:xfrm>
           <a:prstGeom prst="rect">
             <a:avLst/>
@@ -12836,7 +15710,7 @@
   <p:cSld>
     <p:spTree>
       <p:nvGrpSpPr>
-        <p:cNvPr id="157" name="Shape 157"/>
+        <p:cNvPr id="194" name="Shape 194"/>
         <p:cNvGrpSpPr/>
         <p:nvPr/>
       </p:nvGrpSpPr>
@@ -12848,121 +15722,9 @@
           <a:chExt cx="0" cy="0"/>
         </a:xfrm>
       </p:grpSpPr>
-      <p:pic>
-        <p:nvPicPr>
-          <p:cNvPr id="158" name="Google Shape;158;p19"/>
-          <p:cNvPicPr preferRelativeResize="0"/>
-          <p:nvPr/>
-        </p:nvPicPr>
-        <p:blipFill>
-          <a:blip r:embed="rId3">
-            <a:alphaModFix/>
-          </a:blip>
-          <a:stretch>
-            <a:fillRect/>
-          </a:stretch>
-        </p:blipFill>
-        <p:spPr>
-          <a:xfrm>
-            <a:off x="280775" y="830850"/>
-            <a:ext cx="3551024" cy="1916524"/>
-          </a:xfrm>
-          <a:prstGeom prst="rect">
-            <a:avLst/>
-          </a:prstGeom>
-          <a:noFill/>
-          <a:ln>
-            <a:noFill/>
-          </a:ln>
-        </p:spPr>
-      </p:pic>
-      <p:pic>
-        <p:nvPicPr>
-          <p:cNvPr id="159" name="Google Shape;159;p19"/>
-          <p:cNvPicPr preferRelativeResize="0"/>
-          <p:nvPr/>
-        </p:nvPicPr>
-        <p:blipFill>
-          <a:blip r:embed="rId4">
-            <a:alphaModFix/>
-          </a:blip>
-          <a:stretch>
-            <a:fillRect/>
-          </a:stretch>
-        </p:blipFill>
-        <p:spPr>
-          <a:xfrm>
-            <a:off x="280775" y="2853175"/>
-            <a:ext cx="3551025" cy="1916525"/>
-          </a:xfrm>
-          <a:prstGeom prst="rect">
-            <a:avLst/>
-          </a:prstGeom>
-          <a:noFill/>
-          <a:ln>
-            <a:noFill/>
-          </a:ln>
-        </p:spPr>
-      </p:pic>
-      <p:pic>
-        <p:nvPicPr>
-          <p:cNvPr id="160" name="Google Shape;160;p19"/>
-          <p:cNvPicPr preferRelativeResize="0"/>
-          <p:nvPr/>
-        </p:nvPicPr>
-        <p:blipFill>
-          <a:blip r:embed="rId5">
-            <a:alphaModFix/>
-          </a:blip>
-          <a:stretch>
-            <a:fillRect/>
-          </a:stretch>
-        </p:blipFill>
-        <p:spPr>
-          <a:xfrm>
-            <a:off x="4803400" y="830850"/>
-            <a:ext cx="3662001" cy="1916525"/>
-          </a:xfrm>
-          <a:prstGeom prst="rect">
-            <a:avLst/>
-          </a:prstGeom>
-          <a:noFill/>
-          <a:ln>
-            <a:noFill/>
-          </a:ln>
-        </p:spPr>
-      </p:pic>
-      <p:pic>
-        <p:nvPicPr>
-          <p:cNvPr id="161" name="Google Shape;161;p19"/>
-          <p:cNvPicPr preferRelativeResize="0"/>
-          <p:nvPr/>
-        </p:nvPicPr>
-        <p:blipFill>
-          <a:blip r:embed="rId6">
-            <a:alphaModFix/>
-          </a:blip>
-          <a:stretch>
-            <a:fillRect/>
-          </a:stretch>
-        </p:blipFill>
-        <p:spPr>
-          <a:xfrm>
-            <a:off x="4914375" y="2853175"/>
-            <a:ext cx="3551025" cy="1916525"/>
-          </a:xfrm>
-          <a:prstGeom prst="rect">
-            <a:avLst/>
-          </a:prstGeom>
-          <a:noFill/>
-          <a:ln>
-            <a:noFill/>
-          </a:ln>
-        </p:spPr>
-      </p:pic>
       <p:sp>
         <p:nvSpPr>
-          <p:cNvPr id="162" name="Google Shape;162;p19"/>
+          <p:cNvPr id="195" name="Google Shape;195;p19"/>
           <p:cNvSpPr txBox="1"/>
           <p:nvPr/>
         </p:nvSpPr>
@@ -13010,6 +15772,117 @@
           </a:p>
         </p:txBody>
       </p:sp>
+      <p:pic>
+        <p:nvPicPr>
+          <p:cNvPr id="196" name="Google Shape;196;p19"/>
+          <p:cNvPicPr preferRelativeResize="0"/>
+          <p:nvPr/>
+        </p:nvPicPr>
+        <p:blipFill>
+          <a:blip r:embed="rId3">
+            <a:alphaModFix/>
+          </a:blip>
+          <a:stretch>
+            <a:fillRect/>
+          </a:stretch>
+        </p:blipFill>
+        <p:spPr>
+          <a:xfrm>
+            <a:off x="4948600" y="2817975"/>
+            <a:ext cx="3341200" cy="1951725"/>
+          </a:xfrm>
+          <a:prstGeom prst="rect">
+            <a:avLst/>
+          </a:prstGeom>
+          <a:noFill/>
+          <a:ln>
+            <a:noFill/>
+          </a:ln>
+        </p:spPr>
+      </p:pic>
+      <p:pic>
+        <p:nvPicPr>
+          <p:cNvPr id="197" name="Google Shape;197;p19"/>
+          <p:cNvPicPr preferRelativeResize="0"/>
+          <p:nvPr/>
+        </p:nvPicPr>
+        <p:blipFill>
+          <a:blip r:embed="rId4">
+            <a:alphaModFix/>
+          </a:blip>
+          <a:stretch>
+            <a:fillRect/>
+          </a:stretch>
+        </p:blipFill>
+        <p:spPr>
+          <a:xfrm>
+            <a:off x="492475" y="2899775"/>
+            <a:ext cx="3285350" cy="1866675"/>
+          </a:xfrm>
+          <a:prstGeom prst="rect">
+            <a:avLst/>
+          </a:prstGeom>
+          <a:noFill/>
+          <a:ln>
+            <a:noFill/>
+          </a:ln>
+        </p:spPr>
+      </p:pic>
+      <p:pic>
+        <p:nvPicPr>
+          <p:cNvPr id="198" name="Google Shape;198;p19"/>
+          <p:cNvPicPr preferRelativeResize="0"/>
+          <p:nvPr/>
+        </p:nvPicPr>
+        <p:blipFill>
+          <a:blip r:embed="rId5">
+            <a:alphaModFix/>
+          </a:blip>
+          <a:stretch>
+            <a:fillRect/>
+          </a:stretch>
+        </p:blipFill>
+        <p:spPr>
+          <a:xfrm>
+            <a:off x="4948600" y="798900"/>
+            <a:ext cx="3341199" cy="1866675"/>
+          </a:xfrm>
+          <a:prstGeom prst="rect">
+            <a:avLst/>
+          </a:prstGeom>
+          <a:noFill/>
+          <a:ln>
+            <a:noFill/>
+          </a:ln>
+        </p:spPr>
+      </p:pic>
+      <p:pic>
+        <p:nvPicPr>
+          <p:cNvPr id="199" name="Google Shape;199;p19"/>
+          <p:cNvPicPr preferRelativeResize="0"/>
+          <p:nvPr/>
+        </p:nvPicPr>
+        <p:blipFill rotWithShape="1">
+          <a:blip r:embed="rId6">
+            <a:alphaModFix/>
+          </a:blip>
+          <a:srcRect b="0" l="2969" r="0" t="0"/>
+          <a:stretch/>
+        </p:blipFill>
+        <p:spPr>
+          <a:xfrm>
+            <a:off x="492475" y="798900"/>
+            <a:ext cx="3285350" cy="1948475"/>
+          </a:xfrm>
+          <a:prstGeom prst="rect">
+            <a:avLst/>
+          </a:prstGeom>
+          <a:noFill/>
+          <a:ln>
+            <a:noFill/>
+          </a:ln>
+        </p:spPr>
+      </p:pic>
     </p:spTree>
   </p:cSld>
   <p:clrMapOvr>
@@ -13023,7 +15896,7 @@
   <p:cSld>
     <p:spTree>
       <p:nvGrpSpPr>
-        <p:cNvPr id="166" name="Shape 166"/>
+        <p:cNvPr id="203" name="Shape 203"/>
         <p:cNvGrpSpPr/>
         <p:nvPr/>
       </p:nvGrpSpPr>
@@ -13037,7 +15910,7 @@
       </p:grpSpPr>
       <p:sp>
         <p:nvSpPr>
-          <p:cNvPr id="167" name="Google Shape;167;p20"/>
+          <p:cNvPr id="204" name="Google Shape;204;p20"/>
           <p:cNvSpPr txBox="1"/>
           <p:nvPr>
             <p:ph type="title"/>
@@ -13087,7 +15960,7 @@
       </p:sp>
       <p:graphicFrame>
         <p:nvGraphicFramePr>
-          <p:cNvPr id="168" name="Google Shape;168;p20"/>
+          <p:cNvPr id="205" name="Google Shape;205;p20"/>
           <p:cNvGraphicFramePr/>
           <p:nvPr/>
         </p:nvGraphicFramePr>
@@ -13100,7 +15973,7 @@
             <a:tbl>
               <a:tblPr>
                 <a:noFill/>
-                <a:tableStyleId>{5CB63D9F-CFB3-42ED-8EE2-2041360BAB3A}</a:tableStyleId>
+                <a:tableStyleId>{BED59372-A20B-40F8-8136-38D034288E66}</a:tableStyleId>
               </a:tblPr>
               <a:tblGrid>
                 <a:gridCol w="4345375"/>
@@ -13606,7 +16479,7 @@
       </p:graphicFrame>
       <p:pic>
         <p:nvPicPr>
-          <p:cNvPr id="169" name="Google Shape;169;p20"/>
+          <p:cNvPr id="206" name="Google Shape;206;p20"/>
           <p:cNvPicPr preferRelativeResize="0"/>
           <p:nvPr/>
         </p:nvPicPr>
@@ -13645,7 +16518,7 @@
   <p:cSld>
     <p:spTree>
       <p:nvGrpSpPr>
-        <p:cNvPr id="173" name="Shape 173"/>
+        <p:cNvPr id="210" name="Shape 210"/>
         <p:cNvGrpSpPr/>
         <p:nvPr/>
       </p:nvGrpSpPr>
@@ -13659,7 +16532,7 @@
       </p:grpSpPr>
       <p:sp>
         <p:nvSpPr>
-          <p:cNvPr id="174" name="Google Shape;174;p21"/>
+          <p:cNvPr id="211" name="Google Shape;211;p21"/>
           <p:cNvSpPr txBox="1"/>
           <p:nvPr/>
         </p:nvSpPr>
@@ -14042,6 +16915,285 @@
 </file>
 
 <file path=ppt/theme/theme1.xml><?xml version="1.0" encoding="utf-8"?>
+<a:theme xmlns:a="http://schemas.openxmlformats.org/drawingml/2006/main" xmlns:r="http://schemas.openxmlformats.org/officeDocument/2006/relationships">
+  <a:themeElements>
+    <a:clrScheme name="Default">
+      <a:dk1>
+        <a:srgbClr val="000000"/>
+      </a:dk1>
+      <a:lt1>
+        <a:srgbClr val="FFFFFF"/>
+      </a:lt1>
+      <a:dk2>
+        <a:srgbClr val="158158"/>
+      </a:dk2>
+      <a:lt2>
+        <a:srgbClr val="F3F3F3"/>
+      </a:lt2>
+      <a:accent1>
+        <a:srgbClr val="058DC7"/>
+      </a:accent1>
+      <a:accent2>
+        <a:srgbClr val="50B432"/>
+      </a:accent2>
+      <a:accent3>
+        <a:srgbClr val="ED561B"/>
+      </a:accent3>
+      <a:accent4>
+        <a:srgbClr val="EDEF00"/>
+      </a:accent4>
+      <a:accent5>
+        <a:srgbClr val="24CBE5"/>
+      </a:accent5>
+      <a:accent6>
+        <a:srgbClr val="64E572"/>
+      </a:accent6>
+      <a:hlink>
+        <a:srgbClr val="2200CC"/>
+      </a:hlink>
+      <a:folHlink>
+        <a:srgbClr val="551A8B"/>
+      </a:folHlink>
+    </a:clrScheme>
+    <a:fontScheme name="Office">
+      <a:majorFont>
+        <a:latin typeface="Arial"/>
+        <a:ea typeface=""/>
+        <a:cs typeface=""/>
+        <a:font script="Jpan" typeface="ＭＳ Ｐゴシック"/>
+        <a:font script="Hang" typeface="맑은 고딕"/>
+        <a:font script="Hans" typeface="宋体"/>
+        <a:font script="Hant" typeface="新細明體"/>
+        <a:font script="Arab" typeface="Times New Roman"/>
+        <a:font script="Hebr" typeface="Times New Roman"/>
+        <a:font script="Thai" typeface="Angsana New"/>
+        <a:font script="Ethi" typeface="Nyala"/>
+        <a:font script="Beng" typeface="Vrinda"/>
+        <a:font script="Gujr" typeface="Shruti"/>
+        <a:font script="Khmr" typeface="MoolBoran"/>
+        <a:font script="Knda" typeface="Tunga"/>
+        <a:font script="Guru" typeface="Raavi"/>
+        <a:font script="Cans" typeface="Euphemia"/>
+        <a:font script="Cher" typeface="Plantagenet Cherokee"/>
+        <a:font script="Yiii" typeface="Microsoft Yi Baiti"/>
+        <a:font script="Tibt" typeface="Microsoft Himalaya"/>
+        <a:font script="Thaa" typeface="MV Boli"/>
+        <a:font script="Deva" typeface="Mangal"/>
+        <a:font script="Telu" typeface="Gautami"/>
+        <a:font script="Taml" typeface="Latha"/>
+        <a:font script="Syrc" typeface="Estrangelo Edessa"/>
+        <a:font script="Orya" typeface="Kalinga"/>
+        <a:font script="Mlym" typeface="Kartika"/>
+        <a:font script="Laoo" typeface="DokChampa"/>
+        <a:font script="Sinh" typeface="Iskoola Pota"/>
+        <a:font script="Mong" typeface="Mongolian Baiti"/>
+        <a:font script="Viet" typeface="Times New Roman"/>
+        <a:font script="Uigh" typeface="Microsoft Uighur"/>
+        <a:font script="Geor" typeface="Sylfaen"/>
+      </a:majorFont>
+      <a:minorFont>
+        <a:latin typeface="Arial"/>
+        <a:ea typeface=""/>
+        <a:cs typeface=""/>
+        <a:font script="Jpan" typeface="ＭＳ Ｐゴシック"/>
+        <a:font script="Hang" typeface="맑은 고딕"/>
+        <a:font script="Hans" typeface="宋体"/>
+        <a:font script="Hant" typeface="新細明體"/>
+        <a:font script="Arab" typeface="Arial"/>
+        <a:font script="Hebr" typeface="Arial"/>
+        <a:font script="Thai" typeface="Cordia New"/>
+        <a:font script="Ethi" typeface="Nyala"/>
+        <a:font script="Beng" typeface="Vrinda"/>
+        <a:font script="Gujr" typeface="Shruti"/>
+        <a:font script="Khmr" typeface="DaunPenh"/>
+        <a:font script="Knda" typeface="Tunga"/>
+        <a:font script="Guru" typeface="Raavi"/>
+        <a:font script="Cans" typeface="Euphemia"/>
+        <a:font script="Cher" typeface="Plantagenet Cherokee"/>
+        <a:font script="Yiii" typeface="Microsoft Yi Baiti"/>
+        <a:font script="Tibt" typeface="Microsoft Himalaya"/>
+        <a:font script="Thaa" typeface="MV Boli"/>
+        <a:font script="Deva" typeface="Mangal"/>
+        <a:font script="Telu" typeface="Gautami"/>
+        <a:font script="Taml" typeface="Latha"/>
+        <a:font script="Syrc" typeface="Estrangelo Edessa"/>
+        <a:font script="Orya" typeface="Kalinga"/>
+        <a:font script="Mlym" typeface="Kartika"/>
+        <a:font script="Laoo" typeface="DokChampa"/>
+        <a:font script="Sinh" typeface="Iskoola Pota"/>
+        <a:font script="Mong" typeface="Mongolian Baiti"/>
+        <a:font script="Viet" typeface="Arial"/>
+        <a:font script="Uigh" typeface="Microsoft Uighur"/>
+        <a:font script="Geor" typeface="Sylfaen"/>
+      </a:minorFont>
+    </a:fontScheme>
+    <a:fmtScheme name="Office">
+      <a:fillStyleLst>
+        <a:solidFill>
+          <a:schemeClr val="phClr"/>
+        </a:solidFill>
+        <a:gradFill rotWithShape="1">
+          <a:gsLst>
+            <a:gs pos="0">
+              <a:schemeClr val="phClr">
+                <a:tint val="50000"/>
+                <a:satMod val="300000"/>
+              </a:schemeClr>
+            </a:gs>
+            <a:gs pos="35000">
+              <a:schemeClr val="phClr">
+                <a:tint val="37000"/>
+                <a:satMod val="300000"/>
+              </a:schemeClr>
+            </a:gs>
+            <a:gs pos="100000">
+              <a:schemeClr val="phClr">
+                <a:tint val="15000"/>
+                <a:satMod val="350000"/>
+              </a:schemeClr>
+            </a:gs>
+          </a:gsLst>
+          <a:lin ang="16200000" scaled="1"/>
+        </a:gradFill>
+        <a:gradFill rotWithShape="1">
+          <a:gsLst>
+            <a:gs pos="0">
+              <a:schemeClr val="phClr">
+                <a:tint val="100000"/>
+                <a:shade val="100000"/>
+                <a:satMod val="130000"/>
+              </a:schemeClr>
+            </a:gs>
+            <a:gs pos="100000">
+              <a:schemeClr val="phClr">
+                <a:tint val="50000"/>
+                <a:shade val="100000"/>
+                <a:satMod val="350000"/>
+              </a:schemeClr>
+            </a:gs>
+          </a:gsLst>
+          <a:lin ang="16200000" scaled="0"/>
+        </a:gradFill>
+      </a:fillStyleLst>
+      <a:lnStyleLst>
+        <a:ln w="9525" cap="flat" cmpd="sng" algn="ctr">
+          <a:solidFill>
+            <a:schemeClr val="phClr">
+              <a:shade val="95000"/>
+              <a:satMod val="105000"/>
+            </a:schemeClr>
+          </a:solidFill>
+          <a:prstDash val="solid"/>
+        </a:ln>
+        <a:ln w="25400" cap="flat" cmpd="sng" algn="ctr">
+          <a:solidFill>
+            <a:schemeClr val="phClr"/>
+          </a:solidFill>
+          <a:prstDash val="solid"/>
+        </a:ln>
+        <a:ln w="38100" cap="flat" cmpd="sng" algn="ctr">
+          <a:solidFill>
+            <a:schemeClr val="phClr"/>
+          </a:solidFill>
+          <a:prstDash val="solid"/>
+        </a:ln>
+      </a:lnStyleLst>
+      <a:effectStyleLst>
+        <a:effectStyle>
+          <a:effectLst>
+            <a:outerShdw blurRad="40000" dist="20000" dir="5400000" rotWithShape="0">
+              <a:srgbClr val="000000">
+                <a:alpha val="38000"/>
+              </a:srgbClr>
+            </a:outerShdw>
+          </a:effectLst>
+        </a:effectStyle>
+        <a:effectStyle>
+          <a:effectLst>
+            <a:outerShdw blurRad="40000" dist="23000" dir="5400000" rotWithShape="0">
+              <a:srgbClr val="000000">
+                <a:alpha val="35000"/>
+              </a:srgbClr>
+            </a:outerShdw>
+          </a:effectLst>
+        </a:effectStyle>
+        <a:effectStyle>
+          <a:effectLst>
+            <a:outerShdw blurRad="40000" dist="23000" dir="5400000" rotWithShape="0">
+              <a:srgbClr val="000000">
+                <a:alpha val="35000"/>
+              </a:srgbClr>
+            </a:outerShdw>
+          </a:effectLst>
+          <a:scene3d>
+            <a:camera prst="orthographicFront">
+              <a:rot lat="0" lon="0" rev="0"/>
+            </a:camera>
+            <a:lightRig rig="threePt" dir="t">
+              <a:rot lat="0" lon="0" rev="1200000"/>
+            </a:lightRig>
+          </a:scene3d>
+          <a:sp3d>
+            <a:bevelT w="63500" h="25400"/>
+          </a:sp3d>
+        </a:effectStyle>
+      </a:effectStyleLst>
+      <a:bgFillStyleLst>
+        <a:solidFill>
+          <a:schemeClr val="phClr"/>
+        </a:solidFill>
+        <a:gradFill rotWithShape="1">
+          <a:gsLst>
+            <a:gs pos="0">
+              <a:schemeClr val="phClr">
+                <a:tint val="40000"/>
+                <a:satMod val="350000"/>
+              </a:schemeClr>
+            </a:gs>
+            <a:gs pos="40000">
+              <a:schemeClr val="phClr">
+                <a:tint val="45000"/>
+                <a:shade val="99000"/>
+                <a:satMod val="350000"/>
+              </a:schemeClr>
+            </a:gs>
+            <a:gs pos="100000">
+              <a:schemeClr val="phClr">
+                <a:shade val="20000"/>
+                <a:satMod val="255000"/>
+              </a:schemeClr>
+            </a:gs>
+          </a:gsLst>
+          <a:path path="circle">
+            <a:fillToRect l="50000" t="-80000" r="50000" b="180000"/>
+          </a:path>
+        </a:gradFill>
+        <a:gradFill rotWithShape="1">
+          <a:gsLst>
+            <a:gs pos="0">
+              <a:schemeClr val="phClr">
+                <a:tint val="80000"/>
+                <a:satMod val="300000"/>
+              </a:schemeClr>
+            </a:gs>
+            <a:gs pos="100000">
+              <a:schemeClr val="phClr">
+                <a:shade val="30000"/>
+                <a:satMod val="200000"/>
+              </a:schemeClr>
+            </a:gs>
+          </a:gsLst>
+          <a:path path="circle">
+            <a:fillToRect l="50000" t="50000" r="50000" b="50000"/>
+          </a:path>
+        </a:gradFill>
+      </a:bgFillStyleLst>
+    </a:fmtScheme>
+  </a:themeElements>
+</a:theme>
+</file>
+
+<file path=ppt/theme/theme2.xml><?xml version="1.0" encoding="utf-8"?>
 <a:theme xmlns:a="http://schemas.openxmlformats.org/drawingml/2006/main" xmlns:r="http://schemas.openxmlformats.org/officeDocument/2006/relationships" name="Geometric">
   <a:themeElements>
     <a:clrScheme name="Geometric">
@@ -14318,283 +17470,4 @@
     </a:fmtScheme>
   </a:themeElements>
 </a:theme>
-</file>
-
-<file path=ppt/theme/theme2.xml><?xml version="1.0" encoding="utf-8"?>
-<a:theme xmlns:a="http://schemas.openxmlformats.org/drawingml/2006/main" xmlns:r="http://schemas.openxmlformats.org/officeDocument/2006/relationships">
-  <a:themeElements>
-    <a:clrScheme name="Default">
-      <a:dk1>
-        <a:srgbClr val="000000"/>
-      </a:dk1>
-      <a:lt1>
-        <a:srgbClr val="FFFFFF"/>
-      </a:lt1>
-      <a:dk2>
-        <a:srgbClr val="158158"/>
-      </a:dk2>
-      <a:lt2>
-        <a:srgbClr val="F3F3F3"/>
-      </a:lt2>
-      <a:accent1>
-        <a:srgbClr val="058DC7"/>
-      </a:accent1>
-      <a:accent2>
-        <a:srgbClr val="50B432"/>
-      </a:accent2>
-      <a:accent3>
-        <a:srgbClr val="ED561B"/>
-      </a:accent3>
-      <a:accent4>
-        <a:srgbClr val="EDEF00"/>
-      </a:accent4>
-      <a:accent5>
-        <a:srgbClr val="24CBE5"/>
-      </a:accent5>
-      <a:accent6>
-        <a:srgbClr val="64E572"/>
-      </a:accent6>
-      <a:hlink>
-        <a:srgbClr val="2200CC"/>
-      </a:hlink>
-      <a:folHlink>
-        <a:srgbClr val="551A8B"/>
-      </a:folHlink>
-    </a:clrScheme>
-    <a:fontScheme name="Office">
-      <a:majorFont>
-        <a:latin typeface="Arial"/>
-        <a:ea typeface=""/>
-        <a:cs typeface=""/>
-        <a:font script="Jpan" typeface="ＭＳ Ｐゴシック"/>
-        <a:font script="Hang" typeface="맑은 고딕"/>
-        <a:font script="Hans" typeface="宋体"/>
-        <a:font script="Hant" typeface="新細明體"/>
-        <a:font script="Arab" typeface="Times New Roman"/>
-        <a:font script="Hebr" typeface="Times New Roman"/>
-        <a:font script="Thai" typeface="Angsana New"/>
-        <a:font script="Ethi" typeface="Nyala"/>
-        <a:font script="Beng" typeface="Vrinda"/>
-        <a:font script="Gujr" typeface="Shruti"/>
-        <a:font script="Khmr" typeface="MoolBoran"/>
-        <a:font script="Knda" typeface="Tunga"/>
-        <a:font script="Guru" typeface="Raavi"/>
-        <a:font script="Cans" typeface="Euphemia"/>
-        <a:font script="Cher" typeface="Plantagenet Cherokee"/>
-        <a:font script="Yiii" typeface="Microsoft Yi Baiti"/>
-        <a:font script="Tibt" typeface="Microsoft Himalaya"/>
-        <a:font script="Thaa" typeface="MV Boli"/>
-        <a:font script="Deva" typeface="Mangal"/>
-        <a:font script="Telu" typeface="Gautami"/>
-        <a:font script="Taml" typeface="Latha"/>
-        <a:font script="Syrc" typeface="Estrangelo Edessa"/>
-        <a:font script="Orya" typeface="Kalinga"/>
-        <a:font script="Mlym" typeface="Kartika"/>
-        <a:font script="Laoo" typeface="DokChampa"/>
-        <a:font script="Sinh" typeface="Iskoola Pota"/>
-        <a:font script="Mong" typeface="Mongolian Baiti"/>
-        <a:font script="Viet" typeface="Times New Roman"/>
-        <a:font script="Uigh" typeface="Microsoft Uighur"/>
-        <a:font script="Geor" typeface="Sylfaen"/>
-      </a:majorFont>
-      <a:minorFont>
-        <a:latin typeface="Arial"/>
-        <a:ea typeface=""/>
-        <a:cs typeface=""/>
-        <a:font script="Jpan" typeface="ＭＳ Ｐゴシック"/>
-        <a:font script="Hang" typeface="맑은 고딕"/>
-        <a:font script="Hans" typeface="宋体"/>
-        <a:font script="Hant" typeface="新細明體"/>
-        <a:font script="Arab" typeface="Arial"/>
-        <a:font script="Hebr" typeface="Arial"/>
-        <a:font script="Thai" typeface="Cordia New"/>
-        <a:font script="Ethi" typeface="Nyala"/>
-        <a:font script="Beng" typeface="Vrinda"/>
-        <a:font script="Gujr" typeface="Shruti"/>
-        <a:font script="Khmr" typeface="DaunPenh"/>
-        <a:font script="Knda" typeface="Tunga"/>
-        <a:font script="Guru" typeface="Raavi"/>
-        <a:font script="Cans" typeface="Euphemia"/>
-        <a:font script="Cher" typeface="Plantagenet Cherokee"/>
-        <a:font script="Yiii" typeface="Microsoft Yi Baiti"/>
-        <a:font script="Tibt" typeface="Microsoft Himalaya"/>
-        <a:font script="Thaa" typeface="MV Boli"/>
-        <a:font script="Deva" typeface="Mangal"/>
-        <a:font script="Telu" typeface="Gautami"/>
-        <a:font script="Taml" typeface="Latha"/>
-        <a:font script="Syrc" typeface="Estrangelo Edessa"/>
-        <a:font script="Orya" typeface="Kalinga"/>
-        <a:font script="Mlym" typeface="Kartika"/>
-        <a:font script="Laoo" typeface="DokChampa"/>
-        <a:font script="Sinh" typeface="Iskoola Pota"/>
-        <a:font script="Mong" typeface="Mongolian Baiti"/>
-        <a:font script="Viet" typeface="Arial"/>
-        <a:font script="Uigh" typeface="Microsoft Uighur"/>
-        <a:font script="Geor" typeface="Sylfaen"/>
-      </a:minorFont>
-    </a:fontScheme>
-    <a:fmtScheme name="Office">
-      <a:fillStyleLst>
-        <a:solidFill>
-          <a:schemeClr val="phClr"/>
-        </a:solidFill>
-        <a:gradFill rotWithShape="1">
-          <a:gsLst>
-            <a:gs pos="0">
-              <a:schemeClr val="phClr">
-                <a:tint val="50000"/>
-                <a:satMod val="300000"/>
-              </a:schemeClr>
-            </a:gs>
-            <a:gs pos="35000">
-              <a:schemeClr val="phClr">
-                <a:tint val="37000"/>
-                <a:satMod val="300000"/>
-              </a:schemeClr>
-            </a:gs>
-            <a:gs pos="100000">
-              <a:schemeClr val="phClr">
-                <a:tint val="15000"/>
-                <a:satMod val="350000"/>
-              </a:schemeClr>
-            </a:gs>
-          </a:gsLst>
-          <a:lin ang="16200000" scaled="1"/>
-        </a:gradFill>
-        <a:gradFill rotWithShape="1">
-          <a:gsLst>
-            <a:gs pos="0">
-              <a:schemeClr val="phClr">
-                <a:tint val="100000"/>
-                <a:shade val="100000"/>
-                <a:satMod val="130000"/>
-              </a:schemeClr>
-            </a:gs>
-            <a:gs pos="100000">
-              <a:schemeClr val="phClr">
-                <a:tint val="50000"/>
-                <a:shade val="100000"/>
-                <a:satMod val="350000"/>
-              </a:schemeClr>
-            </a:gs>
-          </a:gsLst>
-          <a:lin ang="16200000" scaled="0"/>
-        </a:gradFill>
-      </a:fillStyleLst>
-      <a:lnStyleLst>
-        <a:ln w="9525" cap="flat" cmpd="sng" algn="ctr">
-          <a:solidFill>
-            <a:schemeClr val="phClr">
-              <a:shade val="95000"/>
-              <a:satMod val="105000"/>
-            </a:schemeClr>
-          </a:solidFill>
-          <a:prstDash val="solid"/>
-        </a:ln>
-        <a:ln w="25400" cap="flat" cmpd="sng" algn="ctr">
-          <a:solidFill>
-            <a:schemeClr val="phClr"/>
-          </a:solidFill>
-          <a:prstDash val="solid"/>
-        </a:ln>
-        <a:ln w="38100" cap="flat" cmpd="sng" algn="ctr">
-          <a:solidFill>
-            <a:schemeClr val="phClr"/>
-          </a:solidFill>
-          <a:prstDash val="solid"/>
-        </a:ln>
-      </a:lnStyleLst>
-      <a:effectStyleLst>
-        <a:effectStyle>
-          <a:effectLst>
-            <a:outerShdw blurRad="40000" dist="20000" dir="5400000" rotWithShape="0">
-              <a:srgbClr val="000000">
-                <a:alpha val="38000"/>
-              </a:srgbClr>
-            </a:outerShdw>
-          </a:effectLst>
-        </a:effectStyle>
-        <a:effectStyle>
-          <a:effectLst>
-            <a:outerShdw blurRad="40000" dist="23000" dir="5400000" rotWithShape="0">
-              <a:srgbClr val="000000">
-                <a:alpha val="35000"/>
-              </a:srgbClr>
-            </a:outerShdw>
-          </a:effectLst>
-        </a:effectStyle>
-        <a:effectStyle>
-          <a:effectLst>
-            <a:outerShdw blurRad="40000" dist="23000" dir="5400000" rotWithShape="0">
-              <a:srgbClr val="000000">
-                <a:alpha val="35000"/>
-              </a:srgbClr>
-            </a:outerShdw>
-          </a:effectLst>
-          <a:scene3d>
-            <a:camera prst="orthographicFront">
-              <a:rot lat="0" lon="0" rev="0"/>
-            </a:camera>
-            <a:lightRig rig="threePt" dir="t">
-              <a:rot lat="0" lon="0" rev="1200000"/>
-            </a:lightRig>
-          </a:scene3d>
-          <a:sp3d>
-            <a:bevelT w="63500" h="25400"/>
-          </a:sp3d>
-        </a:effectStyle>
-      </a:effectStyleLst>
-      <a:bgFillStyleLst>
-        <a:solidFill>
-          <a:schemeClr val="phClr"/>
-        </a:solidFill>
-        <a:gradFill rotWithShape="1">
-          <a:gsLst>
-            <a:gs pos="0">
-              <a:schemeClr val="phClr">
-                <a:tint val="40000"/>
-                <a:satMod val="350000"/>
-              </a:schemeClr>
-            </a:gs>
-            <a:gs pos="40000">
-              <a:schemeClr val="phClr">
-                <a:tint val="45000"/>
-                <a:shade val="99000"/>
-                <a:satMod val="350000"/>
-              </a:schemeClr>
-            </a:gs>
-            <a:gs pos="100000">
-              <a:schemeClr val="phClr">
-                <a:shade val="20000"/>
-                <a:satMod val="255000"/>
-              </a:schemeClr>
-            </a:gs>
-          </a:gsLst>
-          <a:path path="circle">
-            <a:fillToRect l="50000" t="-80000" r="50000" b="180000"/>
-          </a:path>
-        </a:gradFill>
-        <a:gradFill rotWithShape="1">
-          <a:gsLst>
-            <a:gs pos="0">
-              <a:schemeClr val="phClr">
-                <a:tint val="80000"/>
-                <a:satMod val="300000"/>
-              </a:schemeClr>
-            </a:gs>
-            <a:gs pos="100000">
-              <a:schemeClr val="phClr">
-                <a:shade val="30000"/>
-                <a:satMod val="200000"/>
-              </a:schemeClr>
-            </a:gs>
-          </a:gsLst>
-          <a:path path="circle">
-            <a:fillToRect l="50000" t="50000" r="50000" b="50000"/>
-          </a:path>
-        </a:gradFill>
-      </a:bgFillStyleLst>
-    </a:fmtScheme>
-  </a:themeElements>
-</a:theme>
 </file>